--- a/decks/day1/module-4-maf-101.pptx
+++ b/decks/day1/module-4-maf-101.pptx
@@ -2415,7 +2415,7 @@
             <a:off x="365760" y="4343400"/>
             <a:ext cx="8412480" cy="457200"/>
           </a:xfrm>
-          <a:prstGeom prst="1">
+          <a:prstGeom prst="rect">
             <a:avLst/>
           </a:prstGeom>
           <a:solidFill>
@@ -4022,7 +4022,7 @@
             <a:off x="365760" y="1097280"/>
             <a:ext cx="8412480" cy="3566160"/>
           </a:xfrm>
-          <a:prstGeom prst="1">
+          <a:prstGeom prst="rect">
             <a:avLst/>
           </a:prstGeom>
           <a:solidFill>
@@ -4432,7 +4432,7 @@
             <a:off x="365760" y="1097280"/>
             <a:ext cx="8412480" cy="3474720"/>
           </a:xfrm>
-          <a:prstGeom prst="1">
+          <a:prstGeom prst="rect">
             <a:avLst/>
           </a:prstGeom>
           <a:solidFill>
@@ -4797,7 +4797,7 @@
             <a:off x="365760" y="1097280"/>
             <a:ext cx="8412480" cy="3566160"/>
           </a:xfrm>
-          <a:prstGeom prst="1">
+          <a:prstGeom prst="rect">
             <a:avLst/>
           </a:prstGeom>
           <a:solidFill>
@@ -5235,7 +5235,7 @@
             <a:off x="365760" y="1737360"/>
             <a:ext cx="8412480" cy="914400"/>
           </a:xfrm>
-          <a:prstGeom prst="1">
+          <a:prstGeom prst="rect">
             <a:avLst/>
           </a:prstGeom>
           <a:solidFill>

--- a/decks/day1/module-4-maf-101.pptx
+++ b/decks/day1/module-4-maf-101.pptx
@@ -1040,7 +1040,7 @@
           <a:p>
             <a:r>
               <a:rPr lang="en-US" dirty="0"/>
-              <a:t>Same shape as Python. Point out AIProjectClient.AsAIAgent(...) as the client-side pattern.</a:t>
+              <a:t>Same shape as Python. AIProjectClient.AsAIAgent(...) is C#'s way to write 'my code calling the Responses API'.</a:t>
             </a:r>
             <a:endParaRPr lang="en-US" dirty="0"/>
           </a:p>
@@ -1216,7 +1216,7 @@
           <a:p>
             <a:r>
               <a:rPr lang="en-US" dirty="0"/>
-              <a:t>Attendees will ask 'where does that state live?' — answer: in the process for client-side agents; server-side for Foundry-hosted (Module 6).</a:t>
+              <a:t>Attendees will ask 'where does that state live?' — for your own MAF process, in the process; for Foundry-hosted Prompt or Hosted agents, server-side (Module 6).</a:t>
             </a:r>
             <a:endParaRPr lang="en-US" dirty="0"/>
           </a:p>
@@ -2084,7 +2084,7 @@
                 <a:ea typeface="Calibri" pitchFamily="34" charset="-122"/>
                 <a:cs typeface="Calibri" pitchFamily="34" charset="-120"/>
               </a:rPr>
-              <a:t>You've now seen a client-side agent — built with Agent + FoundryChatClient (Python) or AIProjectClient.AsAIAgent (C#).</a:t>
+              <a:t>You've now seen the MAF primitives that let your process call the Foundry Responses API — Agent + FoundryChatClient (Python) or AIProjectClient.AsAIAgent (C#).</a:t>
             </a:r>
             <a:endParaRPr lang="en-US" sz="1600" dirty="0"/>
           </a:p>
@@ -2123,7 +2123,7 @@
                 <a:ea typeface="Calibri" pitchFamily="34" charset="-122"/>
                 <a:cs typeface="Calibri" pitchFamily="34" charset="-120"/>
               </a:rPr>
-              <a:t>There's another way to run an agent: have Foundry host it for you. That's a PromptAgent or a HostedAgent in Foundry, connected via FoundryAgent.</a:t>
+              <a:t>That's one of three ways to run an agent with Foundry. The other two — Prompt agents (portal-authored, no code) and Hosted agents (your code, containerized, run by Foundry) — live inside Agent Service and are connected via FoundryAgent.</a:t>
             </a:r>
             <a:endParaRPr lang="en-US" sz="1600" dirty="0"/>
           </a:p>
@@ -2162,7 +2162,7 @@
                 <a:ea typeface="Calibri" pitchFamily="34" charset="-122"/>
                 <a:cs typeface="Calibri" pitchFamily="34" charset="-120"/>
               </a:rPr>
-              <a:t>Module 5 gives us the mental model that ties everything together. Module 6 compares the two hosting styles.</a:t>
+              <a:t>Module 5 gives us the mental model that ties everything together. Module 6 walks all three paths in detail.</a:t>
             </a:r>
             <a:endParaRPr lang="en-US" sz="1500" dirty="0"/>
           </a:p>
@@ -2398,7 +2398,7 @@
                 <a:ea typeface="Calibri" pitchFamily="34" charset="-122"/>
                 <a:cs typeface="Calibri" pitchFamily="34" charset="-120"/>
               </a:rPr>
-              <a:t>Client-side agent is one of two hosting styles — hosted variants next.</a:t>
+              <a:t>The pattern you just saw — your code calling the Responses API — is one of three ways to run an agent. Module 6 covers all three.</a:t>
             </a:r>
             <a:endParaRPr lang="en-US" sz="1500" dirty="0"/>
           </a:p>

--- a/decks/day1/module-4-maf-101.pptx
+++ b/decks/day1/module-4-maf-101.pptx
@@ -512,7 +512,11 @@
           <a:p>
             <a:r>
               <a:rPr lang="en-US" dirty="0"/>
-              <a:t>The most code-dense module of Day 1. Move at a steady pace; call out that Modules 5–6 use everything you show here.</a:t>
+              <a:t>• Most code-dense module of Day 1 — 40 min
+• Move at a steady pace; don't linger on any one snippet
+• Modules 5–6 use everything shown here — reassure attendees they'll see it again
+• Attendees don't need to memorize APIs; they need to recognize the shape
+• If they take away one thing: the six primitives (next slide)</a:t>
             </a:r>
             <a:endParaRPr lang="en-US" dirty="0"/>
           </a:p>
@@ -600,7 +604,10 @@
           <a:p>
             <a:r>
               <a:rPr lang="en-US" dirty="0"/>
-              <a:t>Foreshadow. Don't dive into hosting details here — save for Module 6.</a:t>
+              <a:t>• This is a bridge slide — don't teach hosting here, save for Module 6
+• One sentence: 'you've now seen the primitives; Module 5 gives you the map, Module 6 shows the three ways to run agents'
+• Foreshadow the three paths (Prompt agent, Hosted agent, Responses API from your own code)
+• Attendees should feel: 'oh, there's more than one place this code can run'</a:t>
             </a:r>
             <a:endParaRPr lang="en-US" dirty="0"/>
           </a:p>
@@ -776,7 +783,11 @@
           <a:p>
             <a:r>
               <a:rPr lang="en-US" dirty="0"/>
-              <a:t>For attendees coming from SK / AutoGen — reassure that MAF is the forward direction with cleaner primitives.</a:t>
+              <a:t>• MAF = Microsoft's SDK for building agents (the WHAT)
+• One vocabulary in Python and C# — this is the key value prop
+• First-class Foundry integration
+• For attendees coming from SK or AutoGen: MAF is the forward direction
+• Cleaner primitives, single SDK, active investment</a:t>
             </a:r>
             <a:endParaRPr lang="en-US" dirty="0"/>
           </a:p>
@@ -864,7 +875,12 @@
           <a:p>
             <a:r>
               <a:rPr lang="en-US" dirty="0"/>
-              <a:t>Six primitives. Every day this week uses them. Pause to ask if the names conflict with anything the audience already uses.</a:t>
+              <a:t>• Six primitives — write them on a whiteboard if you can
+•   Chat client, Agent, Thread, Run, Tool, Message
+• Every day this week uses all six
+• Ask: 'do any of these names collide with your team's vocabulary?'
+•   (Some Publix teams may already use 'thread' or 'run' differently)
+• If yes, agree on how you'll disambiguate for the week</a:t>
             </a:r>
             <a:endParaRPr lang="en-US" dirty="0"/>
           </a:p>
@@ -952,7 +968,12 @@
           <a:p>
             <a:r>
               <a:rPr lang="en-US" dirty="0"/>
-              <a:t>That's it. Deployed model + credential + instructions. Emphasize how small this is.</a:t>
+              <a:t>• Say: 'that's it — deployed model + credential + instructions'
+• Emphasize how small this is compared to hand-rolled agent code
+• No boilerplate for tool wiring, message parsing, streaming
+• AzureCliCredential = 'sign in via az login' — no API keys
+• This is the code attendees will run in Part C of the lab today
+• Walk the imports first, then the Agent(...) construction, then .run()</a:t>
             </a:r>
             <a:endParaRPr lang="en-US" dirty="0"/>
           </a:p>
@@ -1040,7 +1061,11 @@
           <a:p>
             <a:r>
               <a:rPr lang="en-US" dirty="0"/>
-              <a:t>Same shape as Python. AIProjectClient.AsAIAgent(...) is C#'s way to write 'my code calling the Responses API'.</a:t>
+              <a:t>• Point out: same shape as Python — this is MAF's design goal
+• AIProjectClient(...).AsAIAgent(...) = C# way to write 'my code calling the Responses API'
+• For attendees writing C#: everything shown in Python this week has a C# equivalent
+• For attendees writing Python: the C# code should feel readable
+• Version pinning: check manifests/versions.md if there's any doubt</a:t>
             </a:r>
             <a:endParaRPr lang="en-US" dirty="0"/>
           </a:p>
@@ -1128,7 +1153,12 @@
           <a:p>
             <a:r>
               <a:rPr lang="en-US" dirty="0"/>
-              <a:t>Streaming matters for UX; we come back to it Day 3 with tool-progress events and cancellation.</a:t>
+              <a:t>• Non-streaming vs. streaming — show the diff in shape
+• Non-streaming: wait for the full response, one call
+• Streaming: process chunks as they arrive (async iterator)
+• Streaming matters for UX — perceived latency drops significantly
+• Day 3 goes deeper: tool-progress events, cancellation, back-pressure
+• In the lab today: attendees will see streaming print chunks live</a:t>
             </a:r>
             <a:endParaRPr lang="en-US" dirty="0"/>
           </a:p>
@@ -1216,7 +1246,12 @@
           <a:p>
             <a:r>
               <a:rPr lang="en-US" dirty="0"/>
-              <a:t>Attendees will ask 'where does that state live?' — for your own MAF process, in the process; for Foundry-hosted Prompt or Hosted agents, server-side (Module 6).</a:t>
+              <a:t>• Attendees WILL ask: 'where does that thread state live?'
+• Answer depends on which of the three paths (Module 6):
+•   Path A (Prompt agent): server-side in Foundry
+•   Path B (Hosted agent): server-side in Foundry
+•   Path C (your code + Responses API): in your process
+• This is the bridge to Module 6 — Module 5 first, then Module 6</a:t>
             </a:r>
             <a:endParaRPr lang="en-US" dirty="0"/>
           </a:p>
@@ -1304,7 +1339,12 @@
           <a:p>
             <a:r>
               <a:rPr lang="en-US" dirty="0"/>
-              <a:t>This is table stakes but attendees will still bring keys from other codebases. Restate: no keys in this workshop's code.</a:t>
+              <a:t>• Table stakes topic, but attendees WILL bring keys from other codebases
+• Restate clearly: NO API keys in this workshop's code
+• Dev on laptop: AzureCliCredential — signs in via az login
+• Production: DefaultAzureCredential or explicit ManagedIdentityCredential
+• If you see a Foundry API key in a code review: reject the PR
+• Day 5 revisits this in the Identity module — plant the flag</a:t>
             </a:r>
             <a:endParaRPr lang="en-US" dirty="0"/>
           </a:p>
@@ -1392,7 +1432,11 @@
           <a:p>
             <a:r>
               <a:rPr lang="en-US" dirty="0"/>
-              <a:t>Version freeze lives in manifests/versions.md. Attendees should not chase newer packages during the workshop.</a:t>
+              <a:t>• Package cheat sheet — attendees don't need to memorize
+• Point them at manifests/versions.md for the frozen versions
+• Cohort 1 freeze happens now; Cohort 2 re-freezes post-Ignite
+• Ask attendees NOT to chase newer packages during the workshop
+• If something breaks with a newer package version, downgrade to the manifest</a:t>
             </a:r>
             <a:endParaRPr lang="en-US" dirty="0"/>
           </a:p>

--- a/decks/day1/module-4-maf-101.pptx
+++ b/decks/day1/module-4-maf-101.pptx
@@ -879,7 +879,7 @@
 •   Chat client, Agent, Thread, Run, Tool, Message
 • Every day this week uses all six
 • Ask: 'do any of these names collide with your team's vocabulary?'
-•   (Some Publix teams may already use 'thread' or 'run' differently)
+•   (some teams may already use 'thread' or 'run' differently in their codebases)
 • If yes, agree on how you'll disambiguate for the week</a:t>
             </a:r>
             <a:endParaRPr lang="en-US" dirty="0"/>
@@ -1434,7 +1434,7 @@
               <a:rPr lang="en-US" dirty="0"/>
               <a:t>• Package cheat sheet — attendees don't need to memorize
 • Point them at manifests/versions.md for the frozen versions
-• Cohort 1 freeze happens now; Cohort 2 re-freezes post-Ignite
+• Manifest freeze for current baseline; refreshed post-Ignite
 • Ask attendees NOT to chase newer packages during the workshop
 • If something breaks with a newer package version, downgrade to the manifest</a:t>
             </a:r>

--- a/decks/day1/module-4-maf-101.pptx
+++ b/decks/day1/module-4-maf-101.pptx
@@ -4597,7 +4597,7 @@
                 <a:ea typeface="Consolas" pitchFamily="34" charset="-122"/>
                 <a:cs typeface="Consolas" pitchFamily="34" charset="-120"/>
               </a:rPr>
-              <a:t>var model = Environment.GetEnvironmentVariable("FOUNDRY_MODEL") ?? "gpt-4o";</a:t>
+              <a:t>var model = Environment.GetEnvironmentVariable("FOUNDRY_MODEL") ?? "gpt-5.4-mini";</a:t>
             </a:r>
             <a:endParaRPr lang="en-US" sz="1300" dirty="0"/>
           </a:p>

--- a/decks/day1/module-4-maf-101.pptx
+++ b/decks/day1/module-4-maf-101.pptx
@@ -4597,7 +4597,7 @@
                 <a:ea typeface="Consolas" pitchFamily="34" charset="-122"/>
                 <a:cs typeface="Consolas" pitchFamily="34" charset="-120"/>
               </a:rPr>
-              <a:t>var model = Environment.GetEnvironmentVariable("FOUNDRY_MODEL") ?? "gpt-5.4-mini";</a:t>
+              <a:t>var model = Environment.GetEnvironmentVariable("FOUNDRY_MODEL") ?? "gpt-5.6-luna";</a:t>
             </a:r>
             <a:endParaRPr lang="en-US" sz="1300" dirty="0"/>
           </a:p>

--- a/decks/day1/module-4-maf-101.pptx
+++ b/decks/day1/module-4-maf-101.pptx
@@ -16,9 +16,10 @@
     <p:sldId id="264" r:id="rId10"/>
     <p:sldId id="265" r:id="rId11"/>
     <p:sldId id="266" r:id="rId12"/>
+    <p:sldId id="267" r:id="rId13"/>
   </p:sldIdLst>
   <p:notesMasterIdLst>
-    <p:notesMasterId r:id="rId13"/>
+    <p:notesMasterId r:id="rId14"/>
   </p:notesMasterIdLst>
   <p:sldSz cx="9144000" cy="5143500"/>
   <p:notesSz cx="5143500" cy="9144000"/>
@@ -604,10 +605,11 @@
           <a:p>
             <a:r>
               <a:rPr lang="en-US" dirty="0"/>
-              <a:t>• This is a bridge slide — don't teach hosting here, save for Module 6
-• One sentence: 'you've now seen the primitives; Module 5 gives you the map, Module 6 shows the three ways to run agents'
-• Foreshadow the three paths (Prompt agent, Hosted agent, Responses API from your own code)
-• Attendees should feel: 'oh, there's more than one place this code can run'</a:t>
+              <a:t>• Package cheat sheet — attendees don't need to memorize
+• Point them at manifests/versions.md for the frozen versions
+• Manifest freeze for current baseline; refreshed post-Ignite
+• Ask attendees NOT to chase newer packages during the workshop
+• If something breaks with a newer package version, downgrade to the manifest</a:t>
             </a:r>
             <a:endParaRPr lang="en-US" dirty="0"/>
           </a:p>
@@ -695,7 +697,10 @@
           <a:p>
             <a:r>
               <a:rPr lang="en-US" dirty="0"/>
-              <a:t>Recap. If code slides ran long, cut the takeaways to 30 seconds.</a:t>
+              <a:t>• This is a bridge slide — don't teach hosting here, save for Module 6
+• One sentence: 'you've now seen the primitives; Module 5 gives you the map, Module 6 shows the two hosting families'
+• Foreshadow the families: Foundry-hosted (Prompt agent + Hosted agent) and self-hosted (your code + Responses API)
+• Attendees should feel: 'oh, there's more than one place this code can run'</a:t>
             </a:r>
             <a:endParaRPr lang="en-US" dirty="0"/>
           </a:p>
@@ -719,6 +724,94 @@
             <a:fld id="{F7021451-1387-4CA6-816F-3879F97B5CBC}" type="slidenum">
               <a:rPr lang="en-US"/>
               <a:t>11</a:t>
+            </a:fld>
+            <a:endParaRPr lang="en-US"/>
+          </a:p>
+        </p:txBody>
+      </p:sp>
+    </p:spTree>
+    <p:extLst>
+      <p:ext uri="{BB962C8B-B14F-4D97-AF65-F5344CB8AC3E}">
+        <p14:creationId xmlns:p14="http://schemas.microsoft.com/office/powerpoint/2010/main" val="1024086991"/>
+      </p:ext>
+    </p:extLst>
+  </p:cSld>
+  <p:clrMapOvr>
+    <a:masterClrMapping/>
+  </p:clrMapOvr>
+</p:notes>
+</file>
+
+<file path=ppt/notesSlides/notesSlide12.xml><?xml version="1.0" encoding="utf-8"?>
+<p:notes xmlns:a="http://schemas.openxmlformats.org/drawingml/2006/main" xmlns:r="http://schemas.openxmlformats.org/officeDocument/2006/relationships" xmlns:p="http://schemas.openxmlformats.org/presentationml/2006/main">
+  <p:cSld>
+    <p:spTree>
+      <p:nvGrpSpPr>
+        <p:cNvPr id="1" name=""/>
+        <p:cNvGrpSpPr/>
+        <p:nvPr/>
+      </p:nvGrpSpPr>
+      <p:grpSpPr>
+        <a:xfrm>
+          <a:off x="0" y="0"/>
+          <a:ext cx="0" cy="0"/>
+          <a:chOff x="0" y="0"/>
+          <a:chExt cx="0" cy="0"/>
+        </a:xfrm>
+      </p:grpSpPr>
+      <p:sp>
+        <p:nvSpPr>
+          <p:cNvPr id="2" name="Slide Image Placeholder 1"/>
+          <p:cNvSpPr>
+            <a:spLocks noGrp="1" noRot="1" noChangeAspect="1"/>
+          </p:cNvSpPr>
+          <p:nvPr>
+            <p:ph type="sldImg"/>
+          </p:nvPr>
+        </p:nvSpPr>
+        <p:spPr/>
+      </p:sp>
+      <p:sp>
+        <p:nvSpPr>
+          <p:cNvPr id="3" name="Notes Placeholder 2"/>
+          <p:cNvSpPr>
+            <a:spLocks noGrp="1"/>
+          </p:cNvSpPr>
+          <p:nvPr>
+            <p:ph type="body" idx="1"/>
+          </p:nvPr>
+        </p:nvSpPr>
+        <p:spPr/>
+        <p:txBody>
+          <a:bodyPr/>
+          <a:lstStyle/>
+          <a:p>
+            <a:r>
+              <a:rPr lang="en-US" dirty="0"/>
+              <a:t>Recap. If code slides ran long, cut the takeaways to 30 seconds.</a:t>
+            </a:r>
+            <a:endParaRPr lang="en-US" dirty="0"/>
+          </a:p>
+        </p:txBody>
+      </p:sp>
+      <p:sp>
+        <p:nvSpPr>
+          <p:cNvPr id="4" name="Slide Number Placeholder 3"/>
+          <p:cNvSpPr>
+            <a:spLocks noGrp="1"/>
+          </p:cNvSpPr>
+          <p:nvPr>
+            <p:ph type="sldNum" sz="quarter" idx="10"/>
+          </p:nvPr>
+        </p:nvSpPr>
+        <p:spPr/>
+        <p:txBody>
+          <a:bodyPr/>
+          <a:lstStyle/>
+          <a:p>
+            <a:fld id="{F7021451-1387-4CA6-816F-3879F97B5CBC}" type="slidenum">
+              <a:rPr lang="en-US"/>
+              <a:t>12</a:t>
             </a:fld>
             <a:endParaRPr lang="en-US"/>
           </a:p>
@@ -876,10 +969,10 @@
             <a:r>
               <a:rPr lang="en-US" dirty="0"/>
               <a:t>• Six primitives — write them on a whiteboard if you can
-•   Chat client, Agent, Thread, Run, Tool, Message
-• Every day this week uses all six
+•   Chat client, Agent, Session, Run, Tool, Message
+• The rest of the workshop uses all six
 • Ask: 'do any of these names collide with your team's vocabulary?'
-•   (some teams may already use 'thread' or 'run' differently in their codebases)
+•   (some teams may already use 'session' or 'run' differently in their codebases)
 • If yes, agree on how you'll disambiguate for the week</a:t>
             </a:r>
             <a:endParaRPr lang="en-US" dirty="0"/>
@@ -1061,11 +1154,18 @@
           <a:p>
             <a:r>
               <a:rPr lang="en-US" dirty="0"/>
-              <a:t>• Point out: same shape as Python — this is MAF's design goal
-• AIProjectClient(...).AsAIAgent(...) = C# way to write 'my code calling the Responses API'
-• For attendees writing C#: everything shown in Python this week has a C# equivalent
-• For attendees writing Python: the C# code should feel readable
-• Version pinning: check manifests/versions.md if there's any doubt</a:t>
+              <a:t>• DEMO 4.1 · ~3 min
+• Open a clean terminal, cd to a fresh scratch dir
+•   mkdir scratch &amp;&amp; cd scratch
+•   uv init --bare
+•   paste pyproject.toml + main.py from the runbook
+•   uv sync
+•   export FOUNDRY_PROJECT_ENDPOINT=...
+•   export FOUNDRY_MODEL=gpt-5.6-luna
+•   uv run main.py
+• Expected: model prints a brief answer about Paris
+• Fallback: pre-recorded video at demos/day1/recordings/module4-demo1-six-line-agent.mp4
+• Payoff line: 'That's the whole surface area — Agent + FoundryChatClient + AzureCliCredential.'</a:t>
             </a:r>
             <a:endParaRPr lang="en-US" dirty="0"/>
           </a:p>
@@ -1153,12 +1253,11 @@
           <a:p>
             <a:r>
               <a:rPr lang="en-US" dirty="0"/>
-              <a:t>• Non-streaming vs. streaming — show the diff in shape
-• Non-streaming: wait for the full response, one call
-• Streaming: process chunks as they arrive (async iterator)
-• Streaming matters for UX — perceived latency drops significantly
-• Day 3 goes deeper: tool-progress events, cancellation, back-pressure
-• In the lab today: attendees will see streaming print chunks live</a:t>
+              <a:t>• Point out: same shape as Python — this is MAF's design goal
+• AIProjectClient(...).AsAIAgent(...) = C# way to write 'my code calling the Responses API'
+• For attendees writing C#: everything shown in Python this week has a C# equivalent
+• For attendees writing Python: the C# code should feel readable
+• Version pinning: check manifests/versions.md if there's any doubt</a:t>
             </a:r>
             <a:endParaRPr lang="en-US" dirty="0"/>
           </a:p>
@@ -1246,12 +1345,12 @@
           <a:p>
             <a:r>
               <a:rPr lang="en-US" dirty="0"/>
-              <a:t>• Attendees WILL ask: 'where does that thread state live?'
-• Answer depends on which of the three paths (Module 6):
-•   Path A (Prompt agent): server-side in Foundry
-•   Path B (Hosted agent): server-side in Foundry
-•   Path C (your code + Responses API): in your process
-• This is the bridge to Module 6 — Module 5 first, then Module 6</a:t>
+              <a:t>• Non-streaming vs. streaming — show the diff in shape
+• Non-streaming: wait for the full response, one call
+• Streaming: process chunks as they arrive (async iterator)
+• Streaming matters for UX — perceived latency drops significantly
+• Day 3 goes deeper: tool-progress events, cancellation, back-pressure
+• In the lab today: attendees will see streaming print chunks live</a:t>
             </a:r>
             <a:endParaRPr lang="en-US" dirty="0"/>
           </a:p>
@@ -1339,12 +1438,13 @@
           <a:p>
             <a:r>
               <a:rPr lang="en-US" dirty="0"/>
-              <a:t>• Table stakes topic, but attendees WILL bring keys from other codebases
-• Restate clearly: NO API keys in this workshop's code
-• Dev on laptop: AzureCliCredential — signs in via az login
-• Production: DefaultAzureCredential or explicit ManagedIdentityCredential
-• If you see a Foundry API key in a code review: reject the PR
-• Day 5 revisits this in the Identity module — plant the flag</a:t>
+              <a:t>• GROUNDING FIX 2026-08-19: session=session is REQUIRED for multi-turn
+• Previously this code snippet omitted session= and would silently return wrong answer
+• Attendees WILL ask: 'where does that session state live?'
+• Answer depends on which family (Module 6):
+•   Foundry-hosted (Prompt agent or Hosted agent): server-side in Foundry
+•   Self-hosted (your code + Responses API): in your process
+• This is the bridge to Module 6 — Module 5 first, then Module 6</a:t>
             </a:r>
             <a:endParaRPr lang="en-US" dirty="0"/>
           </a:p>
@@ -1432,11 +1532,12 @@
           <a:p>
             <a:r>
               <a:rPr lang="en-US" dirty="0"/>
-              <a:t>• Package cheat sheet — attendees don't need to memorize
-• Point them at manifests/versions.md for the frozen versions
-• Manifest freeze for current baseline; refreshed post-Ignite
-• Ask attendees NOT to chase newer packages during the workshop
-• If something breaks with a newer package version, downgrade to the manifest</a:t>
+              <a:t>• Table stakes topic, but attendees WILL bring keys from other codebases
+• Restate clearly: NO API keys in this workshop's code
+• Dev on laptop: AzureCliCredential — signs in via az login
+• Production: DefaultAzureCredential or explicit ManagedIdentityCredential
+• If you see a Foundry API key in a code review: reject the PR
+• Day 5 revisits this in the Identity module — plant the flag</a:t>
             </a:r>
             <a:endParaRPr lang="en-US" dirty="0"/>
           </a:p>
@@ -2089,129 +2190,1279 @@
                 <a:ea typeface="Calibri" pitchFamily="34" charset="-122"/>
                 <a:cs typeface="Calibri" pitchFamily="34" charset="-120"/>
               </a:rPr>
-              <a:t>Bridge to the next two modules</a:t>
+              <a:t>Packages you'll touch this week</a:t>
             </a:r>
             <a:endParaRPr lang="en-US" sz="2800" dirty="0"/>
           </a:p>
         </p:txBody>
       </p:sp>
-      <p:sp>
-        <p:nvSpPr>
-          <p:cNvPr id="5" name="Text 3"/>
-          <p:cNvSpPr/>
-          <p:nvPr/>
-        </p:nvSpPr>
-        <p:spPr>
-          <a:xfrm>
-            <a:off x="365760" y="1097280"/>
-            <a:ext cx="8412480" cy="914400"/>
-          </a:xfrm>
-          <a:prstGeom prst="rect">
-            <a:avLst/>
-          </a:prstGeom>
-          <a:noFill/>
-          <a:ln/>
-        </p:spPr>
-        <p:txBody>
-          <a:bodyPr wrap="square" rtlCol="0" anchor="ctr"/>
-          <a:lstStyle/>
-          <a:p>
-            <a:pPr indent="0" marL="0">
-              <a:buNone/>
-            </a:pPr>
-            <a:r>
-              <a:rPr lang="en-US" sz="1600" dirty="0">
-                <a:solidFill>
-                  <a:srgbClr val="212121"/>
-                </a:solidFill>
-                <a:latin typeface="Calibri" pitchFamily="34" charset="0"/>
-                <a:ea typeface="Calibri" pitchFamily="34" charset="-122"/>
-                <a:cs typeface="Calibri" pitchFamily="34" charset="-120"/>
-              </a:rPr>
-              <a:t>You've now seen the MAF primitives that let your process call the Foundry Responses API — Agent + FoundryChatClient (Python) or AIProjectClient.AsAIAgent (C#).</a:t>
-            </a:r>
-            <a:endParaRPr lang="en-US" sz="1600" dirty="0"/>
-          </a:p>
-        </p:txBody>
-      </p:sp>
-      <p:sp>
-        <p:nvSpPr>
-          <p:cNvPr id="6" name="Text 4"/>
-          <p:cNvSpPr/>
-          <p:nvPr/>
-        </p:nvSpPr>
-        <p:spPr>
-          <a:xfrm>
-            <a:off x="365760" y="2194560"/>
-            <a:ext cx="8412480" cy="1097280"/>
-          </a:xfrm>
-          <a:prstGeom prst="rect">
-            <a:avLst/>
-          </a:prstGeom>
-          <a:noFill/>
-          <a:ln/>
-        </p:spPr>
-        <p:txBody>
-          <a:bodyPr wrap="square" rtlCol="0" anchor="ctr"/>
-          <a:lstStyle/>
-          <a:p>
-            <a:pPr indent="0" marL="0">
-              <a:buNone/>
-            </a:pPr>
-            <a:r>
-              <a:rPr lang="en-US" sz="1600" dirty="0">
-                <a:solidFill>
-                  <a:srgbClr val="212121"/>
-                </a:solidFill>
-                <a:latin typeface="Calibri" pitchFamily="34" charset="0"/>
-                <a:ea typeface="Calibri" pitchFamily="34" charset="-122"/>
-                <a:cs typeface="Calibri" pitchFamily="34" charset="-120"/>
-              </a:rPr>
-              <a:t>That's one of three ways to run an agent with Foundry. The other two — Prompt agents (portal-authored, no code) and Hosted agents (your code, containerized, run by Foundry) — live inside Agent Service and are connected via FoundryAgent.</a:t>
-            </a:r>
-            <a:endParaRPr lang="en-US" sz="1600" dirty="0"/>
-          </a:p>
-        </p:txBody>
-      </p:sp>
-      <p:sp>
-        <p:nvSpPr>
-          <p:cNvPr id="7" name="Text 5"/>
-          <p:cNvSpPr/>
-          <p:nvPr/>
-        </p:nvSpPr>
-        <p:spPr>
-          <a:xfrm>
-            <a:off x="365760" y="3474720"/>
-            <a:ext cx="8412480" cy="914400"/>
-          </a:xfrm>
-          <a:prstGeom prst="rect">
-            <a:avLst/>
-          </a:prstGeom>
-          <a:noFill/>
-          <a:ln/>
-        </p:spPr>
-        <p:txBody>
-          <a:bodyPr wrap="square" rtlCol="0" anchor="ctr"/>
-          <a:lstStyle/>
-          <a:p>
-            <a:pPr indent="0" marL="0">
-              <a:buNone/>
-            </a:pPr>
-            <a:r>
-              <a:rPr lang="en-US" sz="1500" i="1" dirty="0">
-                <a:solidFill>
-                  <a:srgbClr val="212121"/>
-                </a:solidFill>
-                <a:latin typeface="Calibri" pitchFamily="34" charset="0"/>
-                <a:ea typeface="Calibri" pitchFamily="34" charset="-122"/>
-                <a:cs typeface="Calibri" pitchFamily="34" charset="-120"/>
-              </a:rPr>
-              <a:t>Module 5 gives us the mental model that ties everything together. Module 6 walks all three paths in detail.</a:t>
-            </a:r>
-            <a:endParaRPr lang="en-US" sz="1500" dirty="0"/>
-          </a:p>
-        </p:txBody>
-      </p:sp>
+      <p:graphicFrame>
+        <p:nvGraphicFramePr>
+          <p:cNvPr id="11" name="Table 0"/>
+          <p:cNvGraphicFramePr>
+            <a:graphicFrameLocks noGrp="1"/>
+          </p:cNvGraphicFramePr>
+          <p:nvPr>
+            <p:extLst>
+              <p:ext uri="{D42A27DB-BD31-4B8C-83A1-F6EECF244321}">
+                <p14:modId xmlns:p14="http://schemas.microsoft.com/office/powerpoint/2010/main" val="1579011935"/>
+              </p:ext>
+            </p:extLst>
+          </p:nvPr>
+        </p:nvGraphicFramePr>
+        <p:xfrm>
+          <a:off x="365760" y="1097280"/>
+          <a:ext cx="8412480" cy="914400"/>
+        </p:xfrm>
+        <a:graphic>
+          <a:graphicData uri="http://schemas.openxmlformats.org/drawingml/2006/table">
+            <a:tbl>
+              <a:tblPr/>
+              <a:tblGrid>
+                <a:gridCol w="1737360"/>
+                <a:gridCol w="3291840"/>
+                <a:gridCol w="3383280"/>
+              </a:tblGrid>
+              <a:tr h="384048">
+                <a:tc>
+                  <a:txBody>
+                    <a:bodyPr/>
+                    <a:lstStyle/>
+                    <a:p>
+                      <a:pPr indent="0" marL="0">
+                        <a:buNone/>
+                      </a:pPr>
+                      <a:r>
+                        <a:rPr lang="en-US" sz="1200" b="1" dirty="0">
+                          <a:solidFill>
+                            <a:srgbClr val="FFFFFF"/>
+                          </a:solidFill>
+                          <a:latin typeface="Calibri" pitchFamily="34" charset="0"/>
+                          <a:ea typeface="Calibri" pitchFamily="34" charset="-122"/>
+                          <a:cs typeface="Calibri" pitchFamily="34" charset="-120"/>
+                        </a:rPr>
+                        <a:t>Concern</a:t>
+                      </a:r>
+                      <a:endParaRPr lang="en-US" sz="1200" dirty="0">
+                        <a:latin typeface="Calibri" charset="0"/>
+                        <a:ea typeface="Calibri" charset="0"/>
+                        <a:cs typeface="Calibri" charset="0"/>
+                      </a:endParaRPr>
+                    </a:p>
+                  </a:txBody>
+                  <a:tcPr marL="54864" marR="54864" marT="54864" marB="54864" anchor="ctr">
+                    <a:lnL w="6350" cap="flat" cmpd="sng" algn="ctr">
+                      <a:solidFill>
+                        <a:srgbClr val="D1D5DB"/>
+                      </a:solidFill>
+                      <a:prstDash val="solid"/>
+                      <a:round/>
+                      <a:headEnd type="none" w="med" len="med"/>
+                      <a:tailEnd type="none" w="med" len="med"/>
+                    </a:lnL>
+                    <a:lnR w="6350" cap="flat" cmpd="sng" algn="ctr">
+                      <a:solidFill>
+                        <a:srgbClr val="D1D5DB"/>
+                      </a:solidFill>
+                      <a:prstDash val="solid"/>
+                      <a:round/>
+                      <a:headEnd type="none" w="med" len="med"/>
+                      <a:tailEnd type="none" w="med" len="med"/>
+                    </a:lnR>
+                    <a:lnT w="6350" cap="flat" cmpd="sng" algn="ctr">
+                      <a:solidFill>
+                        <a:srgbClr val="D1D5DB"/>
+                      </a:solidFill>
+                      <a:prstDash val="solid"/>
+                      <a:round/>
+                      <a:headEnd type="none" w="med" len="med"/>
+                      <a:tailEnd type="none" w="med" len="med"/>
+                    </a:lnT>
+                    <a:lnB w="6350" cap="flat" cmpd="sng" algn="ctr">
+                      <a:solidFill>
+                        <a:srgbClr val="D1D5DB"/>
+                      </a:solidFill>
+                      <a:prstDash val="solid"/>
+                      <a:round/>
+                      <a:headEnd type="none" w="med" len="med"/>
+                      <a:tailEnd type="none" w="med" len="med"/>
+                    </a:lnB>
+                    <a:solidFill>
+                      <a:srgbClr val="1E2761"/>
+                    </a:solidFill>
+                  </a:tcPr>
+                </a:tc>
+                <a:tc>
+                  <a:txBody>
+                    <a:bodyPr/>
+                    <a:lstStyle/>
+                    <a:p>
+                      <a:pPr indent="0" marL="0">
+                        <a:buNone/>
+                      </a:pPr>
+                      <a:r>
+                        <a:rPr lang="en-US" sz="1200" b="1" dirty="0">
+                          <a:solidFill>
+                            <a:srgbClr val="FFFFFF"/>
+                          </a:solidFill>
+                          <a:latin typeface="Calibri" pitchFamily="34" charset="0"/>
+                          <a:ea typeface="Calibri" pitchFamily="34" charset="-122"/>
+                          <a:cs typeface="Calibri" pitchFamily="34" charset="-120"/>
+                        </a:rPr>
+                        <a:t>Python package</a:t>
+                      </a:r>
+                      <a:endParaRPr lang="en-US" sz="1200" dirty="0">
+                        <a:latin typeface="Calibri" charset="0"/>
+                        <a:ea typeface="Calibri" charset="0"/>
+                        <a:cs typeface="Calibri" charset="0"/>
+                      </a:endParaRPr>
+                    </a:p>
+                  </a:txBody>
+                  <a:tcPr marL="54864" marR="54864" marT="54864" marB="54864" anchor="ctr">
+                    <a:lnL w="6350" cap="flat" cmpd="sng" algn="ctr">
+                      <a:solidFill>
+                        <a:srgbClr val="D1D5DB"/>
+                      </a:solidFill>
+                      <a:prstDash val="solid"/>
+                      <a:round/>
+                      <a:headEnd type="none" w="med" len="med"/>
+                      <a:tailEnd type="none" w="med" len="med"/>
+                    </a:lnL>
+                    <a:lnR w="6350" cap="flat" cmpd="sng" algn="ctr">
+                      <a:solidFill>
+                        <a:srgbClr val="D1D5DB"/>
+                      </a:solidFill>
+                      <a:prstDash val="solid"/>
+                      <a:round/>
+                      <a:headEnd type="none" w="med" len="med"/>
+                      <a:tailEnd type="none" w="med" len="med"/>
+                    </a:lnR>
+                    <a:lnT w="6350" cap="flat" cmpd="sng" algn="ctr">
+                      <a:solidFill>
+                        <a:srgbClr val="D1D5DB"/>
+                      </a:solidFill>
+                      <a:prstDash val="solid"/>
+                      <a:round/>
+                      <a:headEnd type="none" w="med" len="med"/>
+                      <a:tailEnd type="none" w="med" len="med"/>
+                    </a:lnT>
+                    <a:lnB w="6350" cap="flat" cmpd="sng" algn="ctr">
+                      <a:solidFill>
+                        <a:srgbClr val="D1D5DB"/>
+                      </a:solidFill>
+                      <a:prstDash val="solid"/>
+                      <a:round/>
+                      <a:headEnd type="none" w="med" len="med"/>
+                      <a:tailEnd type="none" w="med" len="med"/>
+                    </a:lnB>
+                    <a:solidFill>
+                      <a:srgbClr val="1E2761"/>
+                    </a:solidFill>
+                  </a:tcPr>
+                </a:tc>
+                <a:tc>
+                  <a:txBody>
+                    <a:bodyPr/>
+                    <a:lstStyle/>
+                    <a:p>
+                      <a:pPr indent="0" marL="0">
+                        <a:buNone/>
+                      </a:pPr>
+                      <a:r>
+                        <a:rPr lang="en-US" sz="1200" b="1" dirty="0">
+                          <a:solidFill>
+                            <a:srgbClr val="FFFFFF"/>
+                          </a:solidFill>
+                          <a:latin typeface="Calibri" pitchFamily="34" charset="0"/>
+                          <a:ea typeface="Calibri" pitchFamily="34" charset="-122"/>
+                          <a:cs typeface="Calibri" pitchFamily="34" charset="-120"/>
+                        </a:rPr>
+                        <a:t>C# package</a:t>
+                      </a:r>
+                      <a:endParaRPr lang="en-US" sz="1200" dirty="0">
+                        <a:latin typeface="Calibri" charset="0"/>
+                        <a:ea typeface="Calibri" charset="0"/>
+                        <a:cs typeface="Calibri" charset="0"/>
+                      </a:endParaRPr>
+                    </a:p>
+                  </a:txBody>
+                  <a:tcPr marL="54864" marR="54864" marT="54864" marB="54864" anchor="ctr">
+                    <a:lnL w="6350" cap="flat" cmpd="sng" algn="ctr">
+                      <a:solidFill>
+                        <a:srgbClr val="D1D5DB"/>
+                      </a:solidFill>
+                      <a:prstDash val="solid"/>
+                      <a:round/>
+                      <a:headEnd type="none" w="med" len="med"/>
+                      <a:tailEnd type="none" w="med" len="med"/>
+                    </a:lnL>
+                    <a:lnR w="6350" cap="flat" cmpd="sng" algn="ctr">
+                      <a:solidFill>
+                        <a:srgbClr val="D1D5DB"/>
+                      </a:solidFill>
+                      <a:prstDash val="solid"/>
+                      <a:round/>
+                      <a:headEnd type="none" w="med" len="med"/>
+                      <a:tailEnd type="none" w="med" len="med"/>
+                    </a:lnR>
+                    <a:lnT w="6350" cap="flat" cmpd="sng" algn="ctr">
+                      <a:solidFill>
+                        <a:srgbClr val="D1D5DB"/>
+                      </a:solidFill>
+                      <a:prstDash val="solid"/>
+                      <a:round/>
+                      <a:headEnd type="none" w="med" len="med"/>
+                      <a:tailEnd type="none" w="med" len="med"/>
+                    </a:lnT>
+                    <a:lnB w="6350" cap="flat" cmpd="sng" algn="ctr">
+                      <a:solidFill>
+                        <a:srgbClr val="D1D5DB"/>
+                      </a:solidFill>
+                      <a:prstDash val="solid"/>
+                      <a:round/>
+                      <a:headEnd type="none" w="med" len="med"/>
+                      <a:tailEnd type="none" w="med" len="med"/>
+                    </a:lnB>
+                    <a:solidFill>
+                      <a:srgbClr val="1E2761"/>
+                    </a:solidFill>
+                  </a:tcPr>
+                </a:tc>
+              </a:tr>
+              <a:tr h="384048">
+                <a:tc>
+                  <a:txBody>
+                    <a:bodyPr/>
+                    <a:lstStyle/>
+                    <a:p>
+                      <a:pPr indent="0" marL="0">
+                        <a:buNone/>
+                      </a:pPr>
+                      <a:r>
+                        <a:rPr lang="en-US" sz="1200" dirty="0">
+                          <a:solidFill>
+                            <a:srgbClr val="212121"/>
+                          </a:solidFill>
+                          <a:latin typeface="Calibri" pitchFamily="34" charset="0"/>
+                          <a:ea typeface="Calibri" pitchFamily="34" charset="-122"/>
+                          <a:cs typeface="Calibri" pitchFamily="34" charset="-120"/>
+                        </a:rPr>
+                        <a:t>Core</a:t>
+                      </a:r>
+                      <a:endParaRPr lang="en-US" sz="1200" dirty="0">
+                        <a:latin typeface="Calibri" charset="0"/>
+                        <a:ea typeface="Calibri" charset="0"/>
+                        <a:cs typeface="Calibri" charset="0"/>
+                      </a:endParaRPr>
+                    </a:p>
+                  </a:txBody>
+                  <a:tcPr marL="54864" marR="54864" marT="54864" marB="54864" anchor="ctr">
+                    <a:lnL w="6350" cap="flat" cmpd="sng" algn="ctr">
+                      <a:solidFill>
+                        <a:srgbClr val="D1D5DB"/>
+                      </a:solidFill>
+                      <a:prstDash val="solid"/>
+                      <a:round/>
+                      <a:headEnd type="none" w="med" len="med"/>
+                      <a:tailEnd type="none" w="med" len="med"/>
+                    </a:lnL>
+                    <a:lnR w="6350" cap="flat" cmpd="sng" algn="ctr">
+                      <a:solidFill>
+                        <a:srgbClr val="D1D5DB"/>
+                      </a:solidFill>
+                      <a:prstDash val="solid"/>
+                      <a:round/>
+                      <a:headEnd type="none" w="med" len="med"/>
+                      <a:tailEnd type="none" w="med" len="med"/>
+                    </a:lnR>
+                    <a:lnT w="6350" cap="flat" cmpd="sng" algn="ctr">
+                      <a:solidFill>
+                        <a:srgbClr val="D1D5DB"/>
+                      </a:solidFill>
+                      <a:prstDash val="solid"/>
+                      <a:round/>
+                      <a:headEnd type="none" w="med" len="med"/>
+                      <a:tailEnd type="none" w="med" len="med"/>
+                    </a:lnT>
+                    <a:lnB w="6350" cap="flat" cmpd="sng" algn="ctr">
+                      <a:solidFill>
+                        <a:srgbClr val="D1D5DB"/>
+                      </a:solidFill>
+                      <a:prstDash val="solid"/>
+                      <a:round/>
+                      <a:headEnd type="none" w="med" len="med"/>
+                      <a:tailEnd type="none" w="med" len="med"/>
+                    </a:lnB>
+                    <a:solidFill>
+                      <a:srgbClr val="FFFFFF"/>
+                    </a:solidFill>
+                  </a:tcPr>
+                </a:tc>
+                <a:tc>
+                  <a:txBody>
+                    <a:bodyPr/>
+                    <a:lstStyle/>
+                    <a:p>
+                      <a:pPr indent="0" marL="0">
+                        <a:buNone/>
+                      </a:pPr>
+                      <a:r>
+                        <a:rPr lang="en-US" sz="1200" dirty="0">
+                          <a:solidFill>
+                            <a:srgbClr val="212121"/>
+                          </a:solidFill>
+                          <a:latin typeface="Calibri" pitchFamily="34" charset="0"/>
+                          <a:ea typeface="Calibri" pitchFamily="34" charset="-122"/>
+                          <a:cs typeface="Calibri" pitchFamily="34" charset="-120"/>
+                        </a:rPr>
+                        <a:t>agent-framework</a:t>
+                      </a:r>
+                      <a:endParaRPr lang="en-US" sz="1200" dirty="0">
+                        <a:latin typeface="Calibri" charset="0"/>
+                        <a:ea typeface="Calibri" charset="0"/>
+                        <a:cs typeface="Calibri" charset="0"/>
+                      </a:endParaRPr>
+                    </a:p>
+                  </a:txBody>
+                  <a:tcPr marL="54864" marR="54864" marT="54864" marB="54864" anchor="ctr">
+                    <a:lnL w="6350" cap="flat" cmpd="sng" algn="ctr">
+                      <a:solidFill>
+                        <a:srgbClr val="D1D5DB"/>
+                      </a:solidFill>
+                      <a:prstDash val="solid"/>
+                      <a:round/>
+                      <a:headEnd type="none" w="med" len="med"/>
+                      <a:tailEnd type="none" w="med" len="med"/>
+                    </a:lnL>
+                    <a:lnR w="6350" cap="flat" cmpd="sng" algn="ctr">
+                      <a:solidFill>
+                        <a:srgbClr val="D1D5DB"/>
+                      </a:solidFill>
+                      <a:prstDash val="solid"/>
+                      <a:round/>
+                      <a:headEnd type="none" w="med" len="med"/>
+                      <a:tailEnd type="none" w="med" len="med"/>
+                    </a:lnR>
+                    <a:lnT w="6350" cap="flat" cmpd="sng" algn="ctr">
+                      <a:solidFill>
+                        <a:srgbClr val="D1D5DB"/>
+                      </a:solidFill>
+                      <a:prstDash val="solid"/>
+                      <a:round/>
+                      <a:headEnd type="none" w="med" len="med"/>
+                      <a:tailEnd type="none" w="med" len="med"/>
+                    </a:lnT>
+                    <a:lnB w="6350" cap="flat" cmpd="sng" algn="ctr">
+                      <a:solidFill>
+                        <a:srgbClr val="D1D5DB"/>
+                      </a:solidFill>
+                      <a:prstDash val="solid"/>
+                      <a:round/>
+                      <a:headEnd type="none" w="med" len="med"/>
+                      <a:tailEnd type="none" w="med" len="med"/>
+                    </a:lnB>
+                    <a:solidFill>
+                      <a:srgbClr val="FFFFFF"/>
+                    </a:solidFill>
+                  </a:tcPr>
+                </a:tc>
+                <a:tc>
+                  <a:txBody>
+                    <a:bodyPr/>
+                    <a:lstStyle/>
+                    <a:p>
+                      <a:pPr indent="0" marL="0">
+                        <a:buNone/>
+                      </a:pPr>
+                      <a:r>
+                        <a:rPr lang="en-US" sz="1200" dirty="0">
+                          <a:solidFill>
+                            <a:srgbClr val="212121"/>
+                          </a:solidFill>
+                          <a:latin typeface="Calibri" pitchFamily="34" charset="0"/>
+                          <a:ea typeface="Calibri" pitchFamily="34" charset="-122"/>
+                          <a:cs typeface="Calibri" pitchFamily="34" charset="-120"/>
+                        </a:rPr>
+                        <a:t>Microsoft.Agents.AI</a:t>
+                      </a:r>
+                      <a:endParaRPr lang="en-US" sz="1200" dirty="0">
+                        <a:latin typeface="Calibri" charset="0"/>
+                        <a:ea typeface="Calibri" charset="0"/>
+                        <a:cs typeface="Calibri" charset="0"/>
+                      </a:endParaRPr>
+                    </a:p>
+                  </a:txBody>
+                  <a:tcPr marL="54864" marR="54864" marT="54864" marB="54864" anchor="ctr">
+                    <a:lnL w="6350" cap="flat" cmpd="sng" algn="ctr">
+                      <a:solidFill>
+                        <a:srgbClr val="D1D5DB"/>
+                      </a:solidFill>
+                      <a:prstDash val="solid"/>
+                      <a:round/>
+                      <a:headEnd type="none" w="med" len="med"/>
+                      <a:tailEnd type="none" w="med" len="med"/>
+                    </a:lnL>
+                    <a:lnR w="6350" cap="flat" cmpd="sng" algn="ctr">
+                      <a:solidFill>
+                        <a:srgbClr val="D1D5DB"/>
+                      </a:solidFill>
+                      <a:prstDash val="solid"/>
+                      <a:round/>
+                      <a:headEnd type="none" w="med" len="med"/>
+                      <a:tailEnd type="none" w="med" len="med"/>
+                    </a:lnR>
+                    <a:lnT w="6350" cap="flat" cmpd="sng" algn="ctr">
+                      <a:solidFill>
+                        <a:srgbClr val="D1D5DB"/>
+                      </a:solidFill>
+                      <a:prstDash val="solid"/>
+                      <a:round/>
+                      <a:headEnd type="none" w="med" len="med"/>
+                      <a:tailEnd type="none" w="med" len="med"/>
+                    </a:lnT>
+                    <a:lnB w="6350" cap="flat" cmpd="sng" algn="ctr">
+                      <a:solidFill>
+                        <a:srgbClr val="D1D5DB"/>
+                      </a:solidFill>
+                      <a:prstDash val="solid"/>
+                      <a:round/>
+                      <a:headEnd type="none" w="med" len="med"/>
+                      <a:tailEnd type="none" w="med" len="med"/>
+                    </a:lnB>
+                    <a:solidFill>
+                      <a:srgbClr val="FFFFFF"/>
+                    </a:solidFill>
+                  </a:tcPr>
+                </a:tc>
+              </a:tr>
+              <a:tr h="384048">
+                <a:tc>
+                  <a:txBody>
+                    <a:bodyPr/>
+                    <a:lstStyle/>
+                    <a:p>
+                      <a:pPr indent="0" marL="0">
+                        <a:buNone/>
+                      </a:pPr>
+                      <a:r>
+                        <a:rPr lang="en-US" sz="1200" dirty="0">
+                          <a:solidFill>
+                            <a:srgbClr val="212121"/>
+                          </a:solidFill>
+                          <a:latin typeface="Calibri" pitchFamily="34" charset="0"/>
+                          <a:ea typeface="Calibri" pitchFamily="34" charset="-122"/>
+                          <a:cs typeface="Calibri" pitchFamily="34" charset="-120"/>
+                        </a:rPr>
+                        <a:t>Foundry client</a:t>
+                      </a:r>
+                      <a:endParaRPr lang="en-US" sz="1200" dirty="0">
+                        <a:latin typeface="Calibri" charset="0"/>
+                        <a:ea typeface="Calibri" charset="0"/>
+                        <a:cs typeface="Calibri" charset="0"/>
+                      </a:endParaRPr>
+                    </a:p>
+                  </a:txBody>
+                  <a:tcPr marL="54864" marR="54864" marT="54864" marB="54864" anchor="ctr">
+                    <a:lnL w="6350" cap="flat" cmpd="sng" algn="ctr">
+                      <a:solidFill>
+                        <a:srgbClr val="D1D5DB"/>
+                      </a:solidFill>
+                      <a:prstDash val="solid"/>
+                      <a:round/>
+                      <a:headEnd type="none" w="med" len="med"/>
+                      <a:tailEnd type="none" w="med" len="med"/>
+                    </a:lnL>
+                    <a:lnR w="6350" cap="flat" cmpd="sng" algn="ctr">
+                      <a:solidFill>
+                        <a:srgbClr val="D1D5DB"/>
+                      </a:solidFill>
+                      <a:prstDash val="solid"/>
+                      <a:round/>
+                      <a:headEnd type="none" w="med" len="med"/>
+                      <a:tailEnd type="none" w="med" len="med"/>
+                    </a:lnR>
+                    <a:lnT w="6350" cap="flat" cmpd="sng" algn="ctr">
+                      <a:solidFill>
+                        <a:srgbClr val="D1D5DB"/>
+                      </a:solidFill>
+                      <a:prstDash val="solid"/>
+                      <a:round/>
+                      <a:headEnd type="none" w="med" len="med"/>
+                      <a:tailEnd type="none" w="med" len="med"/>
+                    </a:lnT>
+                    <a:lnB w="6350" cap="flat" cmpd="sng" algn="ctr">
+                      <a:solidFill>
+                        <a:srgbClr val="D1D5DB"/>
+                      </a:solidFill>
+                      <a:prstDash val="solid"/>
+                      <a:round/>
+                      <a:headEnd type="none" w="med" len="med"/>
+                      <a:tailEnd type="none" w="med" len="med"/>
+                    </a:lnB>
+                    <a:solidFill>
+                      <a:srgbClr val="F3F4F6"/>
+                    </a:solidFill>
+                  </a:tcPr>
+                </a:tc>
+                <a:tc>
+                  <a:txBody>
+                    <a:bodyPr/>
+                    <a:lstStyle/>
+                    <a:p>
+                      <a:pPr indent="0" marL="0">
+                        <a:buNone/>
+                      </a:pPr>
+                      <a:r>
+                        <a:rPr lang="en-US" sz="1200" dirty="0">
+                          <a:solidFill>
+                            <a:srgbClr val="212121"/>
+                          </a:solidFill>
+                          <a:latin typeface="Calibri" pitchFamily="34" charset="0"/>
+                          <a:ea typeface="Calibri" pitchFamily="34" charset="-122"/>
+                          <a:cs typeface="Calibri" pitchFamily="34" charset="-120"/>
+                        </a:rPr>
+                        <a:t>agent-framework-foundry</a:t>
+                      </a:r>
+                      <a:endParaRPr lang="en-US" sz="1200" dirty="0">
+                        <a:latin typeface="Calibri" charset="0"/>
+                        <a:ea typeface="Calibri" charset="0"/>
+                        <a:cs typeface="Calibri" charset="0"/>
+                      </a:endParaRPr>
+                    </a:p>
+                  </a:txBody>
+                  <a:tcPr marL="54864" marR="54864" marT="54864" marB="54864" anchor="ctr">
+                    <a:lnL w="6350" cap="flat" cmpd="sng" algn="ctr">
+                      <a:solidFill>
+                        <a:srgbClr val="D1D5DB"/>
+                      </a:solidFill>
+                      <a:prstDash val="solid"/>
+                      <a:round/>
+                      <a:headEnd type="none" w="med" len="med"/>
+                      <a:tailEnd type="none" w="med" len="med"/>
+                    </a:lnL>
+                    <a:lnR w="6350" cap="flat" cmpd="sng" algn="ctr">
+                      <a:solidFill>
+                        <a:srgbClr val="D1D5DB"/>
+                      </a:solidFill>
+                      <a:prstDash val="solid"/>
+                      <a:round/>
+                      <a:headEnd type="none" w="med" len="med"/>
+                      <a:tailEnd type="none" w="med" len="med"/>
+                    </a:lnR>
+                    <a:lnT w="6350" cap="flat" cmpd="sng" algn="ctr">
+                      <a:solidFill>
+                        <a:srgbClr val="D1D5DB"/>
+                      </a:solidFill>
+                      <a:prstDash val="solid"/>
+                      <a:round/>
+                      <a:headEnd type="none" w="med" len="med"/>
+                      <a:tailEnd type="none" w="med" len="med"/>
+                    </a:lnT>
+                    <a:lnB w="6350" cap="flat" cmpd="sng" algn="ctr">
+                      <a:solidFill>
+                        <a:srgbClr val="D1D5DB"/>
+                      </a:solidFill>
+                      <a:prstDash val="solid"/>
+                      <a:round/>
+                      <a:headEnd type="none" w="med" len="med"/>
+                      <a:tailEnd type="none" w="med" len="med"/>
+                    </a:lnB>
+                    <a:solidFill>
+                      <a:srgbClr val="F3F4F6"/>
+                    </a:solidFill>
+                  </a:tcPr>
+                </a:tc>
+                <a:tc>
+                  <a:txBody>
+                    <a:bodyPr/>
+                    <a:lstStyle/>
+                    <a:p>
+                      <a:pPr indent="0" marL="0">
+                        <a:buNone/>
+                      </a:pPr>
+                      <a:r>
+                        <a:rPr lang="en-US" sz="1200" dirty="0">
+                          <a:solidFill>
+                            <a:srgbClr val="212121"/>
+                          </a:solidFill>
+                          <a:latin typeface="Calibri" pitchFamily="34" charset="0"/>
+                          <a:ea typeface="Calibri" pitchFamily="34" charset="-122"/>
+                          <a:cs typeface="Calibri" pitchFamily="34" charset="-120"/>
+                        </a:rPr>
+                        <a:t>Microsoft.Agents.AI.Foundry</a:t>
+                      </a:r>
+                      <a:endParaRPr lang="en-US" sz="1200" dirty="0">
+                        <a:latin typeface="Calibri" charset="0"/>
+                        <a:ea typeface="Calibri" charset="0"/>
+                        <a:cs typeface="Calibri" charset="0"/>
+                      </a:endParaRPr>
+                    </a:p>
+                  </a:txBody>
+                  <a:tcPr marL="54864" marR="54864" marT="54864" marB="54864" anchor="ctr">
+                    <a:lnL w="6350" cap="flat" cmpd="sng" algn="ctr">
+                      <a:solidFill>
+                        <a:srgbClr val="D1D5DB"/>
+                      </a:solidFill>
+                      <a:prstDash val="solid"/>
+                      <a:round/>
+                      <a:headEnd type="none" w="med" len="med"/>
+                      <a:tailEnd type="none" w="med" len="med"/>
+                    </a:lnL>
+                    <a:lnR w="6350" cap="flat" cmpd="sng" algn="ctr">
+                      <a:solidFill>
+                        <a:srgbClr val="D1D5DB"/>
+                      </a:solidFill>
+                      <a:prstDash val="solid"/>
+                      <a:round/>
+                      <a:headEnd type="none" w="med" len="med"/>
+                      <a:tailEnd type="none" w="med" len="med"/>
+                    </a:lnR>
+                    <a:lnT w="6350" cap="flat" cmpd="sng" algn="ctr">
+                      <a:solidFill>
+                        <a:srgbClr val="D1D5DB"/>
+                      </a:solidFill>
+                      <a:prstDash val="solid"/>
+                      <a:round/>
+                      <a:headEnd type="none" w="med" len="med"/>
+                      <a:tailEnd type="none" w="med" len="med"/>
+                    </a:lnT>
+                    <a:lnB w="6350" cap="flat" cmpd="sng" algn="ctr">
+                      <a:solidFill>
+                        <a:srgbClr val="D1D5DB"/>
+                      </a:solidFill>
+                      <a:prstDash val="solid"/>
+                      <a:round/>
+                      <a:headEnd type="none" w="med" len="med"/>
+                      <a:tailEnd type="none" w="med" len="med"/>
+                    </a:lnB>
+                    <a:solidFill>
+                      <a:srgbClr val="F3F4F6"/>
+                    </a:solidFill>
+                  </a:tcPr>
+                </a:tc>
+              </a:tr>
+              <a:tr h="384048">
+                <a:tc>
+                  <a:txBody>
+                    <a:bodyPr/>
+                    <a:lstStyle/>
+                    <a:p>
+                      <a:pPr indent="0" marL="0">
+                        <a:buNone/>
+                      </a:pPr>
+                      <a:r>
+                        <a:rPr lang="en-US" sz="1200" dirty="0">
+                          <a:solidFill>
+                            <a:srgbClr val="212121"/>
+                          </a:solidFill>
+                          <a:latin typeface="Calibri" pitchFamily="34" charset="0"/>
+                          <a:ea typeface="Calibri" pitchFamily="34" charset="-122"/>
+                          <a:cs typeface="Calibri" pitchFamily="34" charset="-120"/>
+                        </a:rPr>
+                        <a:t>Foundry hosting</a:t>
+                      </a:r>
+                      <a:endParaRPr lang="en-US" sz="1200" dirty="0">
+                        <a:latin typeface="Calibri" charset="0"/>
+                        <a:ea typeface="Calibri" charset="0"/>
+                        <a:cs typeface="Calibri" charset="0"/>
+                      </a:endParaRPr>
+                    </a:p>
+                  </a:txBody>
+                  <a:tcPr marL="54864" marR="54864" marT="54864" marB="54864" anchor="ctr">
+                    <a:lnL w="6350" cap="flat" cmpd="sng" algn="ctr">
+                      <a:solidFill>
+                        <a:srgbClr val="D1D5DB"/>
+                      </a:solidFill>
+                      <a:prstDash val="solid"/>
+                      <a:round/>
+                      <a:headEnd type="none" w="med" len="med"/>
+                      <a:tailEnd type="none" w="med" len="med"/>
+                    </a:lnL>
+                    <a:lnR w="6350" cap="flat" cmpd="sng" algn="ctr">
+                      <a:solidFill>
+                        <a:srgbClr val="D1D5DB"/>
+                      </a:solidFill>
+                      <a:prstDash val="solid"/>
+                      <a:round/>
+                      <a:headEnd type="none" w="med" len="med"/>
+                      <a:tailEnd type="none" w="med" len="med"/>
+                    </a:lnR>
+                    <a:lnT w="6350" cap="flat" cmpd="sng" algn="ctr">
+                      <a:solidFill>
+                        <a:srgbClr val="D1D5DB"/>
+                      </a:solidFill>
+                      <a:prstDash val="solid"/>
+                      <a:round/>
+                      <a:headEnd type="none" w="med" len="med"/>
+                      <a:tailEnd type="none" w="med" len="med"/>
+                    </a:lnT>
+                    <a:lnB w="6350" cap="flat" cmpd="sng" algn="ctr">
+                      <a:solidFill>
+                        <a:srgbClr val="D1D5DB"/>
+                      </a:solidFill>
+                      <a:prstDash val="solid"/>
+                      <a:round/>
+                      <a:headEnd type="none" w="med" len="med"/>
+                      <a:tailEnd type="none" w="med" len="med"/>
+                    </a:lnB>
+                    <a:solidFill>
+                      <a:srgbClr val="FFFFFF"/>
+                    </a:solidFill>
+                  </a:tcPr>
+                </a:tc>
+                <a:tc>
+                  <a:txBody>
+                    <a:bodyPr/>
+                    <a:lstStyle/>
+                    <a:p>
+                      <a:pPr indent="0" marL="0">
+                        <a:buNone/>
+                      </a:pPr>
+                      <a:r>
+                        <a:rPr lang="en-US" sz="1200" dirty="0">
+                          <a:solidFill>
+                            <a:srgbClr val="212121"/>
+                          </a:solidFill>
+                          <a:latin typeface="Calibri" pitchFamily="34" charset="0"/>
+                          <a:ea typeface="Calibri" pitchFamily="34" charset="-122"/>
+                          <a:cs typeface="Calibri" pitchFamily="34" charset="-120"/>
+                        </a:rPr>
+                        <a:t>agent-framework-foundry-hosting</a:t>
+                      </a:r>
+                      <a:endParaRPr lang="en-US" sz="1200" dirty="0">
+                        <a:latin typeface="Calibri" charset="0"/>
+                        <a:ea typeface="Calibri" charset="0"/>
+                        <a:cs typeface="Calibri" charset="0"/>
+                      </a:endParaRPr>
+                    </a:p>
+                  </a:txBody>
+                  <a:tcPr marL="54864" marR="54864" marT="54864" marB="54864" anchor="ctr">
+                    <a:lnL w="6350" cap="flat" cmpd="sng" algn="ctr">
+                      <a:solidFill>
+                        <a:srgbClr val="D1D5DB"/>
+                      </a:solidFill>
+                      <a:prstDash val="solid"/>
+                      <a:round/>
+                      <a:headEnd type="none" w="med" len="med"/>
+                      <a:tailEnd type="none" w="med" len="med"/>
+                    </a:lnL>
+                    <a:lnR w="6350" cap="flat" cmpd="sng" algn="ctr">
+                      <a:solidFill>
+                        <a:srgbClr val="D1D5DB"/>
+                      </a:solidFill>
+                      <a:prstDash val="solid"/>
+                      <a:round/>
+                      <a:headEnd type="none" w="med" len="med"/>
+                      <a:tailEnd type="none" w="med" len="med"/>
+                    </a:lnR>
+                    <a:lnT w="6350" cap="flat" cmpd="sng" algn="ctr">
+                      <a:solidFill>
+                        <a:srgbClr val="D1D5DB"/>
+                      </a:solidFill>
+                      <a:prstDash val="solid"/>
+                      <a:round/>
+                      <a:headEnd type="none" w="med" len="med"/>
+                      <a:tailEnd type="none" w="med" len="med"/>
+                    </a:lnT>
+                    <a:lnB w="6350" cap="flat" cmpd="sng" algn="ctr">
+                      <a:solidFill>
+                        <a:srgbClr val="D1D5DB"/>
+                      </a:solidFill>
+                      <a:prstDash val="solid"/>
+                      <a:round/>
+                      <a:headEnd type="none" w="med" len="med"/>
+                      <a:tailEnd type="none" w="med" len="med"/>
+                    </a:lnB>
+                    <a:solidFill>
+                      <a:srgbClr val="FFFFFF"/>
+                    </a:solidFill>
+                  </a:tcPr>
+                </a:tc>
+                <a:tc>
+                  <a:txBody>
+                    <a:bodyPr/>
+                    <a:lstStyle/>
+                    <a:p>
+                      <a:pPr indent="0" marL="0">
+                        <a:buNone/>
+                      </a:pPr>
+                      <a:r>
+                        <a:rPr lang="en-US" sz="1200" dirty="0">
+                          <a:solidFill>
+                            <a:srgbClr val="212121"/>
+                          </a:solidFill>
+                          <a:latin typeface="Calibri" pitchFamily="34" charset="0"/>
+                          <a:ea typeface="Calibri" pitchFamily="34" charset="-122"/>
+                          <a:cs typeface="Calibri" pitchFamily="34" charset="-120"/>
+                        </a:rPr>
+                        <a:t>(via Microsoft.Agents.AI.Foundry)</a:t>
+                      </a:r>
+                      <a:endParaRPr lang="en-US" sz="1200" dirty="0">
+                        <a:latin typeface="Calibri" charset="0"/>
+                        <a:ea typeface="Calibri" charset="0"/>
+                        <a:cs typeface="Calibri" charset="0"/>
+                      </a:endParaRPr>
+                    </a:p>
+                  </a:txBody>
+                  <a:tcPr marL="54864" marR="54864" marT="54864" marB="54864" anchor="ctr">
+                    <a:lnL w="6350" cap="flat" cmpd="sng" algn="ctr">
+                      <a:solidFill>
+                        <a:srgbClr val="D1D5DB"/>
+                      </a:solidFill>
+                      <a:prstDash val="solid"/>
+                      <a:round/>
+                      <a:headEnd type="none" w="med" len="med"/>
+                      <a:tailEnd type="none" w="med" len="med"/>
+                    </a:lnL>
+                    <a:lnR w="6350" cap="flat" cmpd="sng" algn="ctr">
+                      <a:solidFill>
+                        <a:srgbClr val="D1D5DB"/>
+                      </a:solidFill>
+                      <a:prstDash val="solid"/>
+                      <a:round/>
+                      <a:headEnd type="none" w="med" len="med"/>
+                      <a:tailEnd type="none" w="med" len="med"/>
+                    </a:lnR>
+                    <a:lnT w="6350" cap="flat" cmpd="sng" algn="ctr">
+                      <a:solidFill>
+                        <a:srgbClr val="D1D5DB"/>
+                      </a:solidFill>
+                      <a:prstDash val="solid"/>
+                      <a:round/>
+                      <a:headEnd type="none" w="med" len="med"/>
+                      <a:tailEnd type="none" w="med" len="med"/>
+                    </a:lnT>
+                    <a:lnB w="6350" cap="flat" cmpd="sng" algn="ctr">
+                      <a:solidFill>
+                        <a:srgbClr val="D1D5DB"/>
+                      </a:solidFill>
+                      <a:prstDash val="solid"/>
+                      <a:round/>
+                      <a:headEnd type="none" w="med" len="med"/>
+                      <a:tailEnd type="none" w="med" len="med"/>
+                    </a:lnB>
+                    <a:solidFill>
+                      <a:srgbClr val="FFFFFF"/>
+                    </a:solidFill>
+                  </a:tcPr>
+                </a:tc>
+              </a:tr>
+              <a:tr h="384048">
+                <a:tc>
+                  <a:txBody>
+                    <a:bodyPr/>
+                    <a:lstStyle/>
+                    <a:p>
+                      <a:pPr indent="0" marL="0">
+                        <a:buNone/>
+                      </a:pPr>
+                      <a:r>
+                        <a:rPr lang="en-US" sz="1200" dirty="0">
+                          <a:solidFill>
+                            <a:srgbClr val="212121"/>
+                          </a:solidFill>
+                          <a:latin typeface="Calibri" pitchFamily="34" charset="0"/>
+                          <a:ea typeface="Calibri" pitchFamily="34" charset="-122"/>
+                          <a:cs typeface="Calibri" pitchFamily="34" charset="-120"/>
+                        </a:rPr>
+                        <a:t>AI Search</a:t>
+                      </a:r>
+                      <a:endParaRPr lang="en-US" sz="1200" dirty="0">
+                        <a:latin typeface="Calibri" charset="0"/>
+                        <a:ea typeface="Calibri" charset="0"/>
+                        <a:cs typeface="Calibri" charset="0"/>
+                      </a:endParaRPr>
+                    </a:p>
+                  </a:txBody>
+                  <a:tcPr marL="54864" marR="54864" marT="54864" marB="54864" anchor="ctr">
+                    <a:lnL w="6350" cap="flat" cmpd="sng" algn="ctr">
+                      <a:solidFill>
+                        <a:srgbClr val="D1D5DB"/>
+                      </a:solidFill>
+                      <a:prstDash val="solid"/>
+                      <a:round/>
+                      <a:headEnd type="none" w="med" len="med"/>
+                      <a:tailEnd type="none" w="med" len="med"/>
+                    </a:lnL>
+                    <a:lnR w="6350" cap="flat" cmpd="sng" algn="ctr">
+                      <a:solidFill>
+                        <a:srgbClr val="D1D5DB"/>
+                      </a:solidFill>
+                      <a:prstDash val="solid"/>
+                      <a:round/>
+                      <a:headEnd type="none" w="med" len="med"/>
+                      <a:tailEnd type="none" w="med" len="med"/>
+                    </a:lnR>
+                    <a:lnT w="6350" cap="flat" cmpd="sng" algn="ctr">
+                      <a:solidFill>
+                        <a:srgbClr val="D1D5DB"/>
+                      </a:solidFill>
+                      <a:prstDash val="solid"/>
+                      <a:round/>
+                      <a:headEnd type="none" w="med" len="med"/>
+                      <a:tailEnd type="none" w="med" len="med"/>
+                    </a:lnT>
+                    <a:lnB w="6350" cap="flat" cmpd="sng" algn="ctr">
+                      <a:solidFill>
+                        <a:srgbClr val="D1D5DB"/>
+                      </a:solidFill>
+                      <a:prstDash val="solid"/>
+                      <a:round/>
+                      <a:headEnd type="none" w="med" len="med"/>
+                      <a:tailEnd type="none" w="med" len="med"/>
+                    </a:lnB>
+                    <a:solidFill>
+                      <a:srgbClr val="F3F4F6"/>
+                    </a:solidFill>
+                  </a:tcPr>
+                </a:tc>
+                <a:tc>
+                  <a:txBody>
+                    <a:bodyPr/>
+                    <a:lstStyle/>
+                    <a:p>
+                      <a:pPr indent="0" marL="0">
+                        <a:buNone/>
+                      </a:pPr>
+                      <a:r>
+                        <a:rPr lang="en-US" sz="1200" dirty="0">
+                          <a:solidFill>
+                            <a:srgbClr val="212121"/>
+                          </a:solidFill>
+                          <a:latin typeface="Calibri" pitchFamily="34" charset="0"/>
+                          <a:ea typeface="Calibri" pitchFamily="34" charset="-122"/>
+                          <a:cs typeface="Calibri" pitchFamily="34" charset="-120"/>
+                        </a:rPr>
+                        <a:t>agent-framework-azure-ai-search</a:t>
+                      </a:r>
+                      <a:endParaRPr lang="en-US" sz="1200" dirty="0">
+                        <a:latin typeface="Calibri" charset="0"/>
+                        <a:ea typeface="Calibri" charset="0"/>
+                        <a:cs typeface="Calibri" charset="0"/>
+                      </a:endParaRPr>
+                    </a:p>
+                  </a:txBody>
+                  <a:tcPr marL="54864" marR="54864" marT="54864" marB="54864" anchor="ctr">
+                    <a:lnL w="6350" cap="flat" cmpd="sng" algn="ctr">
+                      <a:solidFill>
+                        <a:srgbClr val="D1D5DB"/>
+                      </a:solidFill>
+                      <a:prstDash val="solid"/>
+                      <a:round/>
+                      <a:headEnd type="none" w="med" len="med"/>
+                      <a:tailEnd type="none" w="med" len="med"/>
+                    </a:lnL>
+                    <a:lnR w="6350" cap="flat" cmpd="sng" algn="ctr">
+                      <a:solidFill>
+                        <a:srgbClr val="D1D5DB"/>
+                      </a:solidFill>
+                      <a:prstDash val="solid"/>
+                      <a:round/>
+                      <a:headEnd type="none" w="med" len="med"/>
+                      <a:tailEnd type="none" w="med" len="med"/>
+                    </a:lnR>
+                    <a:lnT w="6350" cap="flat" cmpd="sng" algn="ctr">
+                      <a:solidFill>
+                        <a:srgbClr val="D1D5DB"/>
+                      </a:solidFill>
+                      <a:prstDash val="solid"/>
+                      <a:round/>
+                      <a:headEnd type="none" w="med" len="med"/>
+                      <a:tailEnd type="none" w="med" len="med"/>
+                    </a:lnT>
+                    <a:lnB w="6350" cap="flat" cmpd="sng" algn="ctr">
+                      <a:solidFill>
+                        <a:srgbClr val="D1D5DB"/>
+                      </a:solidFill>
+                      <a:prstDash val="solid"/>
+                      <a:round/>
+                      <a:headEnd type="none" w="med" len="med"/>
+                      <a:tailEnd type="none" w="med" len="med"/>
+                    </a:lnB>
+                    <a:solidFill>
+                      <a:srgbClr val="F3F4F6"/>
+                    </a:solidFill>
+                  </a:tcPr>
+                </a:tc>
+                <a:tc>
+                  <a:txBody>
+                    <a:bodyPr/>
+                    <a:lstStyle/>
+                    <a:p>
+                      <a:pPr indent="0" marL="0">
+                        <a:buNone/>
+                      </a:pPr>
+                      <a:r>
+                        <a:rPr lang="en-US" sz="1200" dirty="0">
+                          <a:solidFill>
+                            <a:srgbClr val="212121"/>
+                          </a:solidFill>
+                          <a:latin typeface="Calibri" pitchFamily="34" charset="0"/>
+                          <a:ea typeface="Calibri" pitchFamily="34" charset="-122"/>
+                          <a:cs typeface="Calibri" pitchFamily="34" charset="-120"/>
+                        </a:rPr>
+                        <a:t>Azure.Search.Documents</a:t>
+                      </a:r>
+                      <a:endParaRPr lang="en-US" sz="1200" dirty="0">
+                        <a:latin typeface="Calibri" charset="0"/>
+                        <a:ea typeface="Calibri" charset="0"/>
+                        <a:cs typeface="Calibri" charset="0"/>
+                      </a:endParaRPr>
+                    </a:p>
+                  </a:txBody>
+                  <a:tcPr marL="54864" marR="54864" marT="54864" marB="54864" anchor="ctr">
+                    <a:lnL w="6350" cap="flat" cmpd="sng" algn="ctr">
+                      <a:solidFill>
+                        <a:srgbClr val="D1D5DB"/>
+                      </a:solidFill>
+                      <a:prstDash val="solid"/>
+                      <a:round/>
+                      <a:headEnd type="none" w="med" len="med"/>
+                      <a:tailEnd type="none" w="med" len="med"/>
+                    </a:lnL>
+                    <a:lnR w="6350" cap="flat" cmpd="sng" algn="ctr">
+                      <a:solidFill>
+                        <a:srgbClr val="D1D5DB"/>
+                      </a:solidFill>
+                      <a:prstDash val="solid"/>
+                      <a:round/>
+                      <a:headEnd type="none" w="med" len="med"/>
+                      <a:tailEnd type="none" w="med" len="med"/>
+                    </a:lnR>
+                    <a:lnT w="6350" cap="flat" cmpd="sng" algn="ctr">
+                      <a:solidFill>
+                        <a:srgbClr val="D1D5DB"/>
+                      </a:solidFill>
+                      <a:prstDash val="solid"/>
+                      <a:round/>
+                      <a:headEnd type="none" w="med" len="med"/>
+                      <a:tailEnd type="none" w="med" len="med"/>
+                    </a:lnT>
+                    <a:lnB w="6350" cap="flat" cmpd="sng" algn="ctr">
+                      <a:solidFill>
+                        <a:srgbClr val="D1D5DB"/>
+                      </a:solidFill>
+                      <a:prstDash val="solid"/>
+                      <a:round/>
+                      <a:headEnd type="none" w="med" len="med"/>
+                      <a:tailEnd type="none" w="med" len="med"/>
+                    </a:lnB>
+                    <a:solidFill>
+                      <a:srgbClr val="F3F4F6"/>
+                    </a:solidFill>
+                  </a:tcPr>
+                </a:tc>
+              </a:tr>
+              <a:tr h="384048">
+                <a:tc>
+                  <a:txBody>
+                    <a:bodyPr/>
+                    <a:lstStyle/>
+                    <a:p>
+                      <a:pPr indent="0" marL="0">
+                        <a:buNone/>
+                      </a:pPr>
+                      <a:r>
+                        <a:rPr lang="en-US" sz="1200" dirty="0">
+                          <a:solidFill>
+                            <a:srgbClr val="212121"/>
+                          </a:solidFill>
+                          <a:latin typeface="Calibri" pitchFamily="34" charset="0"/>
+                          <a:ea typeface="Calibri" pitchFamily="34" charset="-122"/>
+                          <a:cs typeface="Calibri" pitchFamily="34" charset="-120"/>
+                        </a:rPr>
+                        <a:t>MCP hosting</a:t>
+                      </a:r>
+                      <a:endParaRPr lang="en-US" sz="1200" dirty="0">
+                        <a:latin typeface="Calibri" charset="0"/>
+                        <a:ea typeface="Calibri" charset="0"/>
+                        <a:cs typeface="Calibri" charset="0"/>
+                      </a:endParaRPr>
+                    </a:p>
+                  </a:txBody>
+                  <a:tcPr marL="54864" marR="54864" marT="54864" marB="54864" anchor="ctr">
+                    <a:lnL w="6350" cap="flat" cmpd="sng" algn="ctr">
+                      <a:solidFill>
+                        <a:srgbClr val="D1D5DB"/>
+                      </a:solidFill>
+                      <a:prstDash val="solid"/>
+                      <a:round/>
+                      <a:headEnd type="none" w="med" len="med"/>
+                      <a:tailEnd type="none" w="med" len="med"/>
+                    </a:lnL>
+                    <a:lnR w="6350" cap="flat" cmpd="sng" algn="ctr">
+                      <a:solidFill>
+                        <a:srgbClr val="D1D5DB"/>
+                      </a:solidFill>
+                      <a:prstDash val="solid"/>
+                      <a:round/>
+                      <a:headEnd type="none" w="med" len="med"/>
+                      <a:tailEnd type="none" w="med" len="med"/>
+                    </a:lnR>
+                    <a:lnT w="6350" cap="flat" cmpd="sng" algn="ctr">
+                      <a:solidFill>
+                        <a:srgbClr val="D1D5DB"/>
+                      </a:solidFill>
+                      <a:prstDash val="solid"/>
+                      <a:round/>
+                      <a:headEnd type="none" w="med" len="med"/>
+                      <a:tailEnd type="none" w="med" len="med"/>
+                    </a:lnT>
+                    <a:lnB w="6350" cap="flat" cmpd="sng" algn="ctr">
+                      <a:solidFill>
+                        <a:srgbClr val="D1D5DB"/>
+                      </a:solidFill>
+                      <a:prstDash val="solid"/>
+                      <a:round/>
+                      <a:headEnd type="none" w="med" len="med"/>
+                      <a:tailEnd type="none" w="med" len="med"/>
+                    </a:lnB>
+                    <a:solidFill>
+                      <a:srgbClr val="FFFFFF"/>
+                    </a:solidFill>
+                  </a:tcPr>
+                </a:tc>
+                <a:tc>
+                  <a:txBody>
+                    <a:bodyPr/>
+                    <a:lstStyle/>
+                    <a:p>
+                      <a:pPr indent="0" marL="0">
+                        <a:buNone/>
+                      </a:pPr>
+                      <a:r>
+                        <a:rPr lang="en-US" sz="1200" dirty="0">
+                          <a:solidFill>
+                            <a:srgbClr val="212121"/>
+                          </a:solidFill>
+                          <a:latin typeface="Calibri" pitchFamily="34" charset="0"/>
+                          <a:ea typeface="Calibri" pitchFamily="34" charset="-122"/>
+                          <a:cs typeface="Calibri" pitchFamily="34" charset="-120"/>
+                        </a:rPr>
+                        <a:t>agent-framework-hosting-mcp</a:t>
+                      </a:r>
+                      <a:endParaRPr lang="en-US" sz="1200" dirty="0">
+                        <a:latin typeface="Calibri" charset="0"/>
+                        <a:ea typeface="Calibri" charset="0"/>
+                        <a:cs typeface="Calibri" charset="0"/>
+                      </a:endParaRPr>
+                    </a:p>
+                  </a:txBody>
+                  <a:tcPr marL="54864" marR="54864" marT="54864" marB="54864" anchor="ctr">
+                    <a:lnL w="6350" cap="flat" cmpd="sng" algn="ctr">
+                      <a:solidFill>
+                        <a:srgbClr val="D1D5DB"/>
+                      </a:solidFill>
+                      <a:prstDash val="solid"/>
+                      <a:round/>
+                      <a:headEnd type="none" w="med" len="med"/>
+                      <a:tailEnd type="none" w="med" len="med"/>
+                    </a:lnL>
+                    <a:lnR w="6350" cap="flat" cmpd="sng" algn="ctr">
+                      <a:solidFill>
+                        <a:srgbClr val="D1D5DB"/>
+                      </a:solidFill>
+                      <a:prstDash val="solid"/>
+                      <a:round/>
+                      <a:headEnd type="none" w="med" len="med"/>
+                      <a:tailEnd type="none" w="med" len="med"/>
+                    </a:lnR>
+                    <a:lnT w="6350" cap="flat" cmpd="sng" algn="ctr">
+                      <a:solidFill>
+                        <a:srgbClr val="D1D5DB"/>
+                      </a:solidFill>
+                      <a:prstDash val="solid"/>
+                      <a:round/>
+                      <a:headEnd type="none" w="med" len="med"/>
+                      <a:tailEnd type="none" w="med" len="med"/>
+                    </a:lnT>
+                    <a:lnB w="6350" cap="flat" cmpd="sng" algn="ctr">
+                      <a:solidFill>
+                        <a:srgbClr val="D1D5DB"/>
+                      </a:solidFill>
+                      <a:prstDash val="solid"/>
+                      <a:round/>
+                      <a:headEnd type="none" w="med" len="med"/>
+                      <a:tailEnd type="none" w="med" len="med"/>
+                    </a:lnB>
+                    <a:solidFill>
+                      <a:srgbClr val="FFFFFF"/>
+                    </a:solidFill>
+                  </a:tcPr>
+                </a:tc>
+                <a:tc>
+                  <a:txBody>
+                    <a:bodyPr/>
+                    <a:lstStyle/>
+                    <a:p>
+                      <a:pPr indent="0" marL="0">
+                        <a:buNone/>
+                      </a:pPr>
+                      <a:r>
+                        <a:rPr lang="en-US" sz="1200" dirty="0">
+                          <a:solidFill>
+                            <a:srgbClr val="212121"/>
+                          </a:solidFill>
+                          <a:latin typeface="Calibri" pitchFamily="34" charset="0"/>
+                          <a:ea typeface="Calibri" pitchFamily="34" charset="-122"/>
+                          <a:cs typeface="Calibri" pitchFamily="34" charset="-120"/>
+                        </a:rPr>
+                        <a:t>ModelContextProtocol samples</a:t>
+                      </a:r>
+                      <a:endParaRPr lang="en-US" sz="1200" dirty="0">
+                        <a:latin typeface="Calibri" charset="0"/>
+                        <a:ea typeface="Calibri" charset="0"/>
+                        <a:cs typeface="Calibri" charset="0"/>
+                      </a:endParaRPr>
+                    </a:p>
+                  </a:txBody>
+                  <a:tcPr marL="54864" marR="54864" marT="54864" marB="54864" anchor="ctr">
+                    <a:lnL w="6350" cap="flat" cmpd="sng" algn="ctr">
+                      <a:solidFill>
+                        <a:srgbClr val="D1D5DB"/>
+                      </a:solidFill>
+                      <a:prstDash val="solid"/>
+                      <a:round/>
+                      <a:headEnd type="none" w="med" len="med"/>
+                      <a:tailEnd type="none" w="med" len="med"/>
+                    </a:lnL>
+                    <a:lnR w="6350" cap="flat" cmpd="sng" algn="ctr">
+                      <a:solidFill>
+                        <a:srgbClr val="D1D5DB"/>
+                      </a:solidFill>
+                      <a:prstDash val="solid"/>
+                      <a:round/>
+                      <a:headEnd type="none" w="med" len="med"/>
+                      <a:tailEnd type="none" w="med" len="med"/>
+                    </a:lnR>
+                    <a:lnT w="6350" cap="flat" cmpd="sng" algn="ctr">
+                      <a:solidFill>
+                        <a:srgbClr val="D1D5DB"/>
+                      </a:solidFill>
+                      <a:prstDash val="solid"/>
+                      <a:round/>
+                      <a:headEnd type="none" w="med" len="med"/>
+                      <a:tailEnd type="none" w="med" len="med"/>
+                    </a:lnT>
+                    <a:lnB w="6350" cap="flat" cmpd="sng" algn="ctr">
+                      <a:solidFill>
+                        <a:srgbClr val="D1D5DB"/>
+                      </a:solidFill>
+                      <a:prstDash val="solid"/>
+                      <a:round/>
+                      <a:headEnd type="none" w="med" len="med"/>
+                      <a:tailEnd type="none" w="med" len="med"/>
+                    </a:lnB>
+                    <a:solidFill>
+                      <a:srgbClr val="FFFFFF"/>
+                    </a:solidFill>
+                  </a:tcPr>
+                </a:tc>
+              </a:tr>
+            </a:tbl>
+          </a:graphicData>
+        </a:graphic>
+      </p:graphicFrame>
     </p:spTree>
   </p:cSld>
   <p:clrMapOvr>
@@ -2336,6 +3587,253 @@
                 <a:ea typeface="Calibri" pitchFamily="34" charset="-122"/>
                 <a:cs typeface="Calibri" pitchFamily="34" charset="-120"/>
               </a:rPr>
+              <a:t>Bridge to the next two modules</a:t>
+            </a:r>
+            <a:endParaRPr lang="en-US" sz="2800" dirty="0"/>
+          </a:p>
+        </p:txBody>
+      </p:sp>
+      <p:sp>
+        <p:nvSpPr>
+          <p:cNvPr id="5" name="Text 3"/>
+          <p:cNvSpPr/>
+          <p:nvPr/>
+        </p:nvSpPr>
+        <p:spPr>
+          <a:xfrm>
+            <a:off x="365760" y="1097280"/>
+            <a:ext cx="8412480" cy="914400"/>
+          </a:xfrm>
+          <a:prstGeom prst="rect">
+            <a:avLst/>
+          </a:prstGeom>
+          <a:noFill/>
+          <a:ln/>
+        </p:spPr>
+        <p:txBody>
+          <a:bodyPr wrap="square" rtlCol="0" anchor="ctr"/>
+          <a:lstStyle/>
+          <a:p>
+            <a:pPr indent="0" marL="0">
+              <a:buNone/>
+            </a:pPr>
+            <a:r>
+              <a:rPr lang="en-US" sz="1600" dirty="0">
+                <a:solidFill>
+                  <a:srgbClr val="212121"/>
+                </a:solidFill>
+                <a:latin typeface="Calibri" pitchFamily="34" charset="0"/>
+                <a:ea typeface="Calibri" pitchFamily="34" charset="-122"/>
+                <a:cs typeface="Calibri" pitchFamily="34" charset="-120"/>
+              </a:rPr>
+              <a:t>You've now seen the MAF primitives that let your process call the Foundry Responses API — Agent + FoundryChatClient (Python) or AIProjectClient.AsAIAgent (C#).</a:t>
+            </a:r>
+            <a:endParaRPr lang="en-US" sz="1600" dirty="0"/>
+          </a:p>
+        </p:txBody>
+      </p:sp>
+      <p:sp>
+        <p:nvSpPr>
+          <p:cNvPr id="6" name="Text 4"/>
+          <p:cNvSpPr/>
+          <p:nvPr/>
+        </p:nvSpPr>
+        <p:spPr>
+          <a:xfrm>
+            <a:off x="365760" y="2194560"/>
+            <a:ext cx="8412480" cy="1097280"/>
+          </a:xfrm>
+          <a:prstGeom prst="rect">
+            <a:avLst/>
+          </a:prstGeom>
+          <a:noFill/>
+          <a:ln/>
+        </p:spPr>
+        <p:txBody>
+          <a:bodyPr wrap="square" rtlCol="0" anchor="ctr"/>
+          <a:lstStyle/>
+          <a:p>
+            <a:pPr indent="0" marL="0">
+              <a:buNone/>
+            </a:pPr>
+            <a:r>
+              <a:rPr lang="en-US" sz="1600" dirty="0">
+                <a:solidFill>
+                  <a:srgbClr val="212121"/>
+                </a:solidFill>
+                <a:latin typeface="Calibri" pitchFamily="34" charset="0"/>
+                <a:ea typeface="Calibri" pitchFamily="34" charset="-122"/>
+                <a:cs typeface="Calibri" pitchFamily="34" charset="-120"/>
+              </a:rPr>
+              <a:t>That's the self-hosted path — one of two hosting families for Agent Framework agents. The other family — Foundry-hosted — has two flavors: Prompt agents (configuration only) and Hosted agents (your code, containerized, run by Foundry). All are connected via FoundryAgent.</a:t>
+            </a:r>
+            <a:endParaRPr lang="en-US" sz="1600" dirty="0"/>
+          </a:p>
+        </p:txBody>
+      </p:sp>
+      <p:sp>
+        <p:nvSpPr>
+          <p:cNvPr id="7" name="Text 5"/>
+          <p:cNvSpPr/>
+          <p:nvPr/>
+        </p:nvSpPr>
+        <p:spPr>
+          <a:xfrm>
+            <a:off x="365760" y="3474720"/>
+            <a:ext cx="8412480" cy="914400"/>
+          </a:xfrm>
+          <a:prstGeom prst="rect">
+            <a:avLst/>
+          </a:prstGeom>
+          <a:noFill/>
+          <a:ln/>
+        </p:spPr>
+        <p:txBody>
+          <a:bodyPr wrap="square" rtlCol="0" anchor="ctr"/>
+          <a:lstStyle/>
+          <a:p>
+            <a:pPr indent="0" marL="0">
+              <a:buNone/>
+            </a:pPr>
+            <a:r>
+              <a:rPr lang="en-US" sz="1500" i="1" dirty="0">
+                <a:solidFill>
+                  <a:srgbClr val="212121"/>
+                </a:solidFill>
+                <a:latin typeface="Calibri" pitchFamily="34" charset="0"/>
+                <a:ea typeface="Calibri" pitchFamily="34" charset="-122"/>
+                <a:cs typeface="Calibri" pitchFamily="34" charset="-120"/>
+              </a:rPr>
+              <a:t>Module 5 gives us the mental model that ties everything together. Module 6 walks both hosting families in detail.</a:t>
+            </a:r>
+            <a:endParaRPr lang="en-US" sz="1500" dirty="0"/>
+          </a:p>
+        </p:txBody>
+      </p:sp>
+    </p:spTree>
+  </p:cSld>
+  <p:clrMapOvr>
+    <a:masterClrMapping/>
+  </p:clrMapOvr>
+</p:sld>
+</file>
+
+<file path=ppt/slides/slide12.xml><?xml version="1.0" encoding="utf-8"?>
+<p:sld xmlns:a="http://schemas.openxmlformats.org/drawingml/2006/main" xmlns:r="http://schemas.openxmlformats.org/officeDocument/2006/relationships" xmlns:p="http://schemas.openxmlformats.org/presentationml/2006/main">
+  <p:cSld name="Slide 12">
+    <p:bg>
+      <p:bgPr>
+        <a:solidFill>
+          <a:srgbClr val="FFFFFF"/>
+        </a:solidFill>
+      </p:bgPr>
+    </p:bg>
+    <p:spTree>
+      <p:nvGrpSpPr>
+        <p:cNvPr id="1" name=""/>
+        <p:cNvGrpSpPr/>
+        <p:nvPr/>
+      </p:nvGrpSpPr>
+      <p:grpSpPr>
+        <a:xfrm>
+          <a:off x="0" y="0"/>
+          <a:ext cx="0" cy="0"/>
+          <a:chOff x="0" y="0"/>
+          <a:chExt cx="0" cy="0"/>
+        </a:xfrm>
+      </p:grpSpPr>
+      <p:sp>
+        <p:nvSpPr>
+          <p:cNvPr id="2" name="Shape 0"/>
+          <p:cNvSpPr/>
+          <p:nvPr/>
+        </p:nvSpPr>
+        <p:spPr>
+          <a:xfrm>
+            <a:off x="0" y="0"/>
+            <a:ext cx="54864" cy="5143500"/>
+          </a:xfrm>
+          <a:prstGeom prst="rect">
+            <a:avLst/>
+          </a:prstGeom>
+          <a:solidFill>
+            <a:srgbClr val="1E2761"/>
+          </a:solidFill>
+          <a:ln/>
+        </p:spPr>
+      </p:sp>
+      <p:sp>
+        <p:nvSpPr>
+          <p:cNvPr id="3" name="Text 1"/>
+          <p:cNvSpPr/>
+          <p:nvPr/>
+        </p:nvSpPr>
+        <p:spPr>
+          <a:xfrm>
+            <a:off x="5669280" y="274320"/>
+            <a:ext cx="3291840" cy="274320"/>
+          </a:xfrm>
+          <a:prstGeom prst="rect">
+            <a:avLst/>
+          </a:prstGeom>
+          <a:noFill/>
+          <a:ln/>
+        </p:spPr>
+        <p:txBody>
+          <a:bodyPr wrap="square" lIns="0" tIns="0" rIns="0" bIns="0" rtlCol="0" anchor="ctr"/>
+          <a:lstStyle/>
+          <a:p>
+            <a:pPr algn="r" indent="0" marL="0">
+              <a:buNone/>
+            </a:pPr>
+            <a:r>
+              <a:rPr lang="en-US" sz="1000" dirty="0">
+                <a:solidFill>
+                  <a:srgbClr val="6B7280"/>
+                </a:solidFill>
+                <a:latin typeface="Calibri" pitchFamily="34" charset="0"/>
+                <a:ea typeface="Calibri" pitchFamily="34" charset="-122"/>
+                <a:cs typeface="Calibri" pitchFamily="34" charset="-120"/>
+              </a:rPr>
+              <a:t>Day 1 · Module 4</a:t>
+            </a:r>
+            <a:endParaRPr lang="en-US" sz="1000" dirty="0"/>
+          </a:p>
+        </p:txBody>
+      </p:sp>
+      <p:sp>
+        <p:nvSpPr>
+          <p:cNvPr id="4" name="Text 2"/>
+          <p:cNvSpPr/>
+          <p:nvPr/>
+        </p:nvSpPr>
+        <p:spPr>
+          <a:xfrm>
+            <a:off x="365760" y="320040"/>
+            <a:ext cx="6217920" cy="640080"/>
+          </a:xfrm>
+          <a:prstGeom prst="rect">
+            <a:avLst/>
+          </a:prstGeom>
+          <a:noFill/>
+          <a:ln/>
+        </p:spPr>
+        <p:txBody>
+          <a:bodyPr wrap="square" lIns="0" tIns="0" rIns="0" bIns="0" rtlCol="0" anchor="ctr"/>
+          <a:lstStyle/>
+          <a:p>
+            <a:pPr indent="0" marL="0">
+              <a:buNone/>
+            </a:pPr>
+            <a:r>
+              <a:rPr lang="en-US" sz="2800" b="1" dirty="0">
+                <a:solidFill>
+                  <a:srgbClr val="1E2761"/>
+                </a:solidFill>
+                <a:latin typeface="Calibri" pitchFamily="34" charset="0"/>
+                <a:ea typeface="Calibri" pitchFamily="34" charset="-122"/>
+                <a:cs typeface="Calibri" pitchFamily="34" charset="-120"/>
+              </a:rPr>
               <a:t>Takeaways</a:t>
             </a:r>
             <a:endParaRPr lang="en-US" sz="2800" dirty="0"/>
@@ -2379,7 +3877,7 @@
                 <a:ea typeface="Calibri" pitchFamily="34" charset="-122"/>
                 <a:cs typeface="Calibri" pitchFamily="34" charset="-120"/>
               </a:rPr>
-              <a:t>MAF's primitives are small and stable: chat client, agent, thread, run, tool, message.</a:t>
+              <a:t>MAF's primitives are small and stable: chat client, agent, session, run, tool, message.</a:t>
             </a:r>
             <a:endParaRPr lang="en-US" sz="1500" dirty="0"/>
           </a:p>
@@ -2442,7 +3940,7 @@
                 <a:ea typeface="Calibri" pitchFamily="34" charset="-122"/>
                 <a:cs typeface="Calibri" pitchFamily="34" charset="-120"/>
               </a:rPr>
-              <a:t>The pattern you just saw — your code calling the Responses API — is one of three ways to run an agent. Module 6 covers all three.</a:t>
+              <a:t>The pattern you just saw — your code calling the Responses API — is the self-hosted family. Module 6 covers both families in detail.</a:t>
             </a:r>
             <a:endParaRPr lang="en-US" sz="1500" dirty="0"/>
           </a:p>
@@ -2515,7 +4013,7 @@
                 <a:ea typeface="Calibri" pitchFamily="34" charset="-122"/>
                 <a:cs typeface="Calibri" pitchFamily="34" charset="-120"/>
               </a:rPr>
-              <a:t>The five-layer agent stack we'll refer to every day this week.</a:t>
+              <a:t>The five-layer agent stack we'll refer to through the rest of the workshop.</a:t>
             </a:r>
             <a:endParaRPr lang="en-US" sz="1600" dirty="0"/>
           </a:p>
@@ -2709,7 +4207,7 @@
                 <a:ea typeface="Calibri" pitchFamily="34" charset="-122"/>
                 <a:cs typeface="Calibri" pitchFamily="34" charset="-120"/>
               </a:rPr>
-              <a:t>One vocabulary — Agent, chat client, tool, thread, run</a:t>
+              <a:t>One vocabulary — Agent, chat client, tool, session, run</a:t>
             </a:r>
             <a:endParaRPr lang="en-US" sz="1500" dirty="0"/>
           </a:p>
@@ -3387,7 +4885,7 @@
                           <a:ea typeface="Calibri" pitchFamily="34" charset="-122"/>
                           <a:cs typeface="Calibri" pitchFamily="34" charset="-120"/>
                         </a:rPr>
-                        <a:t>Thread</a:t>
+                        <a:t>Session</a:t>
                       </a:r>
                       <a:endParaRPr lang="en-US" sz="1300" dirty="0">
                         <a:latin typeface="Calibri" charset="0"/>
@@ -3455,7 +4953,7 @@
                           <a:ea typeface="Calibri" pitchFamily="34" charset="-122"/>
                           <a:cs typeface="Calibri" pitchFamily="34" charset="-120"/>
                         </a:rPr>
-                        <a:t>The conversation state one agent operates on</a:t>
+                        <a:t>Carries conversation history across multiple agent.run() calls; create with agent.create_session(), pass as session=</a:t>
                       </a:r>
                       <a:endParaRPr lang="en-US" sz="1300" dirty="0">
                         <a:latin typeface="Calibri" charset="0"/>
@@ -3869,7 +5367,7 @@
                           <a:ea typeface="Calibri" pitchFamily="34" charset="-122"/>
                           <a:cs typeface="Calibri" pitchFamily="34" charset="-120"/>
                         </a:rPr>
-                        <a:t>Individual user / assistant / tool messages in a thread</a:t>
+                        <a:t>Individual user / assistant / tool messages in a session</a:t>
                       </a:r>
                       <a:endParaRPr lang="en-US" sz="1300" dirty="0">
                         <a:latin typeface="Calibri" charset="0"/>
@@ -4349,7 +5847,7 @@
     <p:bg>
       <p:bgPr>
         <a:solidFill>
-          <a:srgbClr val="FFFFFF"/>
+          <a:srgbClr val="CADCFC"/>
         </a:solidFill>
       </p:bgPr>
     </p:bg>
@@ -4376,7 +5874,7 @@
         <p:spPr>
           <a:xfrm>
             <a:off x="0" y="0"/>
-            <a:ext cx="54864" cy="5143500"/>
+            <a:ext cx="146304" cy="5143500"/>
           </a:xfrm>
           <a:prstGeom prst="rect">
             <a:avLst/>
@@ -4420,7 +5918,7 @@
                 <a:ea typeface="Calibri" pitchFamily="34" charset="-122"/>
                 <a:cs typeface="Calibri" pitchFamily="34" charset="-120"/>
               </a:rPr>
-              <a:t>Day 1 · Module 4</a:t>
+              <a:t>Day 1 · Module 4 · Demo</a:t>
             </a:r>
             <a:endParaRPr lang="en-US" sz="1000" dirty="0"/>
           </a:p>
@@ -4434,8 +5932,8 @@
         </p:nvSpPr>
         <p:spPr>
           <a:xfrm>
-            <a:off x="365760" y="320040"/>
-            <a:ext cx="6217920" cy="640080"/>
+            <a:off x="548640" y="1051560"/>
+            <a:ext cx="5486400" cy="502920"/>
           </a:xfrm>
           <a:prstGeom prst="rect">
             <a:avLst/>
@@ -4451,7 +5949,7 @@
               <a:buNone/>
             </a:pPr>
             <a:r>
-              <a:rPr lang="en-US" sz="2800" b="1" dirty="0">
+              <a:rPr lang="en-US" sz="3200" b="1" spc="800" kern="0" dirty="0">
                 <a:solidFill>
                   <a:srgbClr val="1E2761"/>
                 </a:solidFill>
@@ -4459,47 +5957,22 @@
                 <a:ea typeface="Calibri" pitchFamily="34" charset="-122"/>
                 <a:cs typeface="Calibri" pitchFamily="34" charset="-120"/>
               </a:rPr>
-              <a:t>The simplest possible C# agent</a:t>
-            </a:r>
-            <a:endParaRPr lang="en-US" sz="2800" dirty="0"/>
+              <a:t>DEMO</a:t>
+            </a:r>
+            <a:endParaRPr lang="en-US" sz="3200" dirty="0"/>
           </a:p>
         </p:txBody>
       </p:sp>
       <p:sp>
         <p:nvSpPr>
-          <p:cNvPr id="5" name="Shape 3"/>
+          <p:cNvPr id="5" name="Text 3"/>
           <p:cNvSpPr/>
           <p:nvPr/>
         </p:nvSpPr>
         <p:spPr>
           <a:xfrm>
-            <a:off x="365760" y="1097280"/>
-            <a:ext cx="8412480" cy="3474720"/>
-          </a:xfrm>
-          <a:prstGeom prst="rect">
-            <a:avLst/>
-          </a:prstGeom>
-          <a:solidFill>
-            <a:srgbClr val="F3F4F6"/>
-          </a:solidFill>
-          <a:ln w="6350">
-            <a:solidFill>
-              <a:srgbClr val="D1D5DB"/>
-            </a:solidFill>
-            <a:prstDash val="solid"/>
-          </a:ln>
-        </p:spPr>
-      </p:sp>
-      <p:sp>
-        <p:nvSpPr>
-          <p:cNvPr id="6" name="Text 4"/>
-          <p:cNvSpPr/>
-          <p:nvPr/>
-        </p:nvSpPr>
-        <p:spPr>
-          <a:xfrm>
-            <a:off x="502920" y="1188720"/>
-            <a:ext cx="8138160" cy="3291840"/>
+            <a:off x="548640" y="1691640"/>
+            <a:ext cx="8046720" cy="914400"/>
           </a:xfrm>
           <a:prstGeom prst="rect">
             <a:avLst/>
@@ -4508,195 +5981,144 @@
           <a:ln/>
         </p:spPr>
         <p:txBody>
-          <a:bodyPr wrap="square" lIns="0" tIns="0" rIns="0" bIns="0" rtlCol="0" anchor="t"/>
+          <a:bodyPr wrap="square" lIns="0" tIns="0" rIns="0" bIns="0" rtlCol="0" anchor="ctr"/>
           <a:lstStyle/>
           <a:p>
             <a:pPr indent="0" marL="0">
               <a:buNone/>
             </a:pPr>
             <a:r>
-              <a:rPr lang="en-US" sz="1300" dirty="0">
+              <a:rPr lang="en-US" sz="3000" b="1" dirty="0">
+                <a:solidFill>
+                  <a:srgbClr val="1E2761"/>
+                </a:solidFill>
+                <a:latin typeface="Calibri" pitchFamily="34" charset="0"/>
+                <a:ea typeface="Calibri" pitchFamily="34" charset="-122"/>
+                <a:cs typeface="Calibri" pitchFamily="34" charset="-120"/>
+              </a:rPr>
+              <a:t>The 6-line agent</a:t>
+            </a:r>
+            <a:endParaRPr lang="en-US" sz="3000" dirty="0"/>
+          </a:p>
+        </p:txBody>
+      </p:sp>
+      <p:sp>
+        <p:nvSpPr>
+          <p:cNvPr id="6" name="Text 4"/>
+          <p:cNvSpPr/>
+          <p:nvPr/>
+        </p:nvSpPr>
+        <p:spPr>
+          <a:xfrm>
+            <a:off x="6583680" y="1051560"/>
+            <a:ext cx="2194560" cy="502920"/>
+          </a:xfrm>
+          <a:prstGeom prst="rect">
+            <a:avLst/>
+          </a:prstGeom>
+          <a:noFill/>
+          <a:ln/>
+        </p:spPr>
+        <p:txBody>
+          <a:bodyPr wrap="square" lIns="0" tIns="0" rIns="0" bIns="0" rtlCol="0" anchor="ctr"/>
+          <a:lstStyle/>
+          <a:p>
+            <a:pPr algn="r" indent="0" marL="0">
+              <a:buNone/>
+            </a:pPr>
+            <a:r>
+              <a:rPr lang="en-US" sz="1800" i="1" dirty="0">
+                <a:solidFill>
+                  <a:srgbClr val="6B7280"/>
+                </a:solidFill>
+                <a:latin typeface="Calibri" pitchFamily="34" charset="0"/>
+                <a:ea typeface="Calibri" pitchFamily="34" charset="-122"/>
+                <a:cs typeface="Calibri" pitchFamily="34" charset="-120"/>
+              </a:rPr>
+              <a:t>~3 min</a:t>
+            </a:r>
+            <a:endParaRPr lang="en-US" sz="1800" dirty="0"/>
+          </a:p>
+        </p:txBody>
+      </p:sp>
+      <p:sp>
+        <p:nvSpPr>
+          <p:cNvPr id="7" name="Text 5"/>
+          <p:cNvSpPr/>
+          <p:nvPr/>
+        </p:nvSpPr>
+        <p:spPr>
+          <a:xfrm>
+            <a:off x="548640" y="2788920"/>
+            <a:ext cx="8046720" cy="1371600"/>
+          </a:xfrm>
+          <a:prstGeom prst="rect">
+            <a:avLst/>
+          </a:prstGeom>
+          <a:noFill/>
+          <a:ln/>
+        </p:spPr>
+        <p:txBody>
+          <a:bodyPr wrap="square" lIns="0" tIns="0" rIns="0" bIns="0" rtlCol="0" anchor="ctr"/>
+          <a:lstStyle/>
+          <a:p>
+            <a:pPr indent="0" marL="0">
+              <a:spcAft>
+                <a:spcPts val="600"/>
+              </a:spcAft>
+              <a:buNone/>
+            </a:pPr>
+            <a:r>
+              <a:rPr lang="en-US" sz="1600" dirty="0">
                 <a:solidFill>
                   <a:srgbClr val="212121"/>
                 </a:solidFill>
-                <a:latin typeface="Consolas" pitchFamily="34" charset="0"/>
-                <a:ea typeface="Consolas" pitchFamily="34" charset="-122"/>
-                <a:cs typeface="Consolas" pitchFamily="34" charset="-120"/>
-              </a:rPr>
-              <a:t>using Azure.AI.Projects;</a:t>
-            </a:r>
-            <a:endParaRPr lang="en-US" sz="1300" dirty="0"/>
-          </a:p>
+                <a:latin typeface="Calibri" pitchFamily="34" charset="0"/>
+                <a:ea typeface="Calibri" pitchFamily="34" charset="-122"/>
+                <a:cs typeface="Calibri" pitchFamily="34" charset="-120"/>
+              </a:rPr>
+              <a:t>Live-type an empty scratch directory into a running MAF agent. Six lines from the previous slide — plus uv init, uv sync, and two env vars — get you a real answer from your Foundry-deployed model. Proves there's no ceremony.</a:t>
+            </a:r>
+            <a:endParaRPr lang="en-US" sz="1600" dirty="0"/>
+          </a:p>
+        </p:txBody>
+      </p:sp>
+      <p:sp>
+        <p:nvSpPr>
+          <p:cNvPr id="8" name="Text 6"/>
+          <p:cNvSpPr/>
+          <p:nvPr/>
+        </p:nvSpPr>
+        <p:spPr>
+          <a:xfrm>
+            <a:off x="548640" y="4434840"/>
+            <a:ext cx="8046720" cy="320040"/>
+          </a:xfrm>
+          <a:prstGeom prst="rect">
+            <a:avLst/>
+          </a:prstGeom>
+          <a:noFill/>
+          <a:ln/>
+        </p:spPr>
+        <p:txBody>
+          <a:bodyPr wrap="square" lIns="0" tIns="0" rIns="0" bIns="0" rtlCol="0" anchor="ctr"/>
+          <a:lstStyle/>
           <a:p>
             <a:pPr indent="0" marL="0">
               <a:buNone/>
             </a:pPr>
             <a:r>
-              <a:rPr lang="en-US" sz="1300" dirty="0">
-                <a:solidFill>
-                  <a:srgbClr val="212121"/>
-                </a:solidFill>
-                <a:latin typeface="Consolas" pitchFamily="34" charset="0"/>
-                <a:ea typeface="Consolas" pitchFamily="34" charset="-122"/>
-                <a:cs typeface="Consolas" pitchFamily="34" charset="-120"/>
-              </a:rPr>
-              <a:t>using Azure.Identity;</a:t>
-            </a:r>
-            <a:endParaRPr lang="en-US" sz="1300" dirty="0"/>
-          </a:p>
-          <a:p>
-            <a:pPr indent="0" marL="0">
-              <a:buNone/>
-            </a:pPr>
-            <a:r>
-              <a:rPr lang="en-US" sz="1300" dirty="0">
-                <a:solidFill>
-                  <a:srgbClr val="212121"/>
-                </a:solidFill>
-                <a:latin typeface="Consolas" pitchFamily="34" charset="0"/>
-                <a:ea typeface="Consolas" pitchFamily="34" charset="-122"/>
-                <a:cs typeface="Consolas" pitchFamily="34" charset="-120"/>
-              </a:rPr>
-              <a:t>using Microsoft.Agents.AI;</a:t>
-            </a:r>
-            <a:endParaRPr lang="en-US" sz="1300" dirty="0"/>
-          </a:p>
-          <a:p>
-            <a:pPr indent="0" marL="0">
-              <a:buNone/>
-            </a:pPr>
-            <a:endParaRPr lang="en-US" sz="1300" dirty="0"/>
-          </a:p>
-          <a:p>
-            <a:pPr indent="0" marL="0">
-              <a:buNone/>
-            </a:pPr>
-            <a:r>
-              <a:rPr lang="en-US" sz="1300" dirty="0">
-                <a:solidFill>
-                  <a:srgbClr val="212121"/>
-                </a:solidFill>
-                <a:latin typeface="Consolas" pitchFamily="34" charset="0"/>
-                <a:ea typeface="Consolas" pitchFamily="34" charset="-122"/>
-                <a:cs typeface="Consolas" pitchFamily="34" charset="-120"/>
-              </a:rPr>
-              <a:t>var endpoint = Environment.GetEnvironmentVariable("FOUNDRY_PROJECT_ENDPOINT")!;</a:t>
-            </a:r>
-            <a:endParaRPr lang="en-US" sz="1300" dirty="0"/>
-          </a:p>
-          <a:p>
-            <a:pPr indent="0" marL="0">
-              <a:buNone/>
-            </a:pPr>
-            <a:r>
-              <a:rPr lang="en-US" sz="1300" dirty="0">
-                <a:solidFill>
-                  <a:srgbClr val="212121"/>
-                </a:solidFill>
-                <a:latin typeface="Consolas" pitchFamily="34" charset="0"/>
-                <a:ea typeface="Consolas" pitchFamily="34" charset="-122"/>
-                <a:cs typeface="Consolas" pitchFamily="34" charset="-120"/>
-              </a:rPr>
-              <a:t>var model = Environment.GetEnvironmentVariable("FOUNDRY_MODEL") ?? "gpt-5.6-luna";</a:t>
-            </a:r>
-            <a:endParaRPr lang="en-US" sz="1300" dirty="0"/>
-          </a:p>
-          <a:p>
-            <a:pPr indent="0" marL="0">
-              <a:buNone/>
-            </a:pPr>
-            <a:endParaRPr lang="en-US" sz="1300" dirty="0"/>
-          </a:p>
-          <a:p>
-            <a:pPr indent="0" marL="0">
-              <a:buNone/>
-            </a:pPr>
-            <a:r>
-              <a:rPr lang="en-US" sz="1300" dirty="0">
-                <a:solidFill>
-                  <a:srgbClr val="212121"/>
-                </a:solidFill>
-                <a:latin typeface="Consolas" pitchFamily="34" charset="0"/>
-                <a:ea typeface="Consolas" pitchFamily="34" charset="-122"/>
-                <a:cs typeface="Consolas" pitchFamily="34" charset="-120"/>
-              </a:rPr>
-              <a:t>AIAgent agent = new AIProjectClient(new Uri(endpoint), new DefaultAzureCredential())</a:t>
-            </a:r>
-            <a:endParaRPr lang="en-US" sz="1300" dirty="0"/>
-          </a:p>
-          <a:p>
-            <a:pPr indent="0" marL="0">
-              <a:buNone/>
-            </a:pPr>
-            <a:r>
-              <a:rPr lang="en-US" sz="1300" dirty="0">
-                <a:solidFill>
-                  <a:srgbClr val="212121"/>
-                </a:solidFill>
-                <a:latin typeface="Consolas" pitchFamily="34" charset="0"/>
-                <a:ea typeface="Consolas" pitchFamily="34" charset="-122"/>
-                <a:cs typeface="Consolas" pitchFamily="34" charset="-120"/>
-              </a:rPr>
-              <a:t>    .AsAIAgent(model: model,</a:t>
-            </a:r>
-            <a:endParaRPr lang="en-US" sz="1300" dirty="0"/>
-          </a:p>
-          <a:p>
-            <a:pPr indent="0" marL="0">
-              <a:buNone/>
-            </a:pPr>
-            <a:r>
-              <a:rPr lang="en-US" sz="1300" dirty="0">
-                <a:solidFill>
-                  <a:srgbClr val="212121"/>
-                </a:solidFill>
-                <a:latin typeface="Consolas" pitchFamily="34" charset="0"/>
-                <a:ea typeface="Consolas" pitchFamily="34" charset="-122"/>
-                <a:cs typeface="Consolas" pitchFamily="34" charset="-120"/>
-              </a:rPr>
-              <a:t>               name: "HelloAgent",</a:t>
-            </a:r>
-            <a:endParaRPr lang="en-US" sz="1300" dirty="0"/>
-          </a:p>
-          <a:p>
-            <a:pPr indent="0" marL="0">
-              <a:buNone/>
-            </a:pPr>
-            <a:r>
-              <a:rPr lang="en-US" sz="1300" dirty="0">
-                <a:solidFill>
-                  <a:srgbClr val="212121"/>
-                </a:solidFill>
-                <a:latin typeface="Consolas" pitchFamily="34" charset="0"/>
-                <a:ea typeface="Consolas" pitchFamily="34" charset="-122"/>
-                <a:cs typeface="Consolas" pitchFamily="34" charset="-120"/>
-              </a:rPr>
-              <a:t>               instructions: "You are a friendly assistant. Keep answers brief.");</a:t>
-            </a:r>
-            <a:endParaRPr lang="en-US" sz="1300" dirty="0"/>
-          </a:p>
-          <a:p>
-            <a:pPr indent="0" marL="0">
-              <a:buNone/>
-            </a:pPr>
-            <a:endParaRPr lang="en-US" sz="1300" dirty="0"/>
-          </a:p>
-          <a:p>
-            <a:pPr indent="0" marL="0">
-              <a:buNone/>
-            </a:pPr>
-            <a:r>
-              <a:rPr lang="en-US" sz="1300" dirty="0">
-                <a:solidFill>
-                  <a:srgbClr val="212121"/>
-                </a:solidFill>
-                <a:latin typeface="Consolas" pitchFamily="34" charset="0"/>
-                <a:ea typeface="Consolas" pitchFamily="34" charset="-122"/>
-                <a:cs typeface="Consolas" pitchFamily="34" charset="-120"/>
-              </a:rPr>
-              <a:t>Console.WriteLine(await agent.RunAsync("What is the capital of France?"));</a:t>
-            </a:r>
-            <a:endParaRPr lang="en-US" sz="1300" dirty="0"/>
+              <a:rPr lang="en-US" sz="1100" i="1" dirty="0">
+                <a:solidFill>
+                  <a:srgbClr val="6B7280"/>
+                </a:solidFill>
+                <a:latin typeface="Calibri" pitchFamily="34" charset="0"/>
+                <a:ea typeface="Calibri" pitchFamily="34" charset="-122"/>
+                <a:cs typeface="Calibri" pitchFamily="34" charset="-120"/>
+              </a:rPr>
+              <a:t>Runbook: demos/day1/module-4-demo-1-six-line-agent.md · Scratch files: demos/day1/module-4-demo-1-scratch/</a:t>
+            </a:r>
+            <a:endParaRPr lang="en-US" sz="1100" dirty="0"/>
           </a:p>
         </p:txBody>
       </p:sp>
@@ -4824,7 +6246,7 @@
                 <a:ea typeface="Calibri" pitchFamily="34" charset="-122"/>
                 <a:cs typeface="Calibri" pitchFamily="34" charset="-120"/>
               </a:rPr>
-              <a:t>Non-streaming vs. streaming</a:t>
+              <a:t>The simplest possible C# agent</a:t>
             </a:r>
             <a:endParaRPr lang="en-US" sz="2800" dirty="0"/>
           </a:p>
@@ -4839,7 +6261,7 @@
         <p:spPr>
           <a:xfrm>
             <a:off x="365760" y="1097280"/>
-            <a:ext cx="8412480" cy="3566160"/>
+            <a:ext cx="8412480" cy="3474720"/>
           </a:xfrm>
           <a:prstGeom prst="rect">
             <a:avLst/>
@@ -4864,7 +6286,7 @@
         <p:spPr>
           <a:xfrm>
             <a:off x="502920" y="1188720"/>
-            <a:ext cx="8138160" cy="3383280"/>
+            <a:ext cx="8138160" cy="3291840"/>
           </a:xfrm>
           <a:prstGeom prst="rect">
             <a:avLst/>
@@ -4880,7 +6302,7 @@
               <a:buNone/>
             </a:pPr>
             <a:r>
-              <a:rPr lang="en-US" sz="1200" dirty="0">
+              <a:rPr lang="en-US" sz="1300" dirty="0">
                 <a:solidFill>
                   <a:srgbClr val="212121"/>
                 </a:solidFill>
@@ -4888,16 +6310,16 @@
                 <a:ea typeface="Consolas" pitchFamily="34" charset="-122"/>
                 <a:cs typeface="Consolas" pitchFamily="34" charset="-120"/>
               </a:rPr>
-              <a:t># Python</a:t>
-            </a:r>
-            <a:endParaRPr lang="en-US" sz="1200" dirty="0"/>
+              <a:t>using Azure.AI.Projects;</a:t>
+            </a:r>
+            <a:endParaRPr lang="en-US" sz="1300" dirty="0"/>
           </a:p>
           <a:p>
             <a:pPr indent="0" marL="0">
               <a:buNone/>
             </a:pPr>
             <a:r>
-              <a:rPr lang="en-US" sz="1200" dirty="0">
+              <a:rPr lang="en-US" sz="1300" dirty="0">
                 <a:solidFill>
                   <a:srgbClr val="212121"/>
                 </a:solidFill>
@@ -4905,16 +6327,16 @@
                 <a:ea typeface="Consolas" pitchFamily="34" charset="-122"/>
                 <a:cs typeface="Consolas" pitchFamily="34" charset="-120"/>
               </a:rPr>
-              <a:t>result = await agent.run("Tell me a fun fact.")</a:t>
-            </a:r>
-            <a:endParaRPr lang="en-US" sz="1200" dirty="0"/>
+              <a:t>using Azure.Identity;</a:t>
+            </a:r>
+            <a:endParaRPr lang="en-US" sz="1300" dirty="0"/>
           </a:p>
           <a:p>
             <a:pPr indent="0" marL="0">
               <a:buNone/>
             </a:pPr>
             <a:r>
-              <a:rPr lang="en-US" sz="1200" dirty="0">
+              <a:rPr lang="en-US" sz="1300" dirty="0">
                 <a:solidFill>
                   <a:srgbClr val="212121"/>
                 </a:solidFill>
@@ -4922,22 +6344,22 @@
                 <a:ea typeface="Consolas" pitchFamily="34" charset="-122"/>
                 <a:cs typeface="Consolas" pitchFamily="34" charset="-120"/>
               </a:rPr>
-              <a:t>print(result)</a:t>
-            </a:r>
-            <a:endParaRPr lang="en-US" sz="1200" dirty="0"/>
+              <a:t>using Microsoft.Agents.AI;</a:t>
+            </a:r>
+            <a:endParaRPr lang="en-US" sz="1300" dirty="0"/>
           </a:p>
           <a:p>
             <a:pPr indent="0" marL="0">
               <a:buNone/>
             </a:pPr>
-            <a:endParaRPr lang="en-US" sz="1200" dirty="0"/>
+            <a:endParaRPr lang="en-US" sz="1300" dirty="0"/>
           </a:p>
           <a:p>
             <a:pPr indent="0" marL="0">
               <a:buNone/>
             </a:pPr>
             <a:r>
-              <a:rPr lang="en-US" sz="1200" dirty="0">
+              <a:rPr lang="en-US" sz="1300" dirty="0">
                 <a:solidFill>
                   <a:srgbClr val="212121"/>
                 </a:solidFill>
@@ -4945,16 +6367,16 @@
                 <a:ea typeface="Consolas" pitchFamily="34" charset="-122"/>
                 <a:cs typeface="Consolas" pitchFamily="34" charset="-120"/>
               </a:rPr>
-              <a:t>async for chunk in agent.run("Tell me a fun fact.", stream=True):</a:t>
-            </a:r>
-            <a:endParaRPr lang="en-US" sz="1200" dirty="0"/>
+              <a:t>var endpoint = Environment.GetEnvironmentVariable("FOUNDRY_PROJECT_ENDPOINT")!;</a:t>
+            </a:r>
+            <a:endParaRPr lang="en-US" sz="1300" dirty="0"/>
           </a:p>
           <a:p>
             <a:pPr indent="0" marL="0">
               <a:buNone/>
             </a:pPr>
             <a:r>
-              <a:rPr lang="en-US" sz="1200" dirty="0">
+              <a:rPr lang="en-US" sz="1300" dirty="0">
                 <a:solidFill>
                   <a:srgbClr val="212121"/>
                 </a:solidFill>
@@ -4962,16 +6384,22 @@
                 <a:ea typeface="Consolas" pitchFamily="34" charset="-122"/>
                 <a:cs typeface="Consolas" pitchFamily="34" charset="-120"/>
               </a:rPr>
-              <a:t>    if chunk.text:</a:t>
-            </a:r>
-            <a:endParaRPr lang="en-US" sz="1200" dirty="0"/>
+              <a:t>var model = Environment.GetEnvironmentVariable("FOUNDRY_MODEL") ?? "gpt-5.6-luna";</a:t>
+            </a:r>
+            <a:endParaRPr lang="en-US" sz="1300" dirty="0"/>
           </a:p>
           <a:p>
             <a:pPr indent="0" marL="0">
               <a:buNone/>
             </a:pPr>
-            <a:r>
-              <a:rPr lang="en-US" sz="1200" dirty="0">
+            <a:endParaRPr lang="en-US" sz="1300" dirty="0"/>
+          </a:p>
+          <a:p>
+            <a:pPr indent="0" marL="0">
+              <a:buNone/>
+            </a:pPr>
+            <a:r>
+              <a:rPr lang="en-US" sz="1300" dirty="0">
                 <a:solidFill>
                   <a:srgbClr val="212121"/>
                 </a:solidFill>
@@ -4979,22 +6407,16 @@
                 <a:ea typeface="Consolas" pitchFamily="34" charset="-122"/>
                 <a:cs typeface="Consolas" pitchFamily="34" charset="-120"/>
               </a:rPr>
-              <a:t>        print(chunk.text, end="", flush=True)</a:t>
-            </a:r>
-            <a:endParaRPr lang="en-US" sz="1200" dirty="0"/>
+              <a:t>AIAgent agent = new AIProjectClient(new Uri(endpoint), new DefaultAzureCredential())</a:t>
+            </a:r>
+            <a:endParaRPr lang="en-US" sz="1300" dirty="0"/>
           </a:p>
           <a:p>
             <a:pPr indent="0" marL="0">
               <a:buNone/>
             </a:pPr>
-            <a:endParaRPr lang="en-US" sz="1200" dirty="0"/>
-          </a:p>
-          <a:p>
-            <a:pPr indent="0" marL="0">
-              <a:buNone/>
-            </a:pPr>
-            <a:r>
-              <a:rPr lang="en-US" sz="1200" dirty="0">
+            <a:r>
+              <a:rPr lang="en-US" sz="1300" dirty="0">
                 <a:solidFill>
                   <a:srgbClr val="212121"/>
                 </a:solidFill>
@@ -5002,16 +6424,16 @@
                 <a:ea typeface="Consolas" pitchFamily="34" charset="-122"/>
                 <a:cs typeface="Consolas" pitchFamily="34" charset="-120"/>
               </a:rPr>
-              <a:t>// C#</a:t>
-            </a:r>
-            <a:endParaRPr lang="en-US" sz="1200" dirty="0"/>
+              <a:t>    .AsAIAgent(model: model,</a:t>
+            </a:r>
+            <a:endParaRPr lang="en-US" sz="1300" dirty="0"/>
           </a:p>
           <a:p>
             <a:pPr indent="0" marL="0">
               <a:buNone/>
             </a:pPr>
             <a:r>
-              <a:rPr lang="en-US" sz="1200" dirty="0">
+              <a:rPr lang="en-US" sz="1300" dirty="0">
                 <a:solidFill>
                   <a:srgbClr val="212121"/>
                 </a:solidFill>
@@ -5019,22 +6441,16 @@
                 <a:ea typeface="Consolas" pitchFamily="34" charset="-122"/>
                 <a:cs typeface="Consolas" pitchFamily="34" charset="-120"/>
               </a:rPr>
-              <a:t>Console.WriteLine(await agent.RunAsync("Tell me a fun fact."));</a:t>
-            </a:r>
-            <a:endParaRPr lang="en-US" sz="1200" dirty="0"/>
+              <a:t>               name: "HelloAgent",</a:t>
+            </a:r>
+            <a:endParaRPr lang="en-US" sz="1300" dirty="0"/>
           </a:p>
           <a:p>
             <a:pPr indent="0" marL="0">
               <a:buNone/>
             </a:pPr>
-            <a:endParaRPr lang="en-US" sz="1200" dirty="0"/>
-          </a:p>
-          <a:p>
-            <a:pPr indent="0" marL="0">
-              <a:buNone/>
-            </a:pPr>
-            <a:r>
-              <a:rPr lang="en-US" sz="1200" dirty="0">
+            <a:r>
+              <a:rPr lang="en-US" sz="1300" dirty="0">
                 <a:solidFill>
                   <a:srgbClr val="212121"/>
                 </a:solidFill>
@@ -5042,16 +6458,22 @@
                 <a:ea typeface="Consolas" pitchFamily="34" charset="-122"/>
                 <a:cs typeface="Consolas" pitchFamily="34" charset="-120"/>
               </a:rPr>
-              <a:t>await foreach (var update in agent.RunStreamingAsync("Tell me a fun fact."))</a:t>
-            </a:r>
-            <a:endParaRPr lang="en-US" sz="1200" dirty="0"/>
+              <a:t>               instructions: "You are a friendly assistant. Keep answers brief.");</a:t>
+            </a:r>
+            <a:endParaRPr lang="en-US" sz="1300" dirty="0"/>
           </a:p>
           <a:p>
             <a:pPr indent="0" marL="0">
               <a:buNone/>
             </a:pPr>
-            <a:r>
-              <a:rPr lang="en-US" sz="1200" dirty="0">
+            <a:endParaRPr lang="en-US" sz="1300" dirty="0"/>
+          </a:p>
+          <a:p>
+            <a:pPr indent="0" marL="0">
+              <a:buNone/>
+            </a:pPr>
+            <a:r>
+              <a:rPr lang="en-US" sz="1300" dirty="0">
                 <a:solidFill>
                   <a:srgbClr val="212121"/>
                 </a:solidFill>
@@ -5059,43 +6481,9 @@
                 <a:ea typeface="Consolas" pitchFamily="34" charset="-122"/>
                 <a:cs typeface="Consolas" pitchFamily="34" charset="-120"/>
               </a:rPr>
-              <a:t>{</a:t>
-            </a:r>
-            <a:endParaRPr lang="en-US" sz="1200" dirty="0"/>
-          </a:p>
-          <a:p>
-            <a:pPr indent="0" marL="0">
-              <a:buNone/>
-            </a:pPr>
-            <a:r>
-              <a:rPr lang="en-US" sz="1200" dirty="0">
-                <a:solidFill>
-                  <a:srgbClr val="212121"/>
-                </a:solidFill>
-                <a:latin typeface="Consolas" pitchFamily="34" charset="0"/>
-                <a:ea typeface="Consolas" pitchFamily="34" charset="-122"/>
-                <a:cs typeface="Consolas" pitchFamily="34" charset="-120"/>
-              </a:rPr>
-              <a:t>    Console.Write(update);</a:t>
-            </a:r>
-            <a:endParaRPr lang="en-US" sz="1200" dirty="0"/>
-          </a:p>
-          <a:p>
-            <a:pPr indent="0" marL="0">
-              <a:buNone/>
-            </a:pPr>
-            <a:r>
-              <a:rPr lang="en-US" sz="1200" dirty="0">
-                <a:solidFill>
-                  <a:srgbClr val="212121"/>
-                </a:solidFill>
-                <a:latin typeface="Consolas" pitchFamily="34" charset="0"/>
-                <a:ea typeface="Consolas" pitchFamily="34" charset="-122"/>
-                <a:cs typeface="Consolas" pitchFamily="34" charset="-120"/>
-              </a:rPr>
-              <a:t>}</a:t>
-            </a:r>
-            <a:endParaRPr lang="en-US" sz="1200" dirty="0"/>
+              <a:t>Console.WriteLine(await agent.RunAsync("What is the capital of France?"));</a:t>
+            </a:r>
+            <a:endParaRPr lang="en-US" sz="1300" dirty="0"/>
           </a:p>
         </p:txBody>
       </p:sp>
@@ -5223,7 +6611,7 @@
                 <a:ea typeface="Calibri" pitchFamily="34" charset="-122"/>
                 <a:cs typeface="Calibri" pitchFamily="34" charset="-120"/>
               </a:rPr>
-              <a:t>Multi-turn conversations</a:t>
+              <a:t>Non-streaming vs. streaming</a:t>
             </a:r>
             <a:endParaRPr lang="en-US" sz="2800" dirty="0"/>
           </a:p>
@@ -5231,53 +6619,14 @@
       </p:sp>
       <p:sp>
         <p:nvSpPr>
-          <p:cNvPr id="5" name="Text 3"/>
+          <p:cNvPr id="5" name="Shape 3"/>
           <p:cNvSpPr/>
           <p:nvPr/>
         </p:nvSpPr>
         <p:spPr>
           <a:xfrm>
-            <a:off x="365760" y="1051560"/>
-            <a:ext cx="8412480" cy="640080"/>
-          </a:xfrm>
-          <a:prstGeom prst="rect">
-            <a:avLst/>
-          </a:prstGeom>
-          <a:noFill/>
-          <a:ln/>
-        </p:spPr>
-        <p:txBody>
-          <a:bodyPr wrap="square" rtlCol="0" anchor="ctr"/>
-          <a:lstStyle/>
-          <a:p>
-            <a:pPr indent="0" marL="0">
-              <a:buNone/>
-            </a:pPr>
-            <a:r>
-              <a:rPr lang="en-US" sz="1500" dirty="0">
-                <a:solidFill>
-                  <a:srgbClr val="212121"/>
-                </a:solidFill>
-                <a:latin typeface="Calibri" pitchFamily="34" charset="0"/>
-                <a:ea typeface="Calibri" pitchFamily="34" charset="-122"/>
-                <a:cs typeface="Calibri" pitchFamily="34" charset="-120"/>
-              </a:rPr>
-              <a:t>Threads carry conversation state across runs. A single agent can be invoked repeatedly and remember prior turns.</a:t>
-            </a:r>
-            <a:endParaRPr lang="en-US" sz="1500" dirty="0"/>
-          </a:p>
-        </p:txBody>
-      </p:sp>
-      <p:sp>
-        <p:nvSpPr>
-          <p:cNvPr id="6" name="Shape 4"/>
-          <p:cNvSpPr/>
-          <p:nvPr/>
-        </p:nvSpPr>
-        <p:spPr>
-          <a:xfrm>
-            <a:off x="365760" y="1737360"/>
-            <a:ext cx="8412480" cy="914400"/>
+            <a:off x="365760" y="1097280"/>
+            <a:ext cx="8412480" cy="3566160"/>
           </a:xfrm>
           <a:prstGeom prst="rect">
             <a:avLst/>
@@ -5295,14 +6644,14 @@
       </p:sp>
       <p:sp>
         <p:nvSpPr>
-          <p:cNvPr id="7" name="Text 5"/>
+          <p:cNvPr id="6" name="Text 4"/>
           <p:cNvSpPr/>
           <p:nvPr/>
         </p:nvSpPr>
         <p:spPr>
           <a:xfrm>
-            <a:off x="502920" y="1828800"/>
-            <a:ext cx="8138160" cy="731520"/>
+            <a:off x="502920" y="1188720"/>
+            <a:ext cx="8138160" cy="3383280"/>
           </a:xfrm>
           <a:prstGeom prst="rect">
             <a:avLst/>
@@ -5318,7 +6667,7 @@
               <a:buNone/>
             </a:pPr>
             <a:r>
-              <a:rPr lang="en-US" sz="1600" dirty="0">
+              <a:rPr lang="en-US" sz="1200" dirty="0">
                 <a:solidFill>
                   <a:srgbClr val="212121"/>
                 </a:solidFill>
@@ -5326,16 +6675,16 @@
                 <a:ea typeface="Consolas" pitchFamily="34" charset="-122"/>
                 <a:cs typeface="Consolas" pitchFamily="34" charset="-120"/>
               </a:rPr>
-              <a:t>r1 = await agent.run("My name is Alex.")</a:t>
-            </a:r>
-            <a:endParaRPr lang="en-US" sz="1600" dirty="0"/>
+              <a:t># Python</a:t>
+            </a:r>
+            <a:endParaRPr lang="en-US" sz="1200" dirty="0"/>
           </a:p>
           <a:p>
             <a:pPr indent="0" marL="0">
               <a:buNone/>
             </a:pPr>
             <a:r>
-              <a:rPr lang="en-US" sz="1600" dirty="0">
+              <a:rPr lang="en-US" sz="1200" dirty="0">
                 <a:solidFill>
                   <a:srgbClr val="212121"/>
                 </a:solidFill>
@@ -5343,48 +6692,197 @@
                 <a:ea typeface="Consolas" pitchFamily="34" charset="-122"/>
                 <a:cs typeface="Consolas" pitchFamily="34" charset="-120"/>
               </a:rPr>
-              <a:t>r2 = await agent.run("What's my name?")   # answer: Alex</a:t>
-            </a:r>
-            <a:endParaRPr lang="en-US" sz="1600" dirty="0"/>
-          </a:p>
-        </p:txBody>
-      </p:sp>
-      <p:sp>
-        <p:nvSpPr>
-          <p:cNvPr id="8" name="Text 6"/>
-          <p:cNvSpPr/>
-          <p:nvPr/>
-        </p:nvSpPr>
-        <p:spPr>
-          <a:xfrm>
-            <a:off x="365760" y="2834640"/>
-            <a:ext cx="8412480" cy="1097280"/>
-          </a:xfrm>
-          <a:prstGeom prst="rect">
-            <a:avLst/>
-          </a:prstGeom>
-          <a:noFill/>
-          <a:ln/>
-        </p:spPr>
-        <p:txBody>
-          <a:bodyPr wrap="square" rtlCol="0" anchor="ctr"/>
-          <a:lstStyle/>
+              <a:t>result = await agent.run("Tell me a fun fact.")</a:t>
+            </a:r>
+            <a:endParaRPr lang="en-US" sz="1200" dirty="0"/>
+          </a:p>
           <a:p>
             <a:pPr indent="0" marL="0">
               <a:buNone/>
             </a:pPr>
             <a:r>
-              <a:rPr lang="en-US" sz="1400" dirty="0">
+              <a:rPr lang="en-US" sz="1200" dirty="0">
                 <a:solidFill>
                   <a:srgbClr val="212121"/>
                 </a:solidFill>
-                <a:latin typeface="Calibri" pitchFamily="34" charset="0"/>
-                <a:ea typeface="Calibri" pitchFamily="34" charset="-122"/>
-                <a:cs typeface="Calibri" pitchFamily="34" charset="-120"/>
-              </a:rPr>
-              <a:t>Under the hood MAF is managing the thread for you. You can create explicit threads when you need to — covered in Day 3 memory module.</a:t>
-            </a:r>
-            <a:endParaRPr lang="en-US" sz="1400" dirty="0"/>
+                <a:latin typeface="Consolas" pitchFamily="34" charset="0"/>
+                <a:ea typeface="Consolas" pitchFamily="34" charset="-122"/>
+                <a:cs typeface="Consolas" pitchFamily="34" charset="-120"/>
+              </a:rPr>
+              <a:t>print(result)</a:t>
+            </a:r>
+            <a:endParaRPr lang="en-US" sz="1200" dirty="0"/>
+          </a:p>
+          <a:p>
+            <a:pPr indent="0" marL="0">
+              <a:buNone/>
+            </a:pPr>
+            <a:endParaRPr lang="en-US" sz="1200" dirty="0"/>
+          </a:p>
+          <a:p>
+            <a:pPr indent="0" marL="0">
+              <a:buNone/>
+            </a:pPr>
+            <a:r>
+              <a:rPr lang="en-US" sz="1200" dirty="0">
+                <a:solidFill>
+                  <a:srgbClr val="212121"/>
+                </a:solidFill>
+                <a:latin typeface="Consolas" pitchFamily="34" charset="0"/>
+                <a:ea typeface="Consolas" pitchFamily="34" charset="-122"/>
+                <a:cs typeface="Consolas" pitchFamily="34" charset="-120"/>
+              </a:rPr>
+              <a:t>async for chunk in agent.run("Tell me a fun fact.", stream=True):</a:t>
+            </a:r>
+            <a:endParaRPr lang="en-US" sz="1200" dirty="0"/>
+          </a:p>
+          <a:p>
+            <a:pPr indent="0" marL="0">
+              <a:buNone/>
+            </a:pPr>
+            <a:r>
+              <a:rPr lang="en-US" sz="1200" dirty="0">
+                <a:solidFill>
+                  <a:srgbClr val="212121"/>
+                </a:solidFill>
+                <a:latin typeface="Consolas" pitchFamily="34" charset="0"/>
+                <a:ea typeface="Consolas" pitchFamily="34" charset="-122"/>
+                <a:cs typeface="Consolas" pitchFamily="34" charset="-120"/>
+              </a:rPr>
+              <a:t>    if chunk.text:</a:t>
+            </a:r>
+            <a:endParaRPr lang="en-US" sz="1200" dirty="0"/>
+          </a:p>
+          <a:p>
+            <a:pPr indent="0" marL="0">
+              <a:buNone/>
+            </a:pPr>
+            <a:r>
+              <a:rPr lang="en-US" sz="1200" dirty="0">
+                <a:solidFill>
+                  <a:srgbClr val="212121"/>
+                </a:solidFill>
+                <a:latin typeface="Consolas" pitchFamily="34" charset="0"/>
+                <a:ea typeface="Consolas" pitchFamily="34" charset="-122"/>
+                <a:cs typeface="Consolas" pitchFamily="34" charset="-120"/>
+              </a:rPr>
+              <a:t>        print(chunk.text, end="", flush=True)</a:t>
+            </a:r>
+            <a:endParaRPr lang="en-US" sz="1200" dirty="0"/>
+          </a:p>
+          <a:p>
+            <a:pPr indent="0" marL="0">
+              <a:buNone/>
+            </a:pPr>
+            <a:endParaRPr lang="en-US" sz="1200" dirty="0"/>
+          </a:p>
+          <a:p>
+            <a:pPr indent="0" marL="0">
+              <a:buNone/>
+            </a:pPr>
+            <a:r>
+              <a:rPr lang="en-US" sz="1200" dirty="0">
+                <a:solidFill>
+                  <a:srgbClr val="212121"/>
+                </a:solidFill>
+                <a:latin typeface="Consolas" pitchFamily="34" charset="0"/>
+                <a:ea typeface="Consolas" pitchFamily="34" charset="-122"/>
+                <a:cs typeface="Consolas" pitchFamily="34" charset="-120"/>
+              </a:rPr>
+              <a:t>// C#</a:t>
+            </a:r>
+            <a:endParaRPr lang="en-US" sz="1200" dirty="0"/>
+          </a:p>
+          <a:p>
+            <a:pPr indent="0" marL="0">
+              <a:buNone/>
+            </a:pPr>
+            <a:r>
+              <a:rPr lang="en-US" sz="1200" dirty="0">
+                <a:solidFill>
+                  <a:srgbClr val="212121"/>
+                </a:solidFill>
+                <a:latin typeface="Consolas" pitchFamily="34" charset="0"/>
+                <a:ea typeface="Consolas" pitchFamily="34" charset="-122"/>
+                <a:cs typeface="Consolas" pitchFamily="34" charset="-120"/>
+              </a:rPr>
+              <a:t>Console.WriteLine(await agent.RunAsync("Tell me a fun fact."));</a:t>
+            </a:r>
+            <a:endParaRPr lang="en-US" sz="1200" dirty="0"/>
+          </a:p>
+          <a:p>
+            <a:pPr indent="0" marL="0">
+              <a:buNone/>
+            </a:pPr>
+            <a:endParaRPr lang="en-US" sz="1200" dirty="0"/>
+          </a:p>
+          <a:p>
+            <a:pPr indent="0" marL="0">
+              <a:buNone/>
+            </a:pPr>
+            <a:r>
+              <a:rPr lang="en-US" sz="1200" dirty="0">
+                <a:solidFill>
+                  <a:srgbClr val="212121"/>
+                </a:solidFill>
+                <a:latin typeface="Consolas" pitchFamily="34" charset="0"/>
+                <a:ea typeface="Consolas" pitchFamily="34" charset="-122"/>
+                <a:cs typeface="Consolas" pitchFamily="34" charset="-120"/>
+              </a:rPr>
+              <a:t>await foreach (var update in agent.RunStreamingAsync("Tell me a fun fact."))</a:t>
+            </a:r>
+            <a:endParaRPr lang="en-US" sz="1200" dirty="0"/>
+          </a:p>
+          <a:p>
+            <a:pPr indent="0" marL="0">
+              <a:buNone/>
+            </a:pPr>
+            <a:r>
+              <a:rPr lang="en-US" sz="1200" dirty="0">
+                <a:solidFill>
+                  <a:srgbClr val="212121"/>
+                </a:solidFill>
+                <a:latin typeface="Consolas" pitchFamily="34" charset="0"/>
+                <a:ea typeface="Consolas" pitchFamily="34" charset="-122"/>
+                <a:cs typeface="Consolas" pitchFamily="34" charset="-120"/>
+              </a:rPr>
+              <a:t>{</a:t>
+            </a:r>
+            <a:endParaRPr lang="en-US" sz="1200" dirty="0"/>
+          </a:p>
+          <a:p>
+            <a:pPr indent="0" marL="0">
+              <a:buNone/>
+            </a:pPr>
+            <a:r>
+              <a:rPr lang="en-US" sz="1200" dirty="0">
+                <a:solidFill>
+                  <a:srgbClr val="212121"/>
+                </a:solidFill>
+                <a:latin typeface="Consolas" pitchFamily="34" charset="0"/>
+                <a:ea typeface="Consolas" pitchFamily="34" charset="-122"/>
+                <a:cs typeface="Consolas" pitchFamily="34" charset="-120"/>
+              </a:rPr>
+              <a:t>    Console.Write(update);</a:t>
+            </a:r>
+            <a:endParaRPr lang="en-US" sz="1200" dirty="0"/>
+          </a:p>
+          <a:p>
+            <a:pPr indent="0" marL="0">
+              <a:buNone/>
+            </a:pPr>
+            <a:r>
+              <a:rPr lang="en-US" sz="1200" dirty="0">
+                <a:solidFill>
+                  <a:srgbClr val="212121"/>
+                </a:solidFill>
+                <a:latin typeface="Consolas" pitchFamily="34" charset="0"/>
+                <a:ea typeface="Consolas" pitchFamily="34" charset="-122"/>
+                <a:cs typeface="Consolas" pitchFamily="34" charset="-120"/>
+              </a:rPr>
+              <a:t>}</a:t>
+            </a:r>
+            <a:endParaRPr lang="en-US" sz="1200" dirty="0"/>
           </a:p>
         </p:txBody>
       </p:sp>
@@ -5512,7 +7010,7 @@
                 <a:ea typeface="Calibri" pitchFamily="34" charset="-122"/>
                 <a:cs typeface="Calibri" pitchFamily="34" charset="-120"/>
               </a:rPr>
-              <a:t>Authentication</a:t>
+              <a:t>Multi-turn conversations</a:t>
             </a:r>
             <a:endParaRPr lang="en-US" sz="2800" dirty="0"/>
           </a:p>
@@ -5526,8 +7024,8 @@
         </p:nvSpPr>
         <p:spPr>
           <a:xfrm>
-            <a:off x="365760" y="1097280"/>
-            <a:ext cx="8412480" cy="3749040"/>
+            <a:off x="365760" y="1051560"/>
+            <a:ext cx="8412480" cy="640080"/>
           </a:xfrm>
           <a:prstGeom prst="rect">
             <a:avLst/>
@@ -5539,12 +7037,8 @@
           <a:bodyPr wrap="square" rtlCol="0" anchor="ctr"/>
           <a:lstStyle/>
           <a:p>
-            <a:pPr marL="342900" indent="-342900">
-              <a:spcAft>
-                <a:spcPts val="600"/>
-              </a:spcAft>
-              <a:buSzPct val="100000"/>
-              <a:buChar char="•"/>
+            <a:pPr indent="0" marL="0">
+              <a:buNone/>
             </a:pPr>
             <a:r>
               <a:rPr lang="en-US" sz="1500" dirty="0">
@@ -5555,20 +7049,142 @@
                 <a:ea typeface="Calibri" pitchFamily="34" charset="-122"/>
                 <a:cs typeface="Calibri" pitchFamily="34" charset="-120"/>
               </a:rPr>
-              <a:t>Every MAF sample uses Azure identity, not API keys</a:t>
+              <a:t>AgentSession carries conversation state across runs. Create one with agent.create_session() and pass it to every agent.run() call.</a:t>
             </a:r>
             <a:endParaRPr lang="en-US" sz="1500" dirty="0"/>
           </a:p>
-          <a:p>
-            <a:pPr marL="342900" indent="-342900">
-              <a:spcAft>
-                <a:spcPts val="600"/>
-              </a:spcAft>
-              <a:buSzPct val="100000"/>
-              <a:buChar char="•"/>
+        </p:txBody>
+      </p:sp>
+      <p:sp>
+        <p:nvSpPr>
+          <p:cNvPr id="6" name="Shape 4"/>
+          <p:cNvSpPr/>
+          <p:nvPr/>
+        </p:nvSpPr>
+        <p:spPr>
+          <a:xfrm>
+            <a:off x="365760" y="1737360"/>
+            <a:ext cx="8412480" cy="1371600"/>
+          </a:xfrm>
+          <a:prstGeom prst="rect">
+            <a:avLst/>
+          </a:prstGeom>
+          <a:solidFill>
+            <a:srgbClr val="F3F4F6"/>
+          </a:solidFill>
+          <a:ln w="6350">
+            <a:solidFill>
+              <a:srgbClr val="D1D5DB"/>
+            </a:solidFill>
+            <a:prstDash val="solid"/>
+          </a:ln>
+        </p:spPr>
+      </p:sp>
+      <p:sp>
+        <p:nvSpPr>
+          <p:cNvPr id="7" name="Text 5"/>
+          <p:cNvSpPr/>
+          <p:nvPr/>
+        </p:nvSpPr>
+        <p:spPr>
+          <a:xfrm>
+            <a:off x="502920" y="1828800"/>
+            <a:ext cx="8138160" cy="1188720"/>
+          </a:xfrm>
+          <a:prstGeom prst="rect">
+            <a:avLst/>
+          </a:prstGeom>
+          <a:noFill/>
+          <a:ln/>
+        </p:spPr>
+        <p:txBody>
+          <a:bodyPr wrap="square" lIns="0" tIns="0" rIns="0" bIns="0" rtlCol="0" anchor="t"/>
+          <a:lstStyle/>
+          <a:p>
+            <a:pPr indent="0" marL="0">
+              <a:buNone/>
             </a:pPr>
             <a:r>
               <a:rPr lang="en-US" sz="1500" dirty="0">
+                <a:solidFill>
+                  <a:srgbClr val="212121"/>
+                </a:solidFill>
+                <a:latin typeface="Consolas" pitchFamily="34" charset="0"/>
+                <a:ea typeface="Consolas" pitchFamily="34" charset="-122"/>
+                <a:cs typeface="Consolas" pitchFamily="34" charset="-120"/>
+              </a:rPr>
+              <a:t>session = agent.create_session()</a:t>
+            </a:r>
+            <a:endParaRPr lang="en-US" sz="1500" dirty="0"/>
+          </a:p>
+          <a:p>
+            <a:pPr indent="0" marL="0">
+              <a:buNone/>
+            </a:pPr>
+            <a:endParaRPr lang="en-US" sz="1500" dirty="0"/>
+          </a:p>
+          <a:p>
+            <a:pPr indent="0" marL="0">
+              <a:buNone/>
+            </a:pPr>
+            <a:r>
+              <a:rPr lang="en-US" sz="1500" dirty="0">
+                <a:solidFill>
+                  <a:srgbClr val="212121"/>
+                </a:solidFill>
+                <a:latin typeface="Consolas" pitchFamily="34" charset="0"/>
+                <a:ea typeface="Consolas" pitchFamily="34" charset="-122"/>
+                <a:cs typeface="Consolas" pitchFamily="34" charset="-120"/>
+              </a:rPr>
+              <a:t>r1 = await agent.run("My name is Alex.", session=session)</a:t>
+            </a:r>
+            <a:endParaRPr lang="en-US" sz="1500" dirty="0"/>
+          </a:p>
+          <a:p>
+            <a:pPr indent="0" marL="0">
+              <a:buNone/>
+            </a:pPr>
+            <a:r>
+              <a:rPr lang="en-US" sz="1500" dirty="0">
+                <a:solidFill>
+                  <a:srgbClr val="212121"/>
+                </a:solidFill>
+                <a:latin typeface="Consolas" pitchFamily="34" charset="0"/>
+                <a:ea typeface="Consolas" pitchFamily="34" charset="-122"/>
+                <a:cs typeface="Consolas" pitchFamily="34" charset="-120"/>
+              </a:rPr>
+              <a:t>r2 = await agent.run("What's my name?", session=session)   # answer: Alex</a:t>
+            </a:r>
+            <a:endParaRPr lang="en-US" sz="1500" dirty="0"/>
+          </a:p>
+        </p:txBody>
+      </p:sp>
+      <p:sp>
+        <p:nvSpPr>
+          <p:cNvPr id="8" name="Text 6"/>
+          <p:cNvSpPr/>
+          <p:nvPr/>
+        </p:nvSpPr>
+        <p:spPr>
+          <a:xfrm>
+            <a:off x="365760" y="3246120"/>
+            <a:ext cx="8412480" cy="1463040"/>
+          </a:xfrm>
+          <a:prstGeom prst="rect">
+            <a:avLst/>
+          </a:prstGeom>
+          <a:noFill/>
+          <a:ln/>
+        </p:spPr>
+        <p:txBody>
+          <a:bodyPr wrap="square" rtlCol="0" anchor="ctr"/>
+          <a:lstStyle/>
+          <a:p>
+            <a:pPr indent="0" marL="0">
+              <a:buNone/>
+            </a:pPr>
+            <a:r>
+              <a:rPr lang="en-US" sz="1400" dirty="0">
                 <a:solidFill>
                   <a:srgbClr val="212121"/>
                 </a:solidFill>
@@ -5576,51 +7192,9 @@
                 <a:ea typeface="Calibri" pitchFamily="34" charset="-122"/>
                 <a:cs typeface="Calibri" pitchFamily="34" charset="-120"/>
               </a:rPr>
-              <a:t>Dev on your laptop: AzureCliCredential() — signs in via az login</a:t>
-            </a:r>
-            <a:endParaRPr lang="en-US" sz="1500" dirty="0"/>
-          </a:p>
-          <a:p>
-            <a:pPr marL="342900" indent="-342900">
-              <a:spcAft>
-                <a:spcPts val="600"/>
-              </a:spcAft>
-              <a:buSzPct val="100000"/>
-              <a:buChar char="•"/>
-            </a:pPr>
-            <a:r>
-              <a:rPr lang="en-US" sz="1500" dirty="0">
-                <a:solidFill>
-                  <a:srgbClr val="212121"/>
-                </a:solidFill>
-                <a:latin typeface="Calibri" pitchFamily="34" charset="0"/>
-                <a:ea typeface="Calibri" pitchFamily="34" charset="-122"/>
-                <a:cs typeface="Calibri" pitchFamily="34" charset="-120"/>
-              </a:rPr>
-              <a:t>CI / production: DefaultAzureCredential() or, preferably, an explicit ManagedIdentityCredential</a:t>
-            </a:r>
-            <a:endParaRPr lang="en-US" sz="1500" dirty="0"/>
-          </a:p>
-          <a:p>
-            <a:pPr marL="342900" indent="-342900">
-              <a:spcAft>
-                <a:spcPts val="600"/>
-              </a:spcAft>
-              <a:buSzPct val="100000"/>
-              <a:buChar char="•"/>
-            </a:pPr>
-            <a:r>
-              <a:rPr lang="en-US" sz="1500" dirty="0">
-                <a:solidFill>
-                  <a:srgbClr val="212121"/>
-                </a:solidFill>
-                <a:latin typeface="Calibri" pitchFamily="34" charset="0"/>
-                <a:ea typeface="Calibri" pitchFamily="34" charset="-122"/>
-                <a:cs typeface="Calibri" pitchFamily="34" charset="-120"/>
-              </a:rPr>
-              <a:t>Never commit API keys or connection strings — enforced on Day 5</a:t>
-            </a:r>
-            <a:endParaRPr lang="en-US" sz="1500" dirty="0"/>
+              <a:t>You create a session once and pass it to each run. MAF maintains the conversation history in that session object for you. Without session=, each call is stateless. Day 3 covers explicit session management (persistence, compaction, replay).</a:t>
+            </a:r>
+            <a:endParaRPr lang="en-US" sz="1400" dirty="0"/>
           </a:p>
         </p:txBody>
       </p:sp>
@@ -5748,1279 +7322,118 @@
                 <a:ea typeface="Calibri" pitchFamily="34" charset="-122"/>
                 <a:cs typeface="Calibri" pitchFamily="34" charset="-120"/>
               </a:rPr>
-              <a:t>Packages you'll touch this week</a:t>
+              <a:t>Authentication</a:t>
             </a:r>
             <a:endParaRPr lang="en-US" sz="2800" dirty="0"/>
           </a:p>
         </p:txBody>
       </p:sp>
-      <p:graphicFrame>
-        <p:nvGraphicFramePr>
-          <p:cNvPr id="10" name="Table 0"/>
-          <p:cNvGraphicFramePr>
-            <a:graphicFrameLocks noGrp="1"/>
-          </p:cNvGraphicFramePr>
-          <p:nvPr>
-            <p:extLst>
-              <p:ext uri="{D42A27DB-BD31-4B8C-83A1-F6EECF244321}">
-                <p14:modId xmlns:p14="http://schemas.microsoft.com/office/powerpoint/2010/main" val="1579011935"/>
-              </p:ext>
-            </p:extLst>
-          </p:nvPr>
-        </p:nvGraphicFramePr>
-        <p:xfrm>
-          <a:off x="365760" y="1097280"/>
-          <a:ext cx="8412480" cy="914400"/>
-        </p:xfrm>
-        <a:graphic>
-          <a:graphicData uri="http://schemas.openxmlformats.org/drawingml/2006/table">
-            <a:tbl>
-              <a:tblPr/>
-              <a:tblGrid>
-                <a:gridCol w="1737360"/>
-                <a:gridCol w="3291840"/>
-                <a:gridCol w="3383280"/>
-              </a:tblGrid>
-              <a:tr h="384048">
-                <a:tc>
-                  <a:txBody>
-                    <a:bodyPr/>
-                    <a:lstStyle/>
-                    <a:p>
-                      <a:pPr indent="0" marL="0">
-                        <a:buNone/>
-                      </a:pPr>
-                      <a:r>
-                        <a:rPr lang="en-US" sz="1200" b="1" dirty="0">
-                          <a:solidFill>
-                            <a:srgbClr val="FFFFFF"/>
-                          </a:solidFill>
-                          <a:latin typeface="Calibri" pitchFamily="34" charset="0"/>
-                          <a:ea typeface="Calibri" pitchFamily="34" charset="-122"/>
-                          <a:cs typeface="Calibri" pitchFamily="34" charset="-120"/>
-                        </a:rPr>
-                        <a:t>Concern</a:t>
-                      </a:r>
-                      <a:endParaRPr lang="en-US" sz="1200" dirty="0">
-                        <a:latin typeface="Calibri" charset="0"/>
-                        <a:ea typeface="Calibri" charset="0"/>
-                        <a:cs typeface="Calibri" charset="0"/>
-                      </a:endParaRPr>
-                    </a:p>
-                  </a:txBody>
-                  <a:tcPr marL="54864" marR="54864" marT="54864" marB="54864" anchor="ctr">
-                    <a:lnL w="6350" cap="flat" cmpd="sng" algn="ctr">
-                      <a:solidFill>
-                        <a:srgbClr val="D1D5DB"/>
-                      </a:solidFill>
-                      <a:prstDash val="solid"/>
-                      <a:round/>
-                      <a:headEnd type="none" w="med" len="med"/>
-                      <a:tailEnd type="none" w="med" len="med"/>
-                    </a:lnL>
-                    <a:lnR w="6350" cap="flat" cmpd="sng" algn="ctr">
-                      <a:solidFill>
-                        <a:srgbClr val="D1D5DB"/>
-                      </a:solidFill>
-                      <a:prstDash val="solid"/>
-                      <a:round/>
-                      <a:headEnd type="none" w="med" len="med"/>
-                      <a:tailEnd type="none" w="med" len="med"/>
-                    </a:lnR>
-                    <a:lnT w="6350" cap="flat" cmpd="sng" algn="ctr">
-                      <a:solidFill>
-                        <a:srgbClr val="D1D5DB"/>
-                      </a:solidFill>
-                      <a:prstDash val="solid"/>
-                      <a:round/>
-                      <a:headEnd type="none" w="med" len="med"/>
-                      <a:tailEnd type="none" w="med" len="med"/>
-                    </a:lnT>
-                    <a:lnB w="6350" cap="flat" cmpd="sng" algn="ctr">
-                      <a:solidFill>
-                        <a:srgbClr val="D1D5DB"/>
-                      </a:solidFill>
-                      <a:prstDash val="solid"/>
-                      <a:round/>
-                      <a:headEnd type="none" w="med" len="med"/>
-                      <a:tailEnd type="none" w="med" len="med"/>
-                    </a:lnB>
-                    <a:solidFill>
-                      <a:srgbClr val="1E2761"/>
-                    </a:solidFill>
-                  </a:tcPr>
-                </a:tc>
-                <a:tc>
-                  <a:txBody>
-                    <a:bodyPr/>
-                    <a:lstStyle/>
-                    <a:p>
-                      <a:pPr indent="0" marL="0">
-                        <a:buNone/>
-                      </a:pPr>
-                      <a:r>
-                        <a:rPr lang="en-US" sz="1200" b="1" dirty="0">
-                          <a:solidFill>
-                            <a:srgbClr val="FFFFFF"/>
-                          </a:solidFill>
-                          <a:latin typeface="Calibri" pitchFamily="34" charset="0"/>
-                          <a:ea typeface="Calibri" pitchFamily="34" charset="-122"/>
-                          <a:cs typeface="Calibri" pitchFamily="34" charset="-120"/>
-                        </a:rPr>
-                        <a:t>Python package</a:t>
-                      </a:r>
-                      <a:endParaRPr lang="en-US" sz="1200" dirty="0">
-                        <a:latin typeface="Calibri" charset="0"/>
-                        <a:ea typeface="Calibri" charset="0"/>
-                        <a:cs typeface="Calibri" charset="0"/>
-                      </a:endParaRPr>
-                    </a:p>
-                  </a:txBody>
-                  <a:tcPr marL="54864" marR="54864" marT="54864" marB="54864" anchor="ctr">
-                    <a:lnL w="6350" cap="flat" cmpd="sng" algn="ctr">
-                      <a:solidFill>
-                        <a:srgbClr val="D1D5DB"/>
-                      </a:solidFill>
-                      <a:prstDash val="solid"/>
-                      <a:round/>
-                      <a:headEnd type="none" w="med" len="med"/>
-                      <a:tailEnd type="none" w="med" len="med"/>
-                    </a:lnL>
-                    <a:lnR w="6350" cap="flat" cmpd="sng" algn="ctr">
-                      <a:solidFill>
-                        <a:srgbClr val="D1D5DB"/>
-                      </a:solidFill>
-                      <a:prstDash val="solid"/>
-                      <a:round/>
-                      <a:headEnd type="none" w="med" len="med"/>
-                      <a:tailEnd type="none" w="med" len="med"/>
-                    </a:lnR>
-                    <a:lnT w="6350" cap="flat" cmpd="sng" algn="ctr">
-                      <a:solidFill>
-                        <a:srgbClr val="D1D5DB"/>
-                      </a:solidFill>
-                      <a:prstDash val="solid"/>
-                      <a:round/>
-                      <a:headEnd type="none" w="med" len="med"/>
-                      <a:tailEnd type="none" w="med" len="med"/>
-                    </a:lnT>
-                    <a:lnB w="6350" cap="flat" cmpd="sng" algn="ctr">
-                      <a:solidFill>
-                        <a:srgbClr val="D1D5DB"/>
-                      </a:solidFill>
-                      <a:prstDash val="solid"/>
-                      <a:round/>
-                      <a:headEnd type="none" w="med" len="med"/>
-                      <a:tailEnd type="none" w="med" len="med"/>
-                    </a:lnB>
-                    <a:solidFill>
-                      <a:srgbClr val="1E2761"/>
-                    </a:solidFill>
-                  </a:tcPr>
-                </a:tc>
-                <a:tc>
-                  <a:txBody>
-                    <a:bodyPr/>
-                    <a:lstStyle/>
-                    <a:p>
-                      <a:pPr indent="0" marL="0">
-                        <a:buNone/>
-                      </a:pPr>
-                      <a:r>
-                        <a:rPr lang="en-US" sz="1200" b="1" dirty="0">
-                          <a:solidFill>
-                            <a:srgbClr val="FFFFFF"/>
-                          </a:solidFill>
-                          <a:latin typeface="Calibri" pitchFamily="34" charset="0"/>
-                          <a:ea typeface="Calibri" pitchFamily="34" charset="-122"/>
-                          <a:cs typeface="Calibri" pitchFamily="34" charset="-120"/>
-                        </a:rPr>
-                        <a:t>C# package</a:t>
-                      </a:r>
-                      <a:endParaRPr lang="en-US" sz="1200" dirty="0">
-                        <a:latin typeface="Calibri" charset="0"/>
-                        <a:ea typeface="Calibri" charset="0"/>
-                        <a:cs typeface="Calibri" charset="0"/>
-                      </a:endParaRPr>
-                    </a:p>
-                  </a:txBody>
-                  <a:tcPr marL="54864" marR="54864" marT="54864" marB="54864" anchor="ctr">
-                    <a:lnL w="6350" cap="flat" cmpd="sng" algn="ctr">
-                      <a:solidFill>
-                        <a:srgbClr val="D1D5DB"/>
-                      </a:solidFill>
-                      <a:prstDash val="solid"/>
-                      <a:round/>
-                      <a:headEnd type="none" w="med" len="med"/>
-                      <a:tailEnd type="none" w="med" len="med"/>
-                    </a:lnL>
-                    <a:lnR w="6350" cap="flat" cmpd="sng" algn="ctr">
-                      <a:solidFill>
-                        <a:srgbClr val="D1D5DB"/>
-                      </a:solidFill>
-                      <a:prstDash val="solid"/>
-                      <a:round/>
-                      <a:headEnd type="none" w="med" len="med"/>
-                      <a:tailEnd type="none" w="med" len="med"/>
-                    </a:lnR>
-                    <a:lnT w="6350" cap="flat" cmpd="sng" algn="ctr">
-                      <a:solidFill>
-                        <a:srgbClr val="D1D5DB"/>
-                      </a:solidFill>
-                      <a:prstDash val="solid"/>
-                      <a:round/>
-                      <a:headEnd type="none" w="med" len="med"/>
-                      <a:tailEnd type="none" w="med" len="med"/>
-                    </a:lnT>
-                    <a:lnB w="6350" cap="flat" cmpd="sng" algn="ctr">
-                      <a:solidFill>
-                        <a:srgbClr val="D1D5DB"/>
-                      </a:solidFill>
-                      <a:prstDash val="solid"/>
-                      <a:round/>
-                      <a:headEnd type="none" w="med" len="med"/>
-                      <a:tailEnd type="none" w="med" len="med"/>
-                    </a:lnB>
-                    <a:solidFill>
-                      <a:srgbClr val="1E2761"/>
-                    </a:solidFill>
-                  </a:tcPr>
-                </a:tc>
-              </a:tr>
-              <a:tr h="384048">
-                <a:tc>
-                  <a:txBody>
-                    <a:bodyPr/>
-                    <a:lstStyle/>
-                    <a:p>
-                      <a:pPr indent="0" marL="0">
-                        <a:buNone/>
-                      </a:pPr>
-                      <a:r>
-                        <a:rPr lang="en-US" sz="1200" dirty="0">
-                          <a:solidFill>
-                            <a:srgbClr val="212121"/>
-                          </a:solidFill>
-                          <a:latin typeface="Calibri" pitchFamily="34" charset="0"/>
-                          <a:ea typeface="Calibri" pitchFamily="34" charset="-122"/>
-                          <a:cs typeface="Calibri" pitchFamily="34" charset="-120"/>
-                        </a:rPr>
-                        <a:t>Core</a:t>
-                      </a:r>
-                      <a:endParaRPr lang="en-US" sz="1200" dirty="0">
-                        <a:latin typeface="Calibri" charset="0"/>
-                        <a:ea typeface="Calibri" charset="0"/>
-                        <a:cs typeface="Calibri" charset="0"/>
-                      </a:endParaRPr>
-                    </a:p>
-                  </a:txBody>
-                  <a:tcPr marL="54864" marR="54864" marT="54864" marB="54864" anchor="ctr">
-                    <a:lnL w="6350" cap="flat" cmpd="sng" algn="ctr">
-                      <a:solidFill>
-                        <a:srgbClr val="D1D5DB"/>
-                      </a:solidFill>
-                      <a:prstDash val="solid"/>
-                      <a:round/>
-                      <a:headEnd type="none" w="med" len="med"/>
-                      <a:tailEnd type="none" w="med" len="med"/>
-                    </a:lnL>
-                    <a:lnR w="6350" cap="flat" cmpd="sng" algn="ctr">
-                      <a:solidFill>
-                        <a:srgbClr val="D1D5DB"/>
-                      </a:solidFill>
-                      <a:prstDash val="solid"/>
-                      <a:round/>
-                      <a:headEnd type="none" w="med" len="med"/>
-                      <a:tailEnd type="none" w="med" len="med"/>
-                    </a:lnR>
-                    <a:lnT w="6350" cap="flat" cmpd="sng" algn="ctr">
-                      <a:solidFill>
-                        <a:srgbClr val="D1D5DB"/>
-                      </a:solidFill>
-                      <a:prstDash val="solid"/>
-                      <a:round/>
-                      <a:headEnd type="none" w="med" len="med"/>
-                      <a:tailEnd type="none" w="med" len="med"/>
-                    </a:lnT>
-                    <a:lnB w="6350" cap="flat" cmpd="sng" algn="ctr">
-                      <a:solidFill>
-                        <a:srgbClr val="D1D5DB"/>
-                      </a:solidFill>
-                      <a:prstDash val="solid"/>
-                      <a:round/>
-                      <a:headEnd type="none" w="med" len="med"/>
-                      <a:tailEnd type="none" w="med" len="med"/>
-                    </a:lnB>
-                    <a:solidFill>
-                      <a:srgbClr val="FFFFFF"/>
-                    </a:solidFill>
-                  </a:tcPr>
-                </a:tc>
-                <a:tc>
-                  <a:txBody>
-                    <a:bodyPr/>
-                    <a:lstStyle/>
-                    <a:p>
-                      <a:pPr indent="0" marL="0">
-                        <a:buNone/>
-                      </a:pPr>
-                      <a:r>
-                        <a:rPr lang="en-US" sz="1200" dirty="0">
-                          <a:solidFill>
-                            <a:srgbClr val="212121"/>
-                          </a:solidFill>
-                          <a:latin typeface="Calibri" pitchFamily="34" charset="0"/>
-                          <a:ea typeface="Calibri" pitchFamily="34" charset="-122"/>
-                          <a:cs typeface="Calibri" pitchFamily="34" charset="-120"/>
-                        </a:rPr>
-                        <a:t>agent-framework</a:t>
-                      </a:r>
-                      <a:endParaRPr lang="en-US" sz="1200" dirty="0">
-                        <a:latin typeface="Calibri" charset="0"/>
-                        <a:ea typeface="Calibri" charset="0"/>
-                        <a:cs typeface="Calibri" charset="0"/>
-                      </a:endParaRPr>
-                    </a:p>
-                  </a:txBody>
-                  <a:tcPr marL="54864" marR="54864" marT="54864" marB="54864" anchor="ctr">
-                    <a:lnL w="6350" cap="flat" cmpd="sng" algn="ctr">
-                      <a:solidFill>
-                        <a:srgbClr val="D1D5DB"/>
-                      </a:solidFill>
-                      <a:prstDash val="solid"/>
-                      <a:round/>
-                      <a:headEnd type="none" w="med" len="med"/>
-                      <a:tailEnd type="none" w="med" len="med"/>
-                    </a:lnL>
-                    <a:lnR w="6350" cap="flat" cmpd="sng" algn="ctr">
-                      <a:solidFill>
-                        <a:srgbClr val="D1D5DB"/>
-                      </a:solidFill>
-                      <a:prstDash val="solid"/>
-                      <a:round/>
-                      <a:headEnd type="none" w="med" len="med"/>
-                      <a:tailEnd type="none" w="med" len="med"/>
-                    </a:lnR>
-                    <a:lnT w="6350" cap="flat" cmpd="sng" algn="ctr">
-                      <a:solidFill>
-                        <a:srgbClr val="D1D5DB"/>
-                      </a:solidFill>
-                      <a:prstDash val="solid"/>
-                      <a:round/>
-                      <a:headEnd type="none" w="med" len="med"/>
-                      <a:tailEnd type="none" w="med" len="med"/>
-                    </a:lnT>
-                    <a:lnB w="6350" cap="flat" cmpd="sng" algn="ctr">
-                      <a:solidFill>
-                        <a:srgbClr val="D1D5DB"/>
-                      </a:solidFill>
-                      <a:prstDash val="solid"/>
-                      <a:round/>
-                      <a:headEnd type="none" w="med" len="med"/>
-                      <a:tailEnd type="none" w="med" len="med"/>
-                    </a:lnB>
-                    <a:solidFill>
-                      <a:srgbClr val="FFFFFF"/>
-                    </a:solidFill>
-                  </a:tcPr>
-                </a:tc>
-                <a:tc>
-                  <a:txBody>
-                    <a:bodyPr/>
-                    <a:lstStyle/>
-                    <a:p>
-                      <a:pPr indent="0" marL="0">
-                        <a:buNone/>
-                      </a:pPr>
-                      <a:r>
-                        <a:rPr lang="en-US" sz="1200" dirty="0">
-                          <a:solidFill>
-                            <a:srgbClr val="212121"/>
-                          </a:solidFill>
-                          <a:latin typeface="Calibri" pitchFamily="34" charset="0"/>
-                          <a:ea typeface="Calibri" pitchFamily="34" charset="-122"/>
-                          <a:cs typeface="Calibri" pitchFamily="34" charset="-120"/>
-                        </a:rPr>
-                        <a:t>Microsoft.Agents.AI</a:t>
-                      </a:r>
-                      <a:endParaRPr lang="en-US" sz="1200" dirty="0">
-                        <a:latin typeface="Calibri" charset="0"/>
-                        <a:ea typeface="Calibri" charset="0"/>
-                        <a:cs typeface="Calibri" charset="0"/>
-                      </a:endParaRPr>
-                    </a:p>
-                  </a:txBody>
-                  <a:tcPr marL="54864" marR="54864" marT="54864" marB="54864" anchor="ctr">
-                    <a:lnL w="6350" cap="flat" cmpd="sng" algn="ctr">
-                      <a:solidFill>
-                        <a:srgbClr val="D1D5DB"/>
-                      </a:solidFill>
-                      <a:prstDash val="solid"/>
-                      <a:round/>
-                      <a:headEnd type="none" w="med" len="med"/>
-                      <a:tailEnd type="none" w="med" len="med"/>
-                    </a:lnL>
-                    <a:lnR w="6350" cap="flat" cmpd="sng" algn="ctr">
-                      <a:solidFill>
-                        <a:srgbClr val="D1D5DB"/>
-                      </a:solidFill>
-                      <a:prstDash val="solid"/>
-                      <a:round/>
-                      <a:headEnd type="none" w="med" len="med"/>
-                      <a:tailEnd type="none" w="med" len="med"/>
-                    </a:lnR>
-                    <a:lnT w="6350" cap="flat" cmpd="sng" algn="ctr">
-                      <a:solidFill>
-                        <a:srgbClr val="D1D5DB"/>
-                      </a:solidFill>
-                      <a:prstDash val="solid"/>
-                      <a:round/>
-                      <a:headEnd type="none" w="med" len="med"/>
-                      <a:tailEnd type="none" w="med" len="med"/>
-                    </a:lnT>
-                    <a:lnB w="6350" cap="flat" cmpd="sng" algn="ctr">
-                      <a:solidFill>
-                        <a:srgbClr val="D1D5DB"/>
-                      </a:solidFill>
-                      <a:prstDash val="solid"/>
-                      <a:round/>
-                      <a:headEnd type="none" w="med" len="med"/>
-                      <a:tailEnd type="none" w="med" len="med"/>
-                    </a:lnB>
-                    <a:solidFill>
-                      <a:srgbClr val="FFFFFF"/>
-                    </a:solidFill>
-                  </a:tcPr>
-                </a:tc>
-              </a:tr>
-              <a:tr h="384048">
-                <a:tc>
-                  <a:txBody>
-                    <a:bodyPr/>
-                    <a:lstStyle/>
-                    <a:p>
-                      <a:pPr indent="0" marL="0">
-                        <a:buNone/>
-                      </a:pPr>
-                      <a:r>
-                        <a:rPr lang="en-US" sz="1200" dirty="0">
-                          <a:solidFill>
-                            <a:srgbClr val="212121"/>
-                          </a:solidFill>
-                          <a:latin typeface="Calibri" pitchFamily="34" charset="0"/>
-                          <a:ea typeface="Calibri" pitchFamily="34" charset="-122"/>
-                          <a:cs typeface="Calibri" pitchFamily="34" charset="-120"/>
-                        </a:rPr>
-                        <a:t>Foundry client</a:t>
-                      </a:r>
-                      <a:endParaRPr lang="en-US" sz="1200" dirty="0">
-                        <a:latin typeface="Calibri" charset="0"/>
-                        <a:ea typeface="Calibri" charset="0"/>
-                        <a:cs typeface="Calibri" charset="0"/>
-                      </a:endParaRPr>
-                    </a:p>
-                  </a:txBody>
-                  <a:tcPr marL="54864" marR="54864" marT="54864" marB="54864" anchor="ctr">
-                    <a:lnL w="6350" cap="flat" cmpd="sng" algn="ctr">
-                      <a:solidFill>
-                        <a:srgbClr val="D1D5DB"/>
-                      </a:solidFill>
-                      <a:prstDash val="solid"/>
-                      <a:round/>
-                      <a:headEnd type="none" w="med" len="med"/>
-                      <a:tailEnd type="none" w="med" len="med"/>
-                    </a:lnL>
-                    <a:lnR w="6350" cap="flat" cmpd="sng" algn="ctr">
-                      <a:solidFill>
-                        <a:srgbClr val="D1D5DB"/>
-                      </a:solidFill>
-                      <a:prstDash val="solid"/>
-                      <a:round/>
-                      <a:headEnd type="none" w="med" len="med"/>
-                      <a:tailEnd type="none" w="med" len="med"/>
-                    </a:lnR>
-                    <a:lnT w="6350" cap="flat" cmpd="sng" algn="ctr">
-                      <a:solidFill>
-                        <a:srgbClr val="D1D5DB"/>
-                      </a:solidFill>
-                      <a:prstDash val="solid"/>
-                      <a:round/>
-                      <a:headEnd type="none" w="med" len="med"/>
-                      <a:tailEnd type="none" w="med" len="med"/>
-                    </a:lnT>
-                    <a:lnB w="6350" cap="flat" cmpd="sng" algn="ctr">
-                      <a:solidFill>
-                        <a:srgbClr val="D1D5DB"/>
-                      </a:solidFill>
-                      <a:prstDash val="solid"/>
-                      <a:round/>
-                      <a:headEnd type="none" w="med" len="med"/>
-                      <a:tailEnd type="none" w="med" len="med"/>
-                    </a:lnB>
-                    <a:solidFill>
-                      <a:srgbClr val="F3F4F6"/>
-                    </a:solidFill>
-                  </a:tcPr>
-                </a:tc>
-                <a:tc>
-                  <a:txBody>
-                    <a:bodyPr/>
-                    <a:lstStyle/>
-                    <a:p>
-                      <a:pPr indent="0" marL="0">
-                        <a:buNone/>
-                      </a:pPr>
-                      <a:r>
-                        <a:rPr lang="en-US" sz="1200" dirty="0">
-                          <a:solidFill>
-                            <a:srgbClr val="212121"/>
-                          </a:solidFill>
-                          <a:latin typeface="Calibri" pitchFamily="34" charset="0"/>
-                          <a:ea typeface="Calibri" pitchFamily="34" charset="-122"/>
-                          <a:cs typeface="Calibri" pitchFamily="34" charset="-120"/>
-                        </a:rPr>
-                        <a:t>agent-framework-foundry</a:t>
-                      </a:r>
-                      <a:endParaRPr lang="en-US" sz="1200" dirty="0">
-                        <a:latin typeface="Calibri" charset="0"/>
-                        <a:ea typeface="Calibri" charset="0"/>
-                        <a:cs typeface="Calibri" charset="0"/>
-                      </a:endParaRPr>
-                    </a:p>
-                  </a:txBody>
-                  <a:tcPr marL="54864" marR="54864" marT="54864" marB="54864" anchor="ctr">
-                    <a:lnL w="6350" cap="flat" cmpd="sng" algn="ctr">
-                      <a:solidFill>
-                        <a:srgbClr val="D1D5DB"/>
-                      </a:solidFill>
-                      <a:prstDash val="solid"/>
-                      <a:round/>
-                      <a:headEnd type="none" w="med" len="med"/>
-                      <a:tailEnd type="none" w="med" len="med"/>
-                    </a:lnL>
-                    <a:lnR w="6350" cap="flat" cmpd="sng" algn="ctr">
-                      <a:solidFill>
-                        <a:srgbClr val="D1D5DB"/>
-                      </a:solidFill>
-                      <a:prstDash val="solid"/>
-                      <a:round/>
-                      <a:headEnd type="none" w="med" len="med"/>
-                      <a:tailEnd type="none" w="med" len="med"/>
-                    </a:lnR>
-                    <a:lnT w="6350" cap="flat" cmpd="sng" algn="ctr">
-                      <a:solidFill>
-                        <a:srgbClr val="D1D5DB"/>
-                      </a:solidFill>
-                      <a:prstDash val="solid"/>
-                      <a:round/>
-                      <a:headEnd type="none" w="med" len="med"/>
-                      <a:tailEnd type="none" w="med" len="med"/>
-                    </a:lnT>
-                    <a:lnB w="6350" cap="flat" cmpd="sng" algn="ctr">
-                      <a:solidFill>
-                        <a:srgbClr val="D1D5DB"/>
-                      </a:solidFill>
-                      <a:prstDash val="solid"/>
-                      <a:round/>
-                      <a:headEnd type="none" w="med" len="med"/>
-                      <a:tailEnd type="none" w="med" len="med"/>
-                    </a:lnB>
-                    <a:solidFill>
-                      <a:srgbClr val="F3F4F6"/>
-                    </a:solidFill>
-                  </a:tcPr>
-                </a:tc>
-                <a:tc>
-                  <a:txBody>
-                    <a:bodyPr/>
-                    <a:lstStyle/>
-                    <a:p>
-                      <a:pPr indent="0" marL="0">
-                        <a:buNone/>
-                      </a:pPr>
-                      <a:r>
-                        <a:rPr lang="en-US" sz="1200" dirty="0">
-                          <a:solidFill>
-                            <a:srgbClr val="212121"/>
-                          </a:solidFill>
-                          <a:latin typeface="Calibri" pitchFamily="34" charset="0"/>
-                          <a:ea typeface="Calibri" pitchFamily="34" charset="-122"/>
-                          <a:cs typeface="Calibri" pitchFamily="34" charset="-120"/>
-                        </a:rPr>
-                        <a:t>Microsoft.Agents.AI.Foundry</a:t>
-                      </a:r>
-                      <a:endParaRPr lang="en-US" sz="1200" dirty="0">
-                        <a:latin typeface="Calibri" charset="0"/>
-                        <a:ea typeface="Calibri" charset="0"/>
-                        <a:cs typeface="Calibri" charset="0"/>
-                      </a:endParaRPr>
-                    </a:p>
-                  </a:txBody>
-                  <a:tcPr marL="54864" marR="54864" marT="54864" marB="54864" anchor="ctr">
-                    <a:lnL w="6350" cap="flat" cmpd="sng" algn="ctr">
-                      <a:solidFill>
-                        <a:srgbClr val="D1D5DB"/>
-                      </a:solidFill>
-                      <a:prstDash val="solid"/>
-                      <a:round/>
-                      <a:headEnd type="none" w="med" len="med"/>
-                      <a:tailEnd type="none" w="med" len="med"/>
-                    </a:lnL>
-                    <a:lnR w="6350" cap="flat" cmpd="sng" algn="ctr">
-                      <a:solidFill>
-                        <a:srgbClr val="D1D5DB"/>
-                      </a:solidFill>
-                      <a:prstDash val="solid"/>
-                      <a:round/>
-                      <a:headEnd type="none" w="med" len="med"/>
-                      <a:tailEnd type="none" w="med" len="med"/>
-                    </a:lnR>
-                    <a:lnT w="6350" cap="flat" cmpd="sng" algn="ctr">
-                      <a:solidFill>
-                        <a:srgbClr val="D1D5DB"/>
-                      </a:solidFill>
-                      <a:prstDash val="solid"/>
-                      <a:round/>
-                      <a:headEnd type="none" w="med" len="med"/>
-                      <a:tailEnd type="none" w="med" len="med"/>
-                    </a:lnT>
-                    <a:lnB w="6350" cap="flat" cmpd="sng" algn="ctr">
-                      <a:solidFill>
-                        <a:srgbClr val="D1D5DB"/>
-                      </a:solidFill>
-                      <a:prstDash val="solid"/>
-                      <a:round/>
-                      <a:headEnd type="none" w="med" len="med"/>
-                      <a:tailEnd type="none" w="med" len="med"/>
-                    </a:lnB>
-                    <a:solidFill>
-                      <a:srgbClr val="F3F4F6"/>
-                    </a:solidFill>
-                  </a:tcPr>
-                </a:tc>
-              </a:tr>
-              <a:tr h="384048">
-                <a:tc>
-                  <a:txBody>
-                    <a:bodyPr/>
-                    <a:lstStyle/>
-                    <a:p>
-                      <a:pPr indent="0" marL="0">
-                        <a:buNone/>
-                      </a:pPr>
-                      <a:r>
-                        <a:rPr lang="en-US" sz="1200" dirty="0">
-                          <a:solidFill>
-                            <a:srgbClr val="212121"/>
-                          </a:solidFill>
-                          <a:latin typeface="Calibri" pitchFamily="34" charset="0"/>
-                          <a:ea typeface="Calibri" pitchFamily="34" charset="-122"/>
-                          <a:cs typeface="Calibri" pitchFamily="34" charset="-120"/>
-                        </a:rPr>
-                        <a:t>Foundry hosting</a:t>
-                      </a:r>
-                      <a:endParaRPr lang="en-US" sz="1200" dirty="0">
-                        <a:latin typeface="Calibri" charset="0"/>
-                        <a:ea typeface="Calibri" charset="0"/>
-                        <a:cs typeface="Calibri" charset="0"/>
-                      </a:endParaRPr>
-                    </a:p>
-                  </a:txBody>
-                  <a:tcPr marL="54864" marR="54864" marT="54864" marB="54864" anchor="ctr">
-                    <a:lnL w="6350" cap="flat" cmpd="sng" algn="ctr">
-                      <a:solidFill>
-                        <a:srgbClr val="D1D5DB"/>
-                      </a:solidFill>
-                      <a:prstDash val="solid"/>
-                      <a:round/>
-                      <a:headEnd type="none" w="med" len="med"/>
-                      <a:tailEnd type="none" w="med" len="med"/>
-                    </a:lnL>
-                    <a:lnR w="6350" cap="flat" cmpd="sng" algn="ctr">
-                      <a:solidFill>
-                        <a:srgbClr val="D1D5DB"/>
-                      </a:solidFill>
-                      <a:prstDash val="solid"/>
-                      <a:round/>
-                      <a:headEnd type="none" w="med" len="med"/>
-                      <a:tailEnd type="none" w="med" len="med"/>
-                    </a:lnR>
-                    <a:lnT w="6350" cap="flat" cmpd="sng" algn="ctr">
-                      <a:solidFill>
-                        <a:srgbClr val="D1D5DB"/>
-                      </a:solidFill>
-                      <a:prstDash val="solid"/>
-                      <a:round/>
-                      <a:headEnd type="none" w="med" len="med"/>
-                      <a:tailEnd type="none" w="med" len="med"/>
-                    </a:lnT>
-                    <a:lnB w="6350" cap="flat" cmpd="sng" algn="ctr">
-                      <a:solidFill>
-                        <a:srgbClr val="D1D5DB"/>
-                      </a:solidFill>
-                      <a:prstDash val="solid"/>
-                      <a:round/>
-                      <a:headEnd type="none" w="med" len="med"/>
-                      <a:tailEnd type="none" w="med" len="med"/>
-                    </a:lnB>
-                    <a:solidFill>
-                      <a:srgbClr val="FFFFFF"/>
-                    </a:solidFill>
-                  </a:tcPr>
-                </a:tc>
-                <a:tc>
-                  <a:txBody>
-                    <a:bodyPr/>
-                    <a:lstStyle/>
-                    <a:p>
-                      <a:pPr indent="0" marL="0">
-                        <a:buNone/>
-                      </a:pPr>
-                      <a:r>
-                        <a:rPr lang="en-US" sz="1200" dirty="0">
-                          <a:solidFill>
-                            <a:srgbClr val="212121"/>
-                          </a:solidFill>
-                          <a:latin typeface="Calibri" pitchFamily="34" charset="0"/>
-                          <a:ea typeface="Calibri" pitchFamily="34" charset="-122"/>
-                          <a:cs typeface="Calibri" pitchFamily="34" charset="-120"/>
-                        </a:rPr>
-                        <a:t>agent-framework-foundry-hosting</a:t>
-                      </a:r>
-                      <a:endParaRPr lang="en-US" sz="1200" dirty="0">
-                        <a:latin typeface="Calibri" charset="0"/>
-                        <a:ea typeface="Calibri" charset="0"/>
-                        <a:cs typeface="Calibri" charset="0"/>
-                      </a:endParaRPr>
-                    </a:p>
-                  </a:txBody>
-                  <a:tcPr marL="54864" marR="54864" marT="54864" marB="54864" anchor="ctr">
-                    <a:lnL w="6350" cap="flat" cmpd="sng" algn="ctr">
-                      <a:solidFill>
-                        <a:srgbClr val="D1D5DB"/>
-                      </a:solidFill>
-                      <a:prstDash val="solid"/>
-                      <a:round/>
-                      <a:headEnd type="none" w="med" len="med"/>
-                      <a:tailEnd type="none" w="med" len="med"/>
-                    </a:lnL>
-                    <a:lnR w="6350" cap="flat" cmpd="sng" algn="ctr">
-                      <a:solidFill>
-                        <a:srgbClr val="D1D5DB"/>
-                      </a:solidFill>
-                      <a:prstDash val="solid"/>
-                      <a:round/>
-                      <a:headEnd type="none" w="med" len="med"/>
-                      <a:tailEnd type="none" w="med" len="med"/>
-                    </a:lnR>
-                    <a:lnT w="6350" cap="flat" cmpd="sng" algn="ctr">
-                      <a:solidFill>
-                        <a:srgbClr val="D1D5DB"/>
-                      </a:solidFill>
-                      <a:prstDash val="solid"/>
-                      <a:round/>
-                      <a:headEnd type="none" w="med" len="med"/>
-                      <a:tailEnd type="none" w="med" len="med"/>
-                    </a:lnT>
-                    <a:lnB w="6350" cap="flat" cmpd="sng" algn="ctr">
-                      <a:solidFill>
-                        <a:srgbClr val="D1D5DB"/>
-                      </a:solidFill>
-                      <a:prstDash val="solid"/>
-                      <a:round/>
-                      <a:headEnd type="none" w="med" len="med"/>
-                      <a:tailEnd type="none" w="med" len="med"/>
-                    </a:lnB>
-                    <a:solidFill>
-                      <a:srgbClr val="FFFFFF"/>
-                    </a:solidFill>
-                  </a:tcPr>
-                </a:tc>
-                <a:tc>
-                  <a:txBody>
-                    <a:bodyPr/>
-                    <a:lstStyle/>
-                    <a:p>
-                      <a:pPr indent="0" marL="0">
-                        <a:buNone/>
-                      </a:pPr>
-                      <a:r>
-                        <a:rPr lang="en-US" sz="1200" dirty="0">
-                          <a:solidFill>
-                            <a:srgbClr val="212121"/>
-                          </a:solidFill>
-                          <a:latin typeface="Calibri" pitchFamily="34" charset="0"/>
-                          <a:ea typeface="Calibri" pitchFamily="34" charset="-122"/>
-                          <a:cs typeface="Calibri" pitchFamily="34" charset="-120"/>
-                        </a:rPr>
-                        <a:t>(via Microsoft.Agents.AI.Foundry)</a:t>
-                      </a:r>
-                      <a:endParaRPr lang="en-US" sz="1200" dirty="0">
-                        <a:latin typeface="Calibri" charset="0"/>
-                        <a:ea typeface="Calibri" charset="0"/>
-                        <a:cs typeface="Calibri" charset="0"/>
-                      </a:endParaRPr>
-                    </a:p>
-                  </a:txBody>
-                  <a:tcPr marL="54864" marR="54864" marT="54864" marB="54864" anchor="ctr">
-                    <a:lnL w="6350" cap="flat" cmpd="sng" algn="ctr">
-                      <a:solidFill>
-                        <a:srgbClr val="D1D5DB"/>
-                      </a:solidFill>
-                      <a:prstDash val="solid"/>
-                      <a:round/>
-                      <a:headEnd type="none" w="med" len="med"/>
-                      <a:tailEnd type="none" w="med" len="med"/>
-                    </a:lnL>
-                    <a:lnR w="6350" cap="flat" cmpd="sng" algn="ctr">
-                      <a:solidFill>
-                        <a:srgbClr val="D1D5DB"/>
-                      </a:solidFill>
-                      <a:prstDash val="solid"/>
-                      <a:round/>
-                      <a:headEnd type="none" w="med" len="med"/>
-                      <a:tailEnd type="none" w="med" len="med"/>
-                    </a:lnR>
-                    <a:lnT w="6350" cap="flat" cmpd="sng" algn="ctr">
-                      <a:solidFill>
-                        <a:srgbClr val="D1D5DB"/>
-                      </a:solidFill>
-                      <a:prstDash val="solid"/>
-                      <a:round/>
-                      <a:headEnd type="none" w="med" len="med"/>
-                      <a:tailEnd type="none" w="med" len="med"/>
-                    </a:lnT>
-                    <a:lnB w="6350" cap="flat" cmpd="sng" algn="ctr">
-                      <a:solidFill>
-                        <a:srgbClr val="D1D5DB"/>
-                      </a:solidFill>
-                      <a:prstDash val="solid"/>
-                      <a:round/>
-                      <a:headEnd type="none" w="med" len="med"/>
-                      <a:tailEnd type="none" w="med" len="med"/>
-                    </a:lnB>
-                    <a:solidFill>
-                      <a:srgbClr val="FFFFFF"/>
-                    </a:solidFill>
-                  </a:tcPr>
-                </a:tc>
-              </a:tr>
-              <a:tr h="384048">
-                <a:tc>
-                  <a:txBody>
-                    <a:bodyPr/>
-                    <a:lstStyle/>
-                    <a:p>
-                      <a:pPr indent="0" marL="0">
-                        <a:buNone/>
-                      </a:pPr>
-                      <a:r>
-                        <a:rPr lang="en-US" sz="1200" dirty="0">
-                          <a:solidFill>
-                            <a:srgbClr val="212121"/>
-                          </a:solidFill>
-                          <a:latin typeface="Calibri" pitchFamily="34" charset="0"/>
-                          <a:ea typeface="Calibri" pitchFamily="34" charset="-122"/>
-                          <a:cs typeface="Calibri" pitchFamily="34" charset="-120"/>
-                        </a:rPr>
-                        <a:t>AI Search</a:t>
-                      </a:r>
-                      <a:endParaRPr lang="en-US" sz="1200" dirty="0">
-                        <a:latin typeface="Calibri" charset="0"/>
-                        <a:ea typeface="Calibri" charset="0"/>
-                        <a:cs typeface="Calibri" charset="0"/>
-                      </a:endParaRPr>
-                    </a:p>
-                  </a:txBody>
-                  <a:tcPr marL="54864" marR="54864" marT="54864" marB="54864" anchor="ctr">
-                    <a:lnL w="6350" cap="flat" cmpd="sng" algn="ctr">
-                      <a:solidFill>
-                        <a:srgbClr val="D1D5DB"/>
-                      </a:solidFill>
-                      <a:prstDash val="solid"/>
-                      <a:round/>
-                      <a:headEnd type="none" w="med" len="med"/>
-                      <a:tailEnd type="none" w="med" len="med"/>
-                    </a:lnL>
-                    <a:lnR w="6350" cap="flat" cmpd="sng" algn="ctr">
-                      <a:solidFill>
-                        <a:srgbClr val="D1D5DB"/>
-                      </a:solidFill>
-                      <a:prstDash val="solid"/>
-                      <a:round/>
-                      <a:headEnd type="none" w="med" len="med"/>
-                      <a:tailEnd type="none" w="med" len="med"/>
-                    </a:lnR>
-                    <a:lnT w="6350" cap="flat" cmpd="sng" algn="ctr">
-                      <a:solidFill>
-                        <a:srgbClr val="D1D5DB"/>
-                      </a:solidFill>
-                      <a:prstDash val="solid"/>
-                      <a:round/>
-                      <a:headEnd type="none" w="med" len="med"/>
-                      <a:tailEnd type="none" w="med" len="med"/>
-                    </a:lnT>
-                    <a:lnB w="6350" cap="flat" cmpd="sng" algn="ctr">
-                      <a:solidFill>
-                        <a:srgbClr val="D1D5DB"/>
-                      </a:solidFill>
-                      <a:prstDash val="solid"/>
-                      <a:round/>
-                      <a:headEnd type="none" w="med" len="med"/>
-                      <a:tailEnd type="none" w="med" len="med"/>
-                    </a:lnB>
-                    <a:solidFill>
-                      <a:srgbClr val="F3F4F6"/>
-                    </a:solidFill>
-                  </a:tcPr>
-                </a:tc>
-                <a:tc>
-                  <a:txBody>
-                    <a:bodyPr/>
-                    <a:lstStyle/>
-                    <a:p>
-                      <a:pPr indent="0" marL="0">
-                        <a:buNone/>
-                      </a:pPr>
-                      <a:r>
-                        <a:rPr lang="en-US" sz="1200" dirty="0">
-                          <a:solidFill>
-                            <a:srgbClr val="212121"/>
-                          </a:solidFill>
-                          <a:latin typeface="Calibri" pitchFamily="34" charset="0"/>
-                          <a:ea typeface="Calibri" pitchFamily="34" charset="-122"/>
-                          <a:cs typeface="Calibri" pitchFamily="34" charset="-120"/>
-                        </a:rPr>
-                        <a:t>agent-framework-azure-ai-search</a:t>
-                      </a:r>
-                      <a:endParaRPr lang="en-US" sz="1200" dirty="0">
-                        <a:latin typeface="Calibri" charset="0"/>
-                        <a:ea typeface="Calibri" charset="0"/>
-                        <a:cs typeface="Calibri" charset="0"/>
-                      </a:endParaRPr>
-                    </a:p>
-                  </a:txBody>
-                  <a:tcPr marL="54864" marR="54864" marT="54864" marB="54864" anchor="ctr">
-                    <a:lnL w="6350" cap="flat" cmpd="sng" algn="ctr">
-                      <a:solidFill>
-                        <a:srgbClr val="D1D5DB"/>
-                      </a:solidFill>
-                      <a:prstDash val="solid"/>
-                      <a:round/>
-                      <a:headEnd type="none" w="med" len="med"/>
-                      <a:tailEnd type="none" w="med" len="med"/>
-                    </a:lnL>
-                    <a:lnR w="6350" cap="flat" cmpd="sng" algn="ctr">
-                      <a:solidFill>
-                        <a:srgbClr val="D1D5DB"/>
-                      </a:solidFill>
-                      <a:prstDash val="solid"/>
-                      <a:round/>
-                      <a:headEnd type="none" w="med" len="med"/>
-                      <a:tailEnd type="none" w="med" len="med"/>
-                    </a:lnR>
-                    <a:lnT w="6350" cap="flat" cmpd="sng" algn="ctr">
-                      <a:solidFill>
-                        <a:srgbClr val="D1D5DB"/>
-                      </a:solidFill>
-                      <a:prstDash val="solid"/>
-                      <a:round/>
-                      <a:headEnd type="none" w="med" len="med"/>
-                      <a:tailEnd type="none" w="med" len="med"/>
-                    </a:lnT>
-                    <a:lnB w="6350" cap="flat" cmpd="sng" algn="ctr">
-                      <a:solidFill>
-                        <a:srgbClr val="D1D5DB"/>
-                      </a:solidFill>
-                      <a:prstDash val="solid"/>
-                      <a:round/>
-                      <a:headEnd type="none" w="med" len="med"/>
-                      <a:tailEnd type="none" w="med" len="med"/>
-                    </a:lnB>
-                    <a:solidFill>
-                      <a:srgbClr val="F3F4F6"/>
-                    </a:solidFill>
-                  </a:tcPr>
-                </a:tc>
-                <a:tc>
-                  <a:txBody>
-                    <a:bodyPr/>
-                    <a:lstStyle/>
-                    <a:p>
-                      <a:pPr indent="0" marL="0">
-                        <a:buNone/>
-                      </a:pPr>
-                      <a:r>
-                        <a:rPr lang="en-US" sz="1200" dirty="0">
-                          <a:solidFill>
-                            <a:srgbClr val="212121"/>
-                          </a:solidFill>
-                          <a:latin typeface="Calibri" pitchFamily="34" charset="0"/>
-                          <a:ea typeface="Calibri" pitchFamily="34" charset="-122"/>
-                          <a:cs typeface="Calibri" pitchFamily="34" charset="-120"/>
-                        </a:rPr>
-                        <a:t>Azure.Search.Documents</a:t>
-                      </a:r>
-                      <a:endParaRPr lang="en-US" sz="1200" dirty="0">
-                        <a:latin typeface="Calibri" charset="0"/>
-                        <a:ea typeface="Calibri" charset="0"/>
-                        <a:cs typeface="Calibri" charset="0"/>
-                      </a:endParaRPr>
-                    </a:p>
-                  </a:txBody>
-                  <a:tcPr marL="54864" marR="54864" marT="54864" marB="54864" anchor="ctr">
-                    <a:lnL w="6350" cap="flat" cmpd="sng" algn="ctr">
-                      <a:solidFill>
-                        <a:srgbClr val="D1D5DB"/>
-                      </a:solidFill>
-                      <a:prstDash val="solid"/>
-                      <a:round/>
-                      <a:headEnd type="none" w="med" len="med"/>
-                      <a:tailEnd type="none" w="med" len="med"/>
-                    </a:lnL>
-                    <a:lnR w="6350" cap="flat" cmpd="sng" algn="ctr">
-                      <a:solidFill>
-                        <a:srgbClr val="D1D5DB"/>
-                      </a:solidFill>
-                      <a:prstDash val="solid"/>
-                      <a:round/>
-                      <a:headEnd type="none" w="med" len="med"/>
-                      <a:tailEnd type="none" w="med" len="med"/>
-                    </a:lnR>
-                    <a:lnT w="6350" cap="flat" cmpd="sng" algn="ctr">
-                      <a:solidFill>
-                        <a:srgbClr val="D1D5DB"/>
-                      </a:solidFill>
-                      <a:prstDash val="solid"/>
-                      <a:round/>
-                      <a:headEnd type="none" w="med" len="med"/>
-                      <a:tailEnd type="none" w="med" len="med"/>
-                    </a:lnT>
-                    <a:lnB w="6350" cap="flat" cmpd="sng" algn="ctr">
-                      <a:solidFill>
-                        <a:srgbClr val="D1D5DB"/>
-                      </a:solidFill>
-                      <a:prstDash val="solid"/>
-                      <a:round/>
-                      <a:headEnd type="none" w="med" len="med"/>
-                      <a:tailEnd type="none" w="med" len="med"/>
-                    </a:lnB>
-                    <a:solidFill>
-                      <a:srgbClr val="F3F4F6"/>
-                    </a:solidFill>
-                  </a:tcPr>
-                </a:tc>
-              </a:tr>
-              <a:tr h="384048">
-                <a:tc>
-                  <a:txBody>
-                    <a:bodyPr/>
-                    <a:lstStyle/>
-                    <a:p>
-                      <a:pPr indent="0" marL="0">
-                        <a:buNone/>
-                      </a:pPr>
-                      <a:r>
-                        <a:rPr lang="en-US" sz="1200" dirty="0">
-                          <a:solidFill>
-                            <a:srgbClr val="212121"/>
-                          </a:solidFill>
-                          <a:latin typeface="Calibri" pitchFamily="34" charset="0"/>
-                          <a:ea typeface="Calibri" pitchFamily="34" charset="-122"/>
-                          <a:cs typeface="Calibri" pitchFamily="34" charset="-120"/>
-                        </a:rPr>
-                        <a:t>MCP hosting</a:t>
-                      </a:r>
-                      <a:endParaRPr lang="en-US" sz="1200" dirty="0">
-                        <a:latin typeface="Calibri" charset="0"/>
-                        <a:ea typeface="Calibri" charset="0"/>
-                        <a:cs typeface="Calibri" charset="0"/>
-                      </a:endParaRPr>
-                    </a:p>
-                  </a:txBody>
-                  <a:tcPr marL="54864" marR="54864" marT="54864" marB="54864" anchor="ctr">
-                    <a:lnL w="6350" cap="flat" cmpd="sng" algn="ctr">
-                      <a:solidFill>
-                        <a:srgbClr val="D1D5DB"/>
-                      </a:solidFill>
-                      <a:prstDash val="solid"/>
-                      <a:round/>
-                      <a:headEnd type="none" w="med" len="med"/>
-                      <a:tailEnd type="none" w="med" len="med"/>
-                    </a:lnL>
-                    <a:lnR w="6350" cap="flat" cmpd="sng" algn="ctr">
-                      <a:solidFill>
-                        <a:srgbClr val="D1D5DB"/>
-                      </a:solidFill>
-                      <a:prstDash val="solid"/>
-                      <a:round/>
-                      <a:headEnd type="none" w="med" len="med"/>
-                      <a:tailEnd type="none" w="med" len="med"/>
-                    </a:lnR>
-                    <a:lnT w="6350" cap="flat" cmpd="sng" algn="ctr">
-                      <a:solidFill>
-                        <a:srgbClr val="D1D5DB"/>
-                      </a:solidFill>
-                      <a:prstDash val="solid"/>
-                      <a:round/>
-                      <a:headEnd type="none" w="med" len="med"/>
-                      <a:tailEnd type="none" w="med" len="med"/>
-                    </a:lnT>
-                    <a:lnB w="6350" cap="flat" cmpd="sng" algn="ctr">
-                      <a:solidFill>
-                        <a:srgbClr val="D1D5DB"/>
-                      </a:solidFill>
-                      <a:prstDash val="solid"/>
-                      <a:round/>
-                      <a:headEnd type="none" w="med" len="med"/>
-                      <a:tailEnd type="none" w="med" len="med"/>
-                    </a:lnB>
-                    <a:solidFill>
-                      <a:srgbClr val="FFFFFF"/>
-                    </a:solidFill>
-                  </a:tcPr>
-                </a:tc>
-                <a:tc>
-                  <a:txBody>
-                    <a:bodyPr/>
-                    <a:lstStyle/>
-                    <a:p>
-                      <a:pPr indent="0" marL="0">
-                        <a:buNone/>
-                      </a:pPr>
-                      <a:r>
-                        <a:rPr lang="en-US" sz="1200" dirty="0">
-                          <a:solidFill>
-                            <a:srgbClr val="212121"/>
-                          </a:solidFill>
-                          <a:latin typeface="Calibri" pitchFamily="34" charset="0"/>
-                          <a:ea typeface="Calibri" pitchFamily="34" charset="-122"/>
-                          <a:cs typeface="Calibri" pitchFamily="34" charset="-120"/>
-                        </a:rPr>
-                        <a:t>agent-framework-hosting-mcp</a:t>
-                      </a:r>
-                      <a:endParaRPr lang="en-US" sz="1200" dirty="0">
-                        <a:latin typeface="Calibri" charset="0"/>
-                        <a:ea typeface="Calibri" charset="0"/>
-                        <a:cs typeface="Calibri" charset="0"/>
-                      </a:endParaRPr>
-                    </a:p>
-                  </a:txBody>
-                  <a:tcPr marL="54864" marR="54864" marT="54864" marB="54864" anchor="ctr">
-                    <a:lnL w="6350" cap="flat" cmpd="sng" algn="ctr">
-                      <a:solidFill>
-                        <a:srgbClr val="D1D5DB"/>
-                      </a:solidFill>
-                      <a:prstDash val="solid"/>
-                      <a:round/>
-                      <a:headEnd type="none" w="med" len="med"/>
-                      <a:tailEnd type="none" w="med" len="med"/>
-                    </a:lnL>
-                    <a:lnR w="6350" cap="flat" cmpd="sng" algn="ctr">
-                      <a:solidFill>
-                        <a:srgbClr val="D1D5DB"/>
-                      </a:solidFill>
-                      <a:prstDash val="solid"/>
-                      <a:round/>
-                      <a:headEnd type="none" w="med" len="med"/>
-                      <a:tailEnd type="none" w="med" len="med"/>
-                    </a:lnR>
-                    <a:lnT w="6350" cap="flat" cmpd="sng" algn="ctr">
-                      <a:solidFill>
-                        <a:srgbClr val="D1D5DB"/>
-                      </a:solidFill>
-                      <a:prstDash val="solid"/>
-                      <a:round/>
-                      <a:headEnd type="none" w="med" len="med"/>
-                      <a:tailEnd type="none" w="med" len="med"/>
-                    </a:lnT>
-                    <a:lnB w="6350" cap="flat" cmpd="sng" algn="ctr">
-                      <a:solidFill>
-                        <a:srgbClr val="D1D5DB"/>
-                      </a:solidFill>
-                      <a:prstDash val="solid"/>
-                      <a:round/>
-                      <a:headEnd type="none" w="med" len="med"/>
-                      <a:tailEnd type="none" w="med" len="med"/>
-                    </a:lnB>
-                    <a:solidFill>
-                      <a:srgbClr val="FFFFFF"/>
-                    </a:solidFill>
-                  </a:tcPr>
-                </a:tc>
-                <a:tc>
-                  <a:txBody>
-                    <a:bodyPr/>
-                    <a:lstStyle/>
-                    <a:p>
-                      <a:pPr indent="0" marL="0">
-                        <a:buNone/>
-                      </a:pPr>
-                      <a:r>
-                        <a:rPr lang="en-US" sz="1200" dirty="0">
-                          <a:solidFill>
-                            <a:srgbClr val="212121"/>
-                          </a:solidFill>
-                          <a:latin typeface="Calibri" pitchFamily="34" charset="0"/>
-                          <a:ea typeface="Calibri" pitchFamily="34" charset="-122"/>
-                          <a:cs typeface="Calibri" pitchFamily="34" charset="-120"/>
-                        </a:rPr>
-                        <a:t>ModelContextProtocol samples</a:t>
-                      </a:r>
-                      <a:endParaRPr lang="en-US" sz="1200" dirty="0">
-                        <a:latin typeface="Calibri" charset="0"/>
-                        <a:ea typeface="Calibri" charset="0"/>
-                        <a:cs typeface="Calibri" charset="0"/>
-                      </a:endParaRPr>
-                    </a:p>
-                  </a:txBody>
-                  <a:tcPr marL="54864" marR="54864" marT="54864" marB="54864" anchor="ctr">
-                    <a:lnL w="6350" cap="flat" cmpd="sng" algn="ctr">
-                      <a:solidFill>
-                        <a:srgbClr val="D1D5DB"/>
-                      </a:solidFill>
-                      <a:prstDash val="solid"/>
-                      <a:round/>
-                      <a:headEnd type="none" w="med" len="med"/>
-                      <a:tailEnd type="none" w="med" len="med"/>
-                    </a:lnL>
-                    <a:lnR w="6350" cap="flat" cmpd="sng" algn="ctr">
-                      <a:solidFill>
-                        <a:srgbClr val="D1D5DB"/>
-                      </a:solidFill>
-                      <a:prstDash val="solid"/>
-                      <a:round/>
-                      <a:headEnd type="none" w="med" len="med"/>
-                      <a:tailEnd type="none" w="med" len="med"/>
-                    </a:lnR>
-                    <a:lnT w="6350" cap="flat" cmpd="sng" algn="ctr">
-                      <a:solidFill>
-                        <a:srgbClr val="D1D5DB"/>
-                      </a:solidFill>
-                      <a:prstDash val="solid"/>
-                      <a:round/>
-                      <a:headEnd type="none" w="med" len="med"/>
-                      <a:tailEnd type="none" w="med" len="med"/>
-                    </a:lnT>
-                    <a:lnB w="6350" cap="flat" cmpd="sng" algn="ctr">
-                      <a:solidFill>
-                        <a:srgbClr val="D1D5DB"/>
-                      </a:solidFill>
-                      <a:prstDash val="solid"/>
-                      <a:round/>
-                      <a:headEnd type="none" w="med" len="med"/>
-                      <a:tailEnd type="none" w="med" len="med"/>
-                    </a:lnB>
-                    <a:solidFill>
-                      <a:srgbClr val="FFFFFF"/>
-                    </a:solidFill>
-                  </a:tcPr>
-                </a:tc>
-              </a:tr>
-            </a:tbl>
-          </a:graphicData>
-        </a:graphic>
-      </p:graphicFrame>
+      <p:sp>
+        <p:nvSpPr>
+          <p:cNvPr id="5" name="Text 3"/>
+          <p:cNvSpPr/>
+          <p:nvPr/>
+        </p:nvSpPr>
+        <p:spPr>
+          <a:xfrm>
+            <a:off x="365760" y="1097280"/>
+            <a:ext cx="8412480" cy="3749040"/>
+          </a:xfrm>
+          <a:prstGeom prst="rect">
+            <a:avLst/>
+          </a:prstGeom>
+          <a:noFill/>
+          <a:ln/>
+        </p:spPr>
+        <p:txBody>
+          <a:bodyPr wrap="square" rtlCol="0" anchor="ctr"/>
+          <a:lstStyle/>
+          <a:p>
+            <a:pPr marL="342900" indent="-342900">
+              <a:spcAft>
+                <a:spcPts val="600"/>
+              </a:spcAft>
+              <a:buSzPct val="100000"/>
+              <a:buChar char="•"/>
+            </a:pPr>
+            <a:r>
+              <a:rPr lang="en-US" sz="1500" dirty="0">
+                <a:solidFill>
+                  <a:srgbClr val="212121"/>
+                </a:solidFill>
+                <a:latin typeface="Calibri" pitchFamily="34" charset="0"/>
+                <a:ea typeface="Calibri" pitchFamily="34" charset="-122"/>
+                <a:cs typeface="Calibri" pitchFamily="34" charset="-120"/>
+              </a:rPr>
+              <a:t>Every MAF sample uses Azure identity, not API keys</a:t>
+            </a:r>
+            <a:endParaRPr lang="en-US" sz="1500" dirty="0"/>
+          </a:p>
+          <a:p>
+            <a:pPr marL="342900" indent="-342900">
+              <a:spcAft>
+                <a:spcPts val="600"/>
+              </a:spcAft>
+              <a:buSzPct val="100000"/>
+              <a:buChar char="•"/>
+            </a:pPr>
+            <a:r>
+              <a:rPr lang="en-US" sz="1500" dirty="0">
+                <a:solidFill>
+                  <a:srgbClr val="212121"/>
+                </a:solidFill>
+                <a:latin typeface="Calibri" pitchFamily="34" charset="0"/>
+                <a:ea typeface="Calibri" pitchFamily="34" charset="-122"/>
+                <a:cs typeface="Calibri" pitchFamily="34" charset="-120"/>
+              </a:rPr>
+              <a:t>Dev on your laptop: AzureCliCredential() — signs in via az login</a:t>
+            </a:r>
+            <a:endParaRPr lang="en-US" sz="1500" dirty="0"/>
+          </a:p>
+          <a:p>
+            <a:pPr marL="342900" indent="-342900">
+              <a:spcAft>
+                <a:spcPts val="600"/>
+              </a:spcAft>
+              <a:buSzPct val="100000"/>
+              <a:buChar char="•"/>
+            </a:pPr>
+            <a:r>
+              <a:rPr lang="en-US" sz="1500" dirty="0">
+                <a:solidFill>
+                  <a:srgbClr val="212121"/>
+                </a:solidFill>
+                <a:latin typeface="Calibri" pitchFamily="34" charset="0"/>
+                <a:ea typeface="Calibri" pitchFamily="34" charset="-122"/>
+                <a:cs typeface="Calibri" pitchFamily="34" charset="-120"/>
+              </a:rPr>
+              <a:t>CI / production: DefaultAzureCredential() or, preferably, an explicit ManagedIdentityCredential</a:t>
+            </a:r>
+            <a:endParaRPr lang="en-US" sz="1500" dirty="0"/>
+          </a:p>
+          <a:p>
+            <a:pPr marL="342900" indent="-342900">
+              <a:spcAft>
+                <a:spcPts val="600"/>
+              </a:spcAft>
+              <a:buSzPct val="100000"/>
+              <a:buChar char="•"/>
+            </a:pPr>
+            <a:r>
+              <a:rPr lang="en-US" sz="1500" dirty="0">
+                <a:solidFill>
+                  <a:srgbClr val="212121"/>
+                </a:solidFill>
+                <a:latin typeface="Calibri" pitchFamily="34" charset="0"/>
+                <a:ea typeface="Calibri" pitchFamily="34" charset="-122"/>
+                <a:cs typeface="Calibri" pitchFamily="34" charset="-120"/>
+              </a:rPr>
+              <a:t>Never commit API keys or connection strings — enforced on Day 5</a:t>
+            </a:r>
+            <a:endParaRPr lang="en-US" sz="1500" dirty="0"/>
+          </a:p>
+        </p:txBody>
+      </p:sp>
     </p:spTree>
   </p:cSld>
   <p:clrMapOvr>

--- a/decks/day1/module-4-maf-101.pptx
+++ b/decks/day1/module-4-maf-101.pptx
@@ -6116,7 +6116,7 @@
                 <a:ea typeface="Calibri" pitchFamily="34" charset="-122"/>
                 <a:cs typeface="Calibri" pitchFamily="34" charset="-120"/>
               </a:rPr>
-              <a:t>Runbook: demos/day1/module-4-demo-1-six-line-agent.md · Scratch files: demos/day1/module-4-demo-1-scratch/</a:t>
+              <a:t>Runbook: demos/day1/module-4-demo-1-six-line-agent.md · Scratch files: demos/day1/module-4-demo-1-six-line-agent/</a:t>
             </a:r>
             <a:endParaRPr lang="en-US" sz="1100" dirty="0"/>
           </a:p>

--- a/decks/day1/module-4-maf-101.pptx
+++ b/decks/day1/module-4-maf-101.pptx
@@ -5568,11 +5568,11 @@
             <a:avLst/>
           </a:prstGeom>
           <a:solidFill>
-            <a:srgbClr val="F3F4F6"/>
+            <a:srgbClr val="1D1E22"/>
           </a:solidFill>
-          <a:ln w="6350">
+          <a:ln w="9525">
             <a:solidFill>
-              <a:srgbClr val="D1D5DB"/>
+              <a:srgbClr val="2A2B2E"/>
             </a:solidFill>
             <a:prstDash val="solid"/>
           </a:ln>
@@ -5596,7 +5596,9 @@
           <a:ln/>
         </p:spPr>
         <p:txBody>
-          <a:bodyPr wrap="square" lIns="0" tIns="0" rIns="0" bIns="0" rtlCol="0" anchor="t"/>
+          <a:bodyPr wrap="square" lIns="0" tIns="0" rIns="0" bIns="0" rtlCol="0" anchor="t">
+            <a:normAutofit/>
+          </a:bodyPr>
           <a:lstStyle/>
           <a:p>
             <a:pPr indent="0" marL="0">
@@ -5605,13 +5607,27 @@
             <a:r>
               <a:rPr lang="en-US" sz="1300" dirty="0">
                 <a:solidFill>
-                  <a:srgbClr val="212121"/>
-                </a:solidFill>
-                <a:latin typeface="Consolas" pitchFamily="34" charset="0"/>
-                <a:ea typeface="Consolas" pitchFamily="34" charset="-122"/>
-                <a:cs typeface="Consolas" pitchFamily="34" charset="-120"/>
-              </a:rPr>
-              <a:t>import asyncio</a:t>
+                  <a:srgbClr val="A996B6"/>
+                </a:solidFill>
+                <a:latin typeface="Consolas" pitchFamily="34" charset="0"/>
+                <a:ea typeface="Consolas" pitchFamily="34" charset="-122"/>
+                <a:cs typeface="Consolas" pitchFamily="34" charset="-120"/>
+              </a:rPr>
+              <a:t>import</a:t>
+            </a:r>
+            <a:pPr indent="0" marL="0">
+              <a:buNone/>
+            </a:pPr>
+            <a:r>
+              <a:rPr lang="en-US" sz="1300" dirty="0">
+                <a:solidFill>
+                  <a:srgbClr val="FFFFFF"/>
+                </a:solidFill>
+                <a:latin typeface="Consolas" pitchFamily="34" charset="0"/>
+                <a:ea typeface="Consolas" pitchFamily="34" charset="-122"/>
+                <a:cs typeface="Consolas" pitchFamily="34" charset="-120"/>
+              </a:rPr>
+              <a:t> asyncio</a:t>
             </a:r>
             <a:endParaRPr lang="en-US" sz="1300" dirty="0"/>
           </a:p>
@@ -5622,13 +5638,55 @@
             <a:r>
               <a:rPr lang="en-US" sz="1300" dirty="0">
                 <a:solidFill>
-                  <a:srgbClr val="212121"/>
-                </a:solidFill>
-                <a:latin typeface="Consolas" pitchFamily="34" charset="0"/>
-                <a:ea typeface="Consolas" pitchFamily="34" charset="-122"/>
-                <a:cs typeface="Consolas" pitchFamily="34" charset="-120"/>
-              </a:rPr>
-              <a:t>from agent_framework import Agent</a:t>
+                  <a:srgbClr val="A996B6"/>
+                </a:solidFill>
+                <a:latin typeface="Consolas" pitchFamily="34" charset="0"/>
+                <a:ea typeface="Consolas" pitchFamily="34" charset="-122"/>
+                <a:cs typeface="Consolas" pitchFamily="34" charset="-120"/>
+              </a:rPr>
+              <a:t>from</a:t>
+            </a:r>
+            <a:pPr indent="0" marL="0">
+              <a:buNone/>
+            </a:pPr>
+            <a:r>
+              <a:rPr lang="en-US" sz="1300" dirty="0">
+                <a:solidFill>
+                  <a:srgbClr val="FFFFFF"/>
+                </a:solidFill>
+                <a:latin typeface="Consolas" pitchFamily="34" charset="0"/>
+                <a:ea typeface="Consolas" pitchFamily="34" charset="-122"/>
+                <a:cs typeface="Consolas" pitchFamily="34" charset="-120"/>
+              </a:rPr>
+              <a:t> agent_framework </a:t>
+            </a:r>
+            <a:pPr indent="0" marL="0">
+              <a:buNone/>
+            </a:pPr>
+            <a:r>
+              <a:rPr lang="en-US" sz="1300" dirty="0">
+                <a:solidFill>
+                  <a:srgbClr val="A996B6"/>
+                </a:solidFill>
+                <a:latin typeface="Consolas" pitchFamily="34" charset="0"/>
+                <a:ea typeface="Consolas" pitchFamily="34" charset="-122"/>
+                <a:cs typeface="Consolas" pitchFamily="34" charset="-120"/>
+              </a:rPr>
+              <a:t>import</a:t>
+            </a:r>
+            <a:pPr indent="0" marL="0">
+              <a:buNone/>
+            </a:pPr>
+            <a:r>
+              <a:rPr lang="en-US" sz="1300" dirty="0">
+                <a:solidFill>
+                  <a:srgbClr val="FFFFFF"/>
+                </a:solidFill>
+                <a:latin typeface="Consolas" pitchFamily="34" charset="0"/>
+                <a:ea typeface="Consolas" pitchFamily="34" charset="-122"/>
+                <a:cs typeface="Consolas" pitchFamily="34" charset="-120"/>
+              </a:rPr>
+              <a:t> Agent</a:t>
             </a:r>
             <a:endParaRPr lang="en-US" sz="1300" dirty="0"/>
           </a:p>
@@ -5639,13 +5697,55 @@
             <a:r>
               <a:rPr lang="en-US" sz="1300" dirty="0">
                 <a:solidFill>
-                  <a:srgbClr val="212121"/>
-                </a:solidFill>
-                <a:latin typeface="Consolas" pitchFamily="34" charset="0"/>
-                <a:ea typeface="Consolas" pitchFamily="34" charset="-122"/>
-                <a:cs typeface="Consolas" pitchFamily="34" charset="-120"/>
-              </a:rPr>
-              <a:t>from agent_framework.foundry import FoundryChatClient</a:t>
+                  <a:srgbClr val="A996B6"/>
+                </a:solidFill>
+                <a:latin typeface="Consolas" pitchFamily="34" charset="0"/>
+                <a:ea typeface="Consolas" pitchFamily="34" charset="-122"/>
+                <a:cs typeface="Consolas" pitchFamily="34" charset="-120"/>
+              </a:rPr>
+              <a:t>from</a:t>
+            </a:r>
+            <a:pPr indent="0" marL="0">
+              <a:buNone/>
+            </a:pPr>
+            <a:r>
+              <a:rPr lang="en-US" sz="1300" dirty="0">
+                <a:solidFill>
+                  <a:srgbClr val="FFFFFF"/>
+                </a:solidFill>
+                <a:latin typeface="Consolas" pitchFamily="34" charset="0"/>
+                <a:ea typeface="Consolas" pitchFamily="34" charset="-122"/>
+                <a:cs typeface="Consolas" pitchFamily="34" charset="-120"/>
+              </a:rPr>
+              <a:t> agent_framework.foundry </a:t>
+            </a:r>
+            <a:pPr indent="0" marL="0">
+              <a:buNone/>
+            </a:pPr>
+            <a:r>
+              <a:rPr lang="en-US" sz="1300" dirty="0">
+                <a:solidFill>
+                  <a:srgbClr val="A996B6"/>
+                </a:solidFill>
+                <a:latin typeface="Consolas" pitchFamily="34" charset="0"/>
+                <a:ea typeface="Consolas" pitchFamily="34" charset="-122"/>
+                <a:cs typeface="Consolas" pitchFamily="34" charset="-120"/>
+              </a:rPr>
+              <a:t>import</a:t>
+            </a:r>
+            <a:pPr indent="0" marL="0">
+              <a:buNone/>
+            </a:pPr>
+            <a:r>
+              <a:rPr lang="en-US" sz="1300" dirty="0">
+                <a:solidFill>
+                  <a:srgbClr val="FFFFFF"/>
+                </a:solidFill>
+                <a:latin typeface="Consolas" pitchFamily="34" charset="0"/>
+                <a:ea typeface="Consolas" pitchFamily="34" charset="-122"/>
+                <a:cs typeface="Consolas" pitchFamily="34" charset="-120"/>
+              </a:rPr>
+              <a:t> FoundryChatClient</a:t>
             </a:r>
             <a:endParaRPr lang="en-US" sz="1300" dirty="0"/>
           </a:p>
@@ -5656,13 +5756,55 @@
             <a:r>
               <a:rPr lang="en-US" sz="1300" dirty="0">
                 <a:solidFill>
-                  <a:srgbClr val="212121"/>
-                </a:solidFill>
-                <a:latin typeface="Consolas" pitchFamily="34" charset="0"/>
-                <a:ea typeface="Consolas" pitchFamily="34" charset="-122"/>
-                <a:cs typeface="Consolas" pitchFamily="34" charset="-120"/>
-              </a:rPr>
-              <a:t>from azure.identity import AzureCliCredential</a:t>
+                  <a:srgbClr val="A996B6"/>
+                </a:solidFill>
+                <a:latin typeface="Consolas" pitchFamily="34" charset="0"/>
+                <a:ea typeface="Consolas" pitchFamily="34" charset="-122"/>
+                <a:cs typeface="Consolas" pitchFamily="34" charset="-120"/>
+              </a:rPr>
+              <a:t>from</a:t>
+            </a:r>
+            <a:pPr indent="0" marL="0">
+              <a:buNone/>
+            </a:pPr>
+            <a:r>
+              <a:rPr lang="en-US" sz="1300" dirty="0">
+                <a:solidFill>
+                  <a:srgbClr val="FFFFFF"/>
+                </a:solidFill>
+                <a:latin typeface="Consolas" pitchFamily="34" charset="0"/>
+                <a:ea typeface="Consolas" pitchFamily="34" charset="-122"/>
+                <a:cs typeface="Consolas" pitchFamily="34" charset="-120"/>
+              </a:rPr>
+              <a:t> azure.identity </a:t>
+            </a:r>
+            <a:pPr indent="0" marL="0">
+              <a:buNone/>
+            </a:pPr>
+            <a:r>
+              <a:rPr lang="en-US" sz="1300" dirty="0">
+                <a:solidFill>
+                  <a:srgbClr val="A996B6"/>
+                </a:solidFill>
+                <a:latin typeface="Consolas" pitchFamily="34" charset="0"/>
+                <a:ea typeface="Consolas" pitchFamily="34" charset="-122"/>
+                <a:cs typeface="Consolas" pitchFamily="34" charset="-120"/>
+              </a:rPr>
+              <a:t>import</a:t>
+            </a:r>
+            <a:pPr indent="0" marL="0">
+              <a:buNone/>
+            </a:pPr>
+            <a:r>
+              <a:rPr lang="en-US" sz="1300" dirty="0">
+                <a:solidFill>
+                  <a:srgbClr val="FFFFFF"/>
+                </a:solidFill>
+                <a:latin typeface="Consolas" pitchFamily="34" charset="0"/>
+                <a:ea typeface="Consolas" pitchFamily="34" charset="-122"/>
+                <a:cs typeface="Consolas" pitchFamily="34" charset="-120"/>
+              </a:rPr>
+              <a:t> AzureCliCredential</a:t>
             </a:r>
             <a:endParaRPr lang="en-US" sz="1300" dirty="0"/>
           </a:p>
@@ -5679,13 +5821,55 @@
             <a:r>
               <a:rPr lang="en-US" sz="1300" dirty="0">
                 <a:solidFill>
-                  <a:srgbClr val="212121"/>
-                </a:solidFill>
-                <a:latin typeface="Consolas" pitchFamily="34" charset="0"/>
-                <a:ea typeface="Consolas" pitchFamily="34" charset="-122"/>
-                <a:cs typeface="Consolas" pitchFamily="34" charset="-120"/>
-              </a:rPr>
-              <a:t>async def main():</a:t>
+                  <a:srgbClr val="A996B6"/>
+                </a:solidFill>
+                <a:latin typeface="Consolas" pitchFamily="34" charset="0"/>
+                <a:ea typeface="Consolas" pitchFamily="34" charset="-122"/>
+                <a:cs typeface="Consolas" pitchFamily="34" charset="-120"/>
+              </a:rPr>
+              <a:t>async</a:t>
+            </a:r>
+            <a:pPr indent="0" marL="0">
+              <a:buNone/>
+            </a:pPr>
+            <a:r>
+              <a:rPr lang="en-US" sz="1300" dirty="0">
+                <a:solidFill>
+                  <a:srgbClr val="FFFFFF"/>
+                </a:solidFill>
+                <a:latin typeface="Consolas" pitchFamily="34" charset="0"/>
+                <a:ea typeface="Consolas" pitchFamily="34" charset="-122"/>
+                <a:cs typeface="Consolas" pitchFamily="34" charset="-120"/>
+              </a:rPr>
+              <a:t> </a:t>
+            </a:r>
+            <a:pPr indent="0" marL="0">
+              <a:buNone/>
+            </a:pPr>
+            <a:r>
+              <a:rPr lang="en-US" sz="1300" dirty="0">
+                <a:solidFill>
+                  <a:srgbClr val="A996B6"/>
+                </a:solidFill>
+                <a:latin typeface="Consolas" pitchFamily="34" charset="0"/>
+                <a:ea typeface="Consolas" pitchFamily="34" charset="-122"/>
+                <a:cs typeface="Consolas" pitchFamily="34" charset="-120"/>
+              </a:rPr>
+              <a:t>def</a:t>
+            </a:r>
+            <a:pPr indent="0" marL="0">
+              <a:buNone/>
+            </a:pPr>
+            <a:r>
+              <a:rPr lang="en-US" sz="1300" dirty="0">
+                <a:solidFill>
+                  <a:srgbClr val="FFFFFF"/>
+                </a:solidFill>
+                <a:latin typeface="Consolas" pitchFamily="34" charset="0"/>
+                <a:ea typeface="Consolas" pitchFamily="34" charset="-122"/>
+                <a:cs typeface="Consolas" pitchFamily="34" charset="-120"/>
+              </a:rPr>
+              <a:t> main():</a:t>
             </a:r>
             <a:endParaRPr lang="en-US" sz="1300" dirty="0"/>
           </a:p>
@@ -5696,7 +5880,7 @@
             <a:r>
               <a:rPr lang="en-US" sz="1300" dirty="0">
                 <a:solidFill>
-                  <a:srgbClr val="212121"/>
+                  <a:srgbClr val="FFFFFF"/>
                 </a:solidFill>
                 <a:latin typeface="Consolas" pitchFamily="34" charset="0"/>
                 <a:ea typeface="Consolas" pitchFamily="34" charset="-122"/>
@@ -5713,7 +5897,7 @@
             <a:r>
               <a:rPr lang="en-US" sz="1300" dirty="0">
                 <a:solidFill>
-                  <a:srgbClr val="212121"/>
+                  <a:srgbClr val="FFFFFF"/>
                 </a:solidFill>
                 <a:latin typeface="Consolas" pitchFamily="34" charset="0"/>
                 <a:ea typeface="Consolas" pitchFamily="34" charset="-122"/>
@@ -5730,13 +5914,41 @@
             <a:r>
               <a:rPr lang="en-US" sz="1300" dirty="0">
                 <a:solidFill>
-                  <a:srgbClr val="212121"/>
-                </a:solidFill>
-                <a:latin typeface="Consolas" pitchFamily="34" charset="0"/>
-                <a:ea typeface="Consolas" pitchFamily="34" charset="-122"/>
-                <a:cs typeface="Consolas" pitchFamily="34" charset="-120"/>
-              </a:rPr>
-              <a:t>        name="HelloAgent",</a:t>
+                  <a:srgbClr val="FFFFFF"/>
+                </a:solidFill>
+                <a:latin typeface="Consolas" pitchFamily="34" charset="0"/>
+                <a:ea typeface="Consolas" pitchFamily="34" charset="-122"/>
+                <a:cs typeface="Consolas" pitchFamily="34" charset="-120"/>
+              </a:rPr>
+              <a:t>        name=</a:t>
+            </a:r>
+            <a:pPr indent="0" marL="0">
+              <a:buNone/>
+            </a:pPr>
+            <a:r>
+              <a:rPr lang="en-US" sz="1300" dirty="0">
+                <a:solidFill>
+                  <a:srgbClr val="E4C98A"/>
+                </a:solidFill>
+                <a:latin typeface="Consolas" pitchFamily="34" charset="0"/>
+                <a:ea typeface="Consolas" pitchFamily="34" charset="-122"/>
+                <a:cs typeface="Consolas" pitchFamily="34" charset="-120"/>
+              </a:rPr>
+              <a:t>"HelloAgent"</a:t>
+            </a:r>
+            <a:pPr indent="0" marL="0">
+              <a:buNone/>
+            </a:pPr>
+            <a:r>
+              <a:rPr lang="en-US" sz="1300" dirty="0">
+                <a:solidFill>
+                  <a:srgbClr val="FFFFFF"/>
+                </a:solidFill>
+                <a:latin typeface="Consolas" pitchFamily="34" charset="0"/>
+                <a:ea typeface="Consolas" pitchFamily="34" charset="-122"/>
+                <a:cs typeface="Consolas" pitchFamily="34" charset="-120"/>
+              </a:rPr>
+              <a:t>,</a:t>
             </a:r>
             <a:endParaRPr lang="en-US" sz="1300" dirty="0"/>
           </a:p>
@@ -5747,13 +5959,41 @@
             <a:r>
               <a:rPr lang="en-US" sz="1300" dirty="0">
                 <a:solidFill>
-                  <a:srgbClr val="212121"/>
-                </a:solidFill>
-                <a:latin typeface="Consolas" pitchFamily="34" charset="0"/>
-                <a:ea typeface="Consolas" pitchFamily="34" charset="-122"/>
-                <a:cs typeface="Consolas" pitchFamily="34" charset="-120"/>
-              </a:rPr>
-              <a:t>        instructions="You are a friendly assistant. Keep answers brief.",</a:t>
+                  <a:srgbClr val="FFFFFF"/>
+                </a:solidFill>
+                <a:latin typeface="Consolas" pitchFamily="34" charset="0"/>
+                <a:ea typeface="Consolas" pitchFamily="34" charset="-122"/>
+                <a:cs typeface="Consolas" pitchFamily="34" charset="-120"/>
+              </a:rPr>
+              <a:t>        instructions=</a:t>
+            </a:r>
+            <a:pPr indent="0" marL="0">
+              <a:buNone/>
+            </a:pPr>
+            <a:r>
+              <a:rPr lang="en-US" sz="1300" dirty="0">
+                <a:solidFill>
+                  <a:srgbClr val="E4C98A"/>
+                </a:solidFill>
+                <a:latin typeface="Consolas" pitchFamily="34" charset="0"/>
+                <a:ea typeface="Consolas" pitchFamily="34" charset="-122"/>
+                <a:cs typeface="Consolas" pitchFamily="34" charset="-120"/>
+              </a:rPr>
+              <a:t>"You are a friendly assistant. Keep answers brief."</a:t>
+            </a:r>
+            <a:pPr indent="0" marL="0">
+              <a:buNone/>
+            </a:pPr>
+            <a:r>
+              <a:rPr lang="en-US" sz="1300" dirty="0">
+                <a:solidFill>
+                  <a:srgbClr val="FFFFFF"/>
+                </a:solidFill>
+                <a:latin typeface="Consolas" pitchFamily="34" charset="0"/>
+                <a:ea typeface="Consolas" pitchFamily="34" charset="-122"/>
+                <a:cs typeface="Consolas" pitchFamily="34" charset="-120"/>
+              </a:rPr>
+              <a:t>,</a:t>
             </a:r>
             <a:endParaRPr lang="en-US" sz="1300" dirty="0"/>
           </a:p>
@@ -5764,7 +6004,7 @@
             <a:r>
               <a:rPr lang="en-US" sz="1300" dirty="0">
                 <a:solidFill>
-                  <a:srgbClr val="212121"/>
+                  <a:srgbClr val="FFFFFF"/>
                 </a:solidFill>
                 <a:latin typeface="Consolas" pitchFamily="34" charset="0"/>
                 <a:ea typeface="Consolas" pitchFamily="34" charset="-122"/>
@@ -5781,13 +6021,69 @@
             <a:r>
               <a:rPr lang="en-US" sz="1300" dirty="0">
                 <a:solidFill>
-                  <a:srgbClr val="212121"/>
-                </a:solidFill>
-                <a:latin typeface="Consolas" pitchFamily="34" charset="0"/>
-                <a:ea typeface="Consolas" pitchFamily="34" charset="-122"/>
-                <a:cs typeface="Consolas" pitchFamily="34" charset="-120"/>
-              </a:rPr>
-              <a:t>    result = await agent.run("What is the capital of France?")</a:t>
+                  <a:srgbClr val="FFFFFF"/>
+                </a:solidFill>
+                <a:latin typeface="Consolas" pitchFamily="34" charset="0"/>
+                <a:ea typeface="Consolas" pitchFamily="34" charset="-122"/>
+                <a:cs typeface="Consolas" pitchFamily="34" charset="-120"/>
+              </a:rPr>
+              <a:t>    result = </a:t>
+            </a:r>
+            <a:pPr indent="0" marL="0">
+              <a:buNone/>
+            </a:pPr>
+            <a:r>
+              <a:rPr lang="en-US" sz="1300" dirty="0">
+                <a:solidFill>
+                  <a:srgbClr val="A996B6"/>
+                </a:solidFill>
+                <a:latin typeface="Consolas" pitchFamily="34" charset="0"/>
+                <a:ea typeface="Consolas" pitchFamily="34" charset="-122"/>
+                <a:cs typeface="Consolas" pitchFamily="34" charset="-120"/>
+              </a:rPr>
+              <a:t>await</a:t>
+            </a:r>
+            <a:pPr indent="0" marL="0">
+              <a:buNone/>
+            </a:pPr>
+            <a:r>
+              <a:rPr lang="en-US" sz="1300" dirty="0">
+                <a:solidFill>
+                  <a:srgbClr val="FFFFFF"/>
+                </a:solidFill>
+                <a:latin typeface="Consolas" pitchFamily="34" charset="0"/>
+                <a:ea typeface="Consolas" pitchFamily="34" charset="-122"/>
+                <a:cs typeface="Consolas" pitchFamily="34" charset="-120"/>
+              </a:rPr>
+              <a:t> agent.run(</a:t>
+            </a:r>
+            <a:pPr indent="0" marL="0">
+              <a:buNone/>
+            </a:pPr>
+            <a:r>
+              <a:rPr lang="en-US" sz="1300" dirty="0">
+                <a:solidFill>
+                  <a:srgbClr val="E4C98A"/>
+                </a:solidFill>
+                <a:latin typeface="Consolas" pitchFamily="34" charset="0"/>
+                <a:ea typeface="Consolas" pitchFamily="34" charset="-122"/>
+                <a:cs typeface="Consolas" pitchFamily="34" charset="-120"/>
+              </a:rPr>
+              <a:t>"What is the capital of France?"</a:t>
+            </a:r>
+            <a:pPr indent="0" marL="0">
+              <a:buNone/>
+            </a:pPr>
+            <a:r>
+              <a:rPr lang="en-US" sz="1300" dirty="0">
+                <a:solidFill>
+                  <a:srgbClr val="FFFFFF"/>
+                </a:solidFill>
+                <a:latin typeface="Consolas" pitchFamily="34" charset="0"/>
+                <a:ea typeface="Consolas" pitchFamily="34" charset="-122"/>
+                <a:cs typeface="Consolas" pitchFamily="34" charset="-120"/>
+              </a:rPr>
+              <a:t>)</a:t>
             </a:r>
             <a:endParaRPr lang="en-US" sz="1300" dirty="0"/>
           </a:p>
@@ -5798,7 +6094,7 @@
             <a:r>
               <a:rPr lang="en-US" sz="1300" dirty="0">
                 <a:solidFill>
-                  <a:srgbClr val="212121"/>
+                  <a:srgbClr val="FFFFFF"/>
                 </a:solidFill>
                 <a:latin typeface="Consolas" pitchFamily="34" charset="0"/>
                 <a:ea typeface="Consolas" pitchFamily="34" charset="-122"/>
@@ -5821,7 +6117,7 @@
             <a:r>
               <a:rPr lang="en-US" sz="1300" dirty="0">
                 <a:solidFill>
-                  <a:srgbClr val="212121"/>
+                  <a:srgbClr val="FFFFFF"/>
                 </a:solidFill>
                 <a:latin typeface="Consolas" pitchFamily="34" charset="0"/>
                 <a:ea typeface="Consolas" pitchFamily="34" charset="-122"/>
@@ -6267,11 +6563,11 @@
             <a:avLst/>
           </a:prstGeom>
           <a:solidFill>
-            <a:srgbClr val="F3F4F6"/>
+            <a:srgbClr val="1D1E22"/>
           </a:solidFill>
-          <a:ln w="6350">
+          <a:ln w="9525">
             <a:solidFill>
-              <a:srgbClr val="D1D5DB"/>
+              <a:srgbClr val="2A2B2E"/>
             </a:solidFill>
             <a:prstDash val="solid"/>
           </a:ln>
@@ -6295,7 +6591,9 @@
           <a:ln/>
         </p:spPr>
         <p:txBody>
-          <a:bodyPr wrap="square" lIns="0" tIns="0" rIns="0" bIns="0" rtlCol="0" anchor="t"/>
+          <a:bodyPr wrap="square" lIns="0" tIns="0" rIns="0" bIns="0" rtlCol="0" anchor="t">
+            <a:normAutofit/>
+          </a:bodyPr>
           <a:lstStyle/>
           <a:p>
             <a:pPr indent="0" marL="0">
@@ -6304,7 +6602,7 @@
             <a:r>
               <a:rPr lang="en-US" sz="1300" dirty="0">
                 <a:solidFill>
-                  <a:srgbClr val="212121"/>
+                  <a:srgbClr val="FFFFFF"/>
                 </a:solidFill>
                 <a:latin typeface="Consolas" pitchFamily="34" charset="0"/>
                 <a:ea typeface="Consolas" pitchFamily="34" charset="-122"/>
@@ -6321,7 +6619,7 @@
             <a:r>
               <a:rPr lang="en-US" sz="1300" dirty="0">
                 <a:solidFill>
-                  <a:srgbClr val="212121"/>
+                  <a:srgbClr val="FFFFFF"/>
                 </a:solidFill>
                 <a:latin typeface="Consolas" pitchFamily="34" charset="0"/>
                 <a:ea typeface="Consolas" pitchFamily="34" charset="-122"/>
@@ -6338,7 +6636,7 @@
             <a:r>
               <a:rPr lang="en-US" sz="1300" dirty="0">
                 <a:solidFill>
-                  <a:srgbClr val="212121"/>
+                  <a:srgbClr val="FFFFFF"/>
                 </a:solidFill>
                 <a:latin typeface="Consolas" pitchFamily="34" charset="0"/>
                 <a:ea typeface="Consolas" pitchFamily="34" charset="-122"/>
@@ -6361,13 +6659,41 @@
             <a:r>
               <a:rPr lang="en-US" sz="1300" dirty="0">
                 <a:solidFill>
-                  <a:srgbClr val="212121"/>
-                </a:solidFill>
-                <a:latin typeface="Consolas" pitchFamily="34" charset="0"/>
-                <a:ea typeface="Consolas" pitchFamily="34" charset="-122"/>
-                <a:cs typeface="Consolas" pitchFamily="34" charset="-120"/>
-              </a:rPr>
-              <a:t>var endpoint = Environment.GetEnvironmentVariable("FOUNDRY_PROJECT_ENDPOINT")!;</a:t>
+                  <a:srgbClr val="FFFFFF"/>
+                </a:solidFill>
+                <a:latin typeface="Consolas" pitchFamily="34" charset="0"/>
+                <a:ea typeface="Consolas" pitchFamily="34" charset="-122"/>
+                <a:cs typeface="Consolas" pitchFamily="34" charset="-120"/>
+              </a:rPr>
+              <a:t>var endpoint = Environment.GetEnvironmentVariable(</a:t>
+            </a:r>
+            <a:pPr indent="0" marL="0">
+              <a:buNone/>
+            </a:pPr>
+            <a:r>
+              <a:rPr lang="en-US" sz="1300" dirty="0">
+                <a:solidFill>
+                  <a:srgbClr val="E4C98A"/>
+                </a:solidFill>
+                <a:latin typeface="Consolas" pitchFamily="34" charset="0"/>
+                <a:ea typeface="Consolas" pitchFamily="34" charset="-122"/>
+                <a:cs typeface="Consolas" pitchFamily="34" charset="-120"/>
+              </a:rPr>
+              <a:t>"FOUNDRY_PROJECT_ENDPOINT"</a:t>
+            </a:r>
+            <a:pPr indent="0" marL="0">
+              <a:buNone/>
+            </a:pPr>
+            <a:r>
+              <a:rPr lang="en-US" sz="1300" dirty="0">
+                <a:solidFill>
+                  <a:srgbClr val="FFFFFF"/>
+                </a:solidFill>
+                <a:latin typeface="Consolas" pitchFamily="34" charset="0"/>
+                <a:ea typeface="Consolas" pitchFamily="34" charset="-122"/>
+                <a:cs typeface="Consolas" pitchFamily="34" charset="-120"/>
+              </a:rPr>
+              <a:t>)!;</a:t>
             </a:r>
             <a:endParaRPr lang="en-US" sz="1300" dirty="0"/>
           </a:p>
@@ -6378,13 +6704,69 @@
             <a:r>
               <a:rPr lang="en-US" sz="1300" dirty="0">
                 <a:solidFill>
-                  <a:srgbClr val="212121"/>
-                </a:solidFill>
-                <a:latin typeface="Consolas" pitchFamily="34" charset="0"/>
-                <a:ea typeface="Consolas" pitchFamily="34" charset="-122"/>
-                <a:cs typeface="Consolas" pitchFamily="34" charset="-120"/>
-              </a:rPr>
-              <a:t>var model = Environment.GetEnvironmentVariable("FOUNDRY_MODEL") ?? "gpt-5.6-luna";</a:t>
+                  <a:srgbClr val="FFFFFF"/>
+                </a:solidFill>
+                <a:latin typeface="Consolas" pitchFamily="34" charset="0"/>
+                <a:ea typeface="Consolas" pitchFamily="34" charset="-122"/>
+                <a:cs typeface="Consolas" pitchFamily="34" charset="-120"/>
+              </a:rPr>
+              <a:t>var model = Environment.GetEnvironmentVariable(</a:t>
+            </a:r>
+            <a:pPr indent="0" marL="0">
+              <a:buNone/>
+            </a:pPr>
+            <a:r>
+              <a:rPr lang="en-US" sz="1300" dirty="0">
+                <a:solidFill>
+                  <a:srgbClr val="E4C98A"/>
+                </a:solidFill>
+                <a:latin typeface="Consolas" pitchFamily="34" charset="0"/>
+                <a:ea typeface="Consolas" pitchFamily="34" charset="-122"/>
+                <a:cs typeface="Consolas" pitchFamily="34" charset="-120"/>
+              </a:rPr>
+              <a:t>"FOUNDRY_MODEL"</a:t>
+            </a:r>
+            <a:pPr indent="0" marL="0">
+              <a:buNone/>
+            </a:pPr>
+            <a:r>
+              <a:rPr lang="en-US" sz="1300" dirty="0">
+                <a:solidFill>
+                  <a:srgbClr val="FFFFFF"/>
+                </a:solidFill>
+                <a:latin typeface="Consolas" pitchFamily="34" charset="0"/>
+                <a:ea typeface="Consolas" pitchFamily="34" charset="-122"/>
+                <a:cs typeface="Consolas" pitchFamily="34" charset="-120"/>
+              </a:rPr>
+              <a:t>) ?? </a:t>
+            </a:r>
+            <a:pPr indent="0" marL="0">
+              <a:buNone/>
+            </a:pPr>
+            <a:r>
+              <a:rPr lang="en-US" sz="1300" dirty="0">
+                <a:solidFill>
+                  <a:srgbClr val="E4C98A"/>
+                </a:solidFill>
+                <a:latin typeface="Consolas" pitchFamily="34" charset="0"/>
+                <a:ea typeface="Consolas" pitchFamily="34" charset="-122"/>
+                <a:cs typeface="Consolas" pitchFamily="34" charset="-120"/>
+              </a:rPr>
+              <a:t>"gpt-5.6-luna"</a:t>
+            </a:r>
+            <a:pPr indent="0" marL="0">
+              <a:buNone/>
+            </a:pPr>
+            <a:r>
+              <a:rPr lang="en-US" sz="1300" dirty="0">
+                <a:solidFill>
+                  <a:srgbClr val="FFFFFF"/>
+                </a:solidFill>
+                <a:latin typeface="Consolas" pitchFamily="34" charset="0"/>
+                <a:ea typeface="Consolas" pitchFamily="34" charset="-122"/>
+                <a:cs typeface="Consolas" pitchFamily="34" charset="-120"/>
+              </a:rPr>
+              <a:t>;</a:t>
             </a:r>
             <a:endParaRPr lang="en-US" sz="1300" dirty="0"/>
           </a:p>
@@ -6401,7 +6783,7 @@
             <a:r>
               <a:rPr lang="en-US" sz="1300" dirty="0">
                 <a:solidFill>
-                  <a:srgbClr val="212121"/>
+                  <a:srgbClr val="FFFFFF"/>
                 </a:solidFill>
                 <a:latin typeface="Consolas" pitchFamily="34" charset="0"/>
                 <a:ea typeface="Consolas" pitchFamily="34" charset="-122"/>
@@ -6418,7 +6800,7 @@
             <a:r>
               <a:rPr lang="en-US" sz="1300" dirty="0">
                 <a:solidFill>
-                  <a:srgbClr val="212121"/>
+                  <a:srgbClr val="FFFFFF"/>
                 </a:solidFill>
                 <a:latin typeface="Consolas" pitchFamily="34" charset="0"/>
                 <a:ea typeface="Consolas" pitchFamily="34" charset="-122"/>
@@ -6435,13 +6817,41 @@
             <a:r>
               <a:rPr lang="en-US" sz="1300" dirty="0">
                 <a:solidFill>
-                  <a:srgbClr val="212121"/>
-                </a:solidFill>
-                <a:latin typeface="Consolas" pitchFamily="34" charset="0"/>
-                <a:ea typeface="Consolas" pitchFamily="34" charset="-122"/>
-                <a:cs typeface="Consolas" pitchFamily="34" charset="-120"/>
-              </a:rPr>
-              <a:t>               name: "HelloAgent",</a:t>
+                  <a:srgbClr val="FFFFFF"/>
+                </a:solidFill>
+                <a:latin typeface="Consolas" pitchFamily="34" charset="0"/>
+                <a:ea typeface="Consolas" pitchFamily="34" charset="-122"/>
+                <a:cs typeface="Consolas" pitchFamily="34" charset="-120"/>
+              </a:rPr>
+              <a:t>               name: </a:t>
+            </a:r>
+            <a:pPr indent="0" marL="0">
+              <a:buNone/>
+            </a:pPr>
+            <a:r>
+              <a:rPr lang="en-US" sz="1300" dirty="0">
+                <a:solidFill>
+                  <a:srgbClr val="E4C98A"/>
+                </a:solidFill>
+                <a:latin typeface="Consolas" pitchFamily="34" charset="0"/>
+                <a:ea typeface="Consolas" pitchFamily="34" charset="-122"/>
+                <a:cs typeface="Consolas" pitchFamily="34" charset="-120"/>
+              </a:rPr>
+              <a:t>"HelloAgent"</a:t>
+            </a:r>
+            <a:pPr indent="0" marL="0">
+              <a:buNone/>
+            </a:pPr>
+            <a:r>
+              <a:rPr lang="en-US" sz="1300" dirty="0">
+                <a:solidFill>
+                  <a:srgbClr val="FFFFFF"/>
+                </a:solidFill>
+                <a:latin typeface="Consolas" pitchFamily="34" charset="0"/>
+                <a:ea typeface="Consolas" pitchFamily="34" charset="-122"/>
+                <a:cs typeface="Consolas" pitchFamily="34" charset="-120"/>
+              </a:rPr>
+              <a:t>,</a:t>
             </a:r>
             <a:endParaRPr lang="en-US" sz="1300" dirty="0"/>
           </a:p>
@@ -6452,13 +6862,41 @@
             <a:r>
               <a:rPr lang="en-US" sz="1300" dirty="0">
                 <a:solidFill>
-                  <a:srgbClr val="212121"/>
-                </a:solidFill>
-                <a:latin typeface="Consolas" pitchFamily="34" charset="0"/>
-                <a:ea typeface="Consolas" pitchFamily="34" charset="-122"/>
-                <a:cs typeface="Consolas" pitchFamily="34" charset="-120"/>
-              </a:rPr>
-              <a:t>               instructions: "You are a friendly assistant. Keep answers brief.");</a:t>
+                  <a:srgbClr val="FFFFFF"/>
+                </a:solidFill>
+                <a:latin typeface="Consolas" pitchFamily="34" charset="0"/>
+                <a:ea typeface="Consolas" pitchFamily="34" charset="-122"/>
+                <a:cs typeface="Consolas" pitchFamily="34" charset="-120"/>
+              </a:rPr>
+              <a:t>               instructions: </a:t>
+            </a:r>
+            <a:pPr indent="0" marL="0">
+              <a:buNone/>
+            </a:pPr>
+            <a:r>
+              <a:rPr lang="en-US" sz="1300" dirty="0">
+                <a:solidFill>
+                  <a:srgbClr val="E4C98A"/>
+                </a:solidFill>
+                <a:latin typeface="Consolas" pitchFamily="34" charset="0"/>
+                <a:ea typeface="Consolas" pitchFamily="34" charset="-122"/>
+                <a:cs typeface="Consolas" pitchFamily="34" charset="-120"/>
+              </a:rPr>
+              <a:t>"You are a friendly assistant. Keep answers brief."</a:t>
+            </a:r>
+            <a:pPr indent="0" marL="0">
+              <a:buNone/>
+            </a:pPr>
+            <a:r>
+              <a:rPr lang="en-US" sz="1300" dirty="0">
+                <a:solidFill>
+                  <a:srgbClr val="FFFFFF"/>
+                </a:solidFill>
+                <a:latin typeface="Consolas" pitchFamily="34" charset="0"/>
+                <a:ea typeface="Consolas" pitchFamily="34" charset="-122"/>
+                <a:cs typeface="Consolas" pitchFamily="34" charset="-120"/>
+              </a:rPr>
+              <a:t>);</a:t>
             </a:r>
             <a:endParaRPr lang="en-US" sz="1300" dirty="0"/>
           </a:p>
@@ -6475,13 +6913,69 @@
             <a:r>
               <a:rPr lang="en-US" sz="1300" dirty="0">
                 <a:solidFill>
-                  <a:srgbClr val="212121"/>
-                </a:solidFill>
-                <a:latin typeface="Consolas" pitchFamily="34" charset="0"/>
-                <a:ea typeface="Consolas" pitchFamily="34" charset="-122"/>
-                <a:cs typeface="Consolas" pitchFamily="34" charset="-120"/>
-              </a:rPr>
-              <a:t>Console.WriteLine(await agent.RunAsync("What is the capital of France?"));</a:t>
+                  <a:srgbClr val="FFFFFF"/>
+                </a:solidFill>
+                <a:latin typeface="Consolas" pitchFamily="34" charset="0"/>
+                <a:ea typeface="Consolas" pitchFamily="34" charset="-122"/>
+                <a:cs typeface="Consolas" pitchFamily="34" charset="-120"/>
+              </a:rPr>
+              <a:t>Console.WriteLine(</a:t>
+            </a:r>
+            <a:pPr indent="0" marL="0">
+              <a:buNone/>
+            </a:pPr>
+            <a:r>
+              <a:rPr lang="en-US" sz="1300" dirty="0">
+                <a:solidFill>
+                  <a:srgbClr val="A996B6"/>
+                </a:solidFill>
+                <a:latin typeface="Consolas" pitchFamily="34" charset="0"/>
+                <a:ea typeface="Consolas" pitchFamily="34" charset="-122"/>
+                <a:cs typeface="Consolas" pitchFamily="34" charset="-120"/>
+              </a:rPr>
+              <a:t>await</a:t>
+            </a:r>
+            <a:pPr indent="0" marL="0">
+              <a:buNone/>
+            </a:pPr>
+            <a:r>
+              <a:rPr lang="en-US" sz="1300" dirty="0">
+                <a:solidFill>
+                  <a:srgbClr val="FFFFFF"/>
+                </a:solidFill>
+                <a:latin typeface="Consolas" pitchFamily="34" charset="0"/>
+                <a:ea typeface="Consolas" pitchFamily="34" charset="-122"/>
+                <a:cs typeface="Consolas" pitchFamily="34" charset="-120"/>
+              </a:rPr>
+              <a:t> agent.RunAsync(</a:t>
+            </a:r>
+            <a:pPr indent="0" marL="0">
+              <a:buNone/>
+            </a:pPr>
+            <a:r>
+              <a:rPr lang="en-US" sz="1300" dirty="0">
+                <a:solidFill>
+                  <a:srgbClr val="E4C98A"/>
+                </a:solidFill>
+                <a:latin typeface="Consolas" pitchFamily="34" charset="0"/>
+                <a:ea typeface="Consolas" pitchFamily="34" charset="-122"/>
+                <a:cs typeface="Consolas" pitchFamily="34" charset="-120"/>
+              </a:rPr>
+              <a:t>"What is the capital of France?"</a:t>
+            </a:r>
+            <a:pPr indent="0" marL="0">
+              <a:buNone/>
+            </a:pPr>
+            <a:r>
+              <a:rPr lang="en-US" sz="1300" dirty="0">
+                <a:solidFill>
+                  <a:srgbClr val="FFFFFF"/>
+                </a:solidFill>
+                <a:latin typeface="Consolas" pitchFamily="34" charset="0"/>
+                <a:ea typeface="Consolas" pitchFamily="34" charset="-122"/>
+                <a:cs typeface="Consolas" pitchFamily="34" charset="-120"/>
+              </a:rPr>
+              <a:t>));</a:t>
             </a:r>
             <a:endParaRPr lang="en-US" sz="1300" dirty="0"/>
           </a:p>
@@ -6632,11 +7126,11 @@
             <a:avLst/>
           </a:prstGeom>
           <a:solidFill>
-            <a:srgbClr val="F3F4F6"/>
+            <a:srgbClr val="1D1E22"/>
           </a:solidFill>
-          <a:ln w="6350">
+          <a:ln w="9525">
             <a:solidFill>
-              <a:srgbClr val="D1D5DB"/>
+              <a:srgbClr val="2A2B2E"/>
             </a:solidFill>
             <a:prstDash val="solid"/>
           </a:ln>
@@ -6660,22 +7154,97 @@
           <a:ln/>
         </p:spPr>
         <p:txBody>
-          <a:bodyPr wrap="square" lIns="0" tIns="0" rIns="0" bIns="0" rtlCol="0" anchor="t"/>
+          <a:bodyPr wrap="square" lIns="0" tIns="0" rIns="0" bIns="0" rtlCol="0" anchor="t">
+            <a:normAutofit/>
+          </a:bodyPr>
           <a:lstStyle/>
           <a:p>
             <a:pPr indent="0" marL="0">
               <a:buNone/>
             </a:pPr>
             <a:r>
+              <a:rPr lang="en-US" sz="1200" i="1" dirty="0">
+                <a:solidFill>
+                  <a:srgbClr val="666666"/>
+                </a:solidFill>
+                <a:latin typeface="Consolas" pitchFamily="34" charset="0"/>
+                <a:ea typeface="Consolas" pitchFamily="34" charset="-122"/>
+                <a:cs typeface="Consolas" pitchFamily="34" charset="-120"/>
+              </a:rPr>
+              <a:t># Python</a:t>
+            </a:r>
+            <a:endParaRPr lang="en-US" sz="1200" dirty="0"/>
+          </a:p>
+          <a:p>
+            <a:pPr indent="0" marL="0">
+              <a:buNone/>
+            </a:pPr>
+            <a:r>
               <a:rPr lang="en-US" sz="1200" dirty="0">
                 <a:solidFill>
-                  <a:srgbClr val="212121"/>
-                </a:solidFill>
-                <a:latin typeface="Consolas" pitchFamily="34" charset="0"/>
-                <a:ea typeface="Consolas" pitchFamily="34" charset="-122"/>
-                <a:cs typeface="Consolas" pitchFamily="34" charset="-120"/>
-              </a:rPr>
-              <a:t># Python</a:t>
+                  <a:srgbClr val="FFFFFF"/>
+                </a:solidFill>
+                <a:latin typeface="Consolas" pitchFamily="34" charset="0"/>
+                <a:ea typeface="Consolas" pitchFamily="34" charset="-122"/>
+                <a:cs typeface="Consolas" pitchFamily="34" charset="-120"/>
+              </a:rPr>
+              <a:t>result = </a:t>
+            </a:r>
+            <a:pPr indent="0" marL="0">
+              <a:buNone/>
+            </a:pPr>
+            <a:r>
+              <a:rPr lang="en-US" sz="1200" dirty="0">
+                <a:solidFill>
+                  <a:srgbClr val="A996B6"/>
+                </a:solidFill>
+                <a:latin typeface="Consolas" pitchFamily="34" charset="0"/>
+                <a:ea typeface="Consolas" pitchFamily="34" charset="-122"/>
+                <a:cs typeface="Consolas" pitchFamily="34" charset="-120"/>
+              </a:rPr>
+              <a:t>await</a:t>
+            </a:r>
+            <a:pPr indent="0" marL="0">
+              <a:buNone/>
+            </a:pPr>
+            <a:r>
+              <a:rPr lang="en-US" sz="1200" dirty="0">
+                <a:solidFill>
+                  <a:srgbClr val="FFFFFF"/>
+                </a:solidFill>
+                <a:latin typeface="Consolas" pitchFamily="34" charset="0"/>
+                <a:ea typeface="Consolas" pitchFamily="34" charset="-122"/>
+                <a:cs typeface="Consolas" pitchFamily="34" charset="-120"/>
+              </a:rPr>
+              <a:t> agent.run(</a:t>
+            </a:r>
+            <a:pPr indent="0" marL="0">
+              <a:buNone/>
+            </a:pPr>
+            <a:r>
+              <a:rPr lang="en-US" sz="1200" dirty="0">
+                <a:solidFill>
+                  <a:srgbClr val="E4C98A"/>
+                </a:solidFill>
+                <a:latin typeface="Consolas" pitchFamily="34" charset="0"/>
+                <a:ea typeface="Consolas" pitchFamily="34" charset="-122"/>
+                <a:cs typeface="Consolas" pitchFamily="34" charset="-120"/>
+              </a:rPr>
+              <a:t>"Tell me a fun fact."</a:t>
+            </a:r>
+            <a:pPr indent="0" marL="0">
+              <a:buNone/>
+            </a:pPr>
+            <a:r>
+              <a:rPr lang="en-US" sz="1200" dirty="0">
+                <a:solidFill>
+                  <a:srgbClr val="FFFFFF"/>
+                </a:solidFill>
+                <a:latin typeface="Consolas" pitchFamily="34" charset="0"/>
+                <a:ea typeface="Consolas" pitchFamily="34" charset="-122"/>
+                <a:cs typeface="Consolas" pitchFamily="34" charset="-120"/>
+              </a:rPr>
+              <a:t>)</a:t>
             </a:r>
             <a:endParaRPr lang="en-US" sz="1200" dirty="0"/>
           </a:p>
@@ -6686,13 +7255,13 @@
             <a:r>
               <a:rPr lang="en-US" sz="1200" dirty="0">
                 <a:solidFill>
-                  <a:srgbClr val="212121"/>
-                </a:solidFill>
-                <a:latin typeface="Consolas" pitchFamily="34" charset="0"/>
-                <a:ea typeface="Consolas" pitchFamily="34" charset="-122"/>
-                <a:cs typeface="Consolas" pitchFamily="34" charset="-120"/>
-              </a:rPr>
-              <a:t>result = await agent.run("Tell me a fun fact.")</a:t>
+                  <a:srgbClr val="FFFFFF"/>
+                </a:solidFill>
+                <a:latin typeface="Consolas" pitchFamily="34" charset="0"/>
+                <a:ea typeface="Consolas" pitchFamily="34" charset="-122"/>
+                <a:cs typeface="Consolas" pitchFamily="34" charset="-120"/>
+              </a:rPr>
+              <a:t>print(result)</a:t>
             </a:r>
             <a:endParaRPr lang="en-US" sz="1200" dirty="0"/>
           </a:p>
@@ -6700,16 +7269,148 @@
             <a:pPr indent="0" marL="0">
               <a:buNone/>
             </a:pPr>
+            <a:endParaRPr lang="en-US" sz="1200" dirty="0"/>
+          </a:p>
+          <a:p>
+            <a:pPr indent="0" marL="0">
+              <a:buNone/>
+            </a:pPr>
             <a:r>
               <a:rPr lang="en-US" sz="1200" dirty="0">
                 <a:solidFill>
-                  <a:srgbClr val="212121"/>
-                </a:solidFill>
-                <a:latin typeface="Consolas" pitchFamily="34" charset="0"/>
-                <a:ea typeface="Consolas" pitchFamily="34" charset="-122"/>
-                <a:cs typeface="Consolas" pitchFamily="34" charset="-120"/>
-              </a:rPr>
-              <a:t>print(result)</a:t>
+                  <a:srgbClr val="A996B6"/>
+                </a:solidFill>
+                <a:latin typeface="Consolas" pitchFamily="34" charset="0"/>
+                <a:ea typeface="Consolas" pitchFamily="34" charset="-122"/>
+                <a:cs typeface="Consolas" pitchFamily="34" charset="-120"/>
+              </a:rPr>
+              <a:t>async</a:t>
+            </a:r>
+            <a:pPr indent="0" marL="0">
+              <a:buNone/>
+            </a:pPr>
+            <a:r>
+              <a:rPr lang="en-US" sz="1200" dirty="0">
+                <a:solidFill>
+                  <a:srgbClr val="FFFFFF"/>
+                </a:solidFill>
+                <a:latin typeface="Consolas" pitchFamily="34" charset="0"/>
+                <a:ea typeface="Consolas" pitchFamily="34" charset="-122"/>
+                <a:cs typeface="Consolas" pitchFamily="34" charset="-120"/>
+              </a:rPr>
+              <a:t> </a:t>
+            </a:r>
+            <a:pPr indent="0" marL="0">
+              <a:buNone/>
+            </a:pPr>
+            <a:r>
+              <a:rPr lang="en-US" sz="1200" dirty="0">
+                <a:solidFill>
+                  <a:srgbClr val="A996B6"/>
+                </a:solidFill>
+                <a:latin typeface="Consolas" pitchFamily="34" charset="0"/>
+                <a:ea typeface="Consolas" pitchFamily="34" charset="-122"/>
+                <a:cs typeface="Consolas" pitchFamily="34" charset="-120"/>
+              </a:rPr>
+              <a:t>for</a:t>
+            </a:r>
+            <a:pPr indent="0" marL="0">
+              <a:buNone/>
+            </a:pPr>
+            <a:r>
+              <a:rPr lang="en-US" sz="1200" dirty="0">
+                <a:solidFill>
+                  <a:srgbClr val="FFFFFF"/>
+                </a:solidFill>
+                <a:latin typeface="Consolas" pitchFamily="34" charset="0"/>
+                <a:ea typeface="Consolas" pitchFamily="34" charset="-122"/>
+                <a:cs typeface="Consolas" pitchFamily="34" charset="-120"/>
+              </a:rPr>
+              <a:t> chunk </a:t>
+            </a:r>
+            <a:pPr indent="0" marL="0">
+              <a:buNone/>
+            </a:pPr>
+            <a:r>
+              <a:rPr lang="en-US" sz="1200" dirty="0">
+                <a:solidFill>
+                  <a:srgbClr val="A996B6"/>
+                </a:solidFill>
+                <a:latin typeface="Consolas" pitchFamily="34" charset="0"/>
+                <a:ea typeface="Consolas" pitchFamily="34" charset="-122"/>
+                <a:cs typeface="Consolas" pitchFamily="34" charset="-120"/>
+              </a:rPr>
+              <a:t>in</a:t>
+            </a:r>
+            <a:pPr indent="0" marL="0">
+              <a:buNone/>
+            </a:pPr>
+            <a:r>
+              <a:rPr lang="en-US" sz="1200" dirty="0">
+                <a:solidFill>
+                  <a:srgbClr val="FFFFFF"/>
+                </a:solidFill>
+                <a:latin typeface="Consolas" pitchFamily="34" charset="0"/>
+                <a:ea typeface="Consolas" pitchFamily="34" charset="-122"/>
+                <a:cs typeface="Consolas" pitchFamily="34" charset="-120"/>
+              </a:rPr>
+              <a:t> agent.run(</a:t>
+            </a:r>
+            <a:pPr indent="0" marL="0">
+              <a:buNone/>
+            </a:pPr>
+            <a:r>
+              <a:rPr lang="en-US" sz="1200" dirty="0">
+                <a:solidFill>
+                  <a:srgbClr val="E4C98A"/>
+                </a:solidFill>
+                <a:latin typeface="Consolas" pitchFamily="34" charset="0"/>
+                <a:ea typeface="Consolas" pitchFamily="34" charset="-122"/>
+                <a:cs typeface="Consolas" pitchFamily="34" charset="-120"/>
+              </a:rPr>
+              <a:t>"Tell me a fun fact."</a:t>
+            </a:r>
+            <a:pPr indent="0" marL="0">
+              <a:buNone/>
+            </a:pPr>
+            <a:r>
+              <a:rPr lang="en-US" sz="1200" dirty="0">
+                <a:solidFill>
+                  <a:srgbClr val="FFFFFF"/>
+                </a:solidFill>
+                <a:latin typeface="Consolas" pitchFamily="34" charset="0"/>
+                <a:ea typeface="Consolas" pitchFamily="34" charset="-122"/>
+                <a:cs typeface="Consolas" pitchFamily="34" charset="-120"/>
+              </a:rPr>
+              <a:t>, stream=</a:t>
+            </a:r>
+            <a:pPr indent="0" marL="0">
+              <a:buNone/>
+            </a:pPr>
+            <a:r>
+              <a:rPr lang="en-US" sz="1200" dirty="0">
+                <a:solidFill>
+                  <a:srgbClr val="A996B6"/>
+                </a:solidFill>
+                <a:latin typeface="Consolas" pitchFamily="34" charset="0"/>
+                <a:ea typeface="Consolas" pitchFamily="34" charset="-122"/>
+                <a:cs typeface="Consolas" pitchFamily="34" charset="-120"/>
+              </a:rPr>
+              <a:t>True</a:t>
+            </a:r>
+            <a:pPr indent="0" marL="0">
+              <a:buNone/>
+            </a:pPr>
+            <a:r>
+              <a:rPr lang="en-US" sz="1200" dirty="0">
+                <a:solidFill>
+                  <a:srgbClr val="FFFFFF"/>
+                </a:solidFill>
+                <a:latin typeface="Consolas" pitchFamily="34" charset="0"/>
+                <a:ea typeface="Consolas" pitchFamily="34" charset="-122"/>
+                <a:cs typeface="Consolas" pitchFamily="34" charset="-120"/>
+              </a:rPr>
+              <a:t>):</a:t>
             </a:r>
             <a:endParaRPr lang="en-US" sz="1200" dirty="0"/>
           </a:p>
@@ -6717,6 +7418,45 @@
             <a:pPr indent="0" marL="0">
               <a:buNone/>
             </a:pPr>
+            <a:r>
+              <a:rPr lang="en-US" sz="1200" dirty="0">
+                <a:solidFill>
+                  <a:srgbClr val="FFFFFF"/>
+                </a:solidFill>
+                <a:latin typeface="Consolas" pitchFamily="34" charset="0"/>
+                <a:ea typeface="Consolas" pitchFamily="34" charset="-122"/>
+                <a:cs typeface="Consolas" pitchFamily="34" charset="-120"/>
+              </a:rPr>
+              <a:t>    </a:t>
+            </a:r>
+            <a:pPr indent="0" marL="0">
+              <a:buNone/>
+            </a:pPr>
+            <a:r>
+              <a:rPr lang="en-US" sz="1200" dirty="0">
+                <a:solidFill>
+                  <a:srgbClr val="A996B6"/>
+                </a:solidFill>
+                <a:latin typeface="Consolas" pitchFamily="34" charset="0"/>
+                <a:ea typeface="Consolas" pitchFamily="34" charset="-122"/>
+                <a:cs typeface="Consolas" pitchFamily="34" charset="-120"/>
+              </a:rPr>
+              <a:t>if</a:t>
+            </a:r>
+            <a:pPr indent="0" marL="0">
+              <a:buNone/>
+            </a:pPr>
+            <a:r>
+              <a:rPr lang="en-US" sz="1200" dirty="0">
+                <a:solidFill>
+                  <a:srgbClr val="FFFFFF"/>
+                </a:solidFill>
+                <a:latin typeface="Consolas" pitchFamily="34" charset="0"/>
+                <a:ea typeface="Consolas" pitchFamily="34" charset="-122"/>
+                <a:cs typeface="Consolas" pitchFamily="34" charset="-120"/>
+              </a:rPr>
+              <a:t> chunk.text:</a:t>
+            </a:r>
             <a:endParaRPr lang="en-US" sz="1200" dirty="0"/>
           </a:p>
           <a:p>
@@ -6726,13 +7466,69 @@
             <a:r>
               <a:rPr lang="en-US" sz="1200" dirty="0">
                 <a:solidFill>
-                  <a:srgbClr val="212121"/>
-                </a:solidFill>
-                <a:latin typeface="Consolas" pitchFamily="34" charset="0"/>
-                <a:ea typeface="Consolas" pitchFamily="34" charset="-122"/>
-                <a:cs typeface="Consolas" pitchFamily="34" charset="-120"/>
-              </a:rPr>
-              <a:t>async for chunk in agent.run("Tell me a fun fact.", stream=True):</a:t>
+                  <a:srgbClr val="FFFFFF"/>
+                </a:solidFill>
+                <a:latin typeface="Consolas" pitchFamily="34" charset="0"/>
+                <a:ea typeface="Consolas" pitchFamily="34" charset="-122"/>
+                <a:cs typeface="Consolas" pitchFamily="34" charset="-120"/>
+              </a:rPr>
+              <a:t>        print(chunk.text, end=</a:t>
+            </a:r>
+            <a:pPr indent="0" marL="0">
+              <a:buNone/>
+            </a:pPr>
+            <a:r>
+              <a:rPr lang="en-US" sz="1200" dirty="0">
+                <a:solidFill>
+                  <a:srgbClr val="E4C98A"/>
+                </a:solidFill>
+                <a:latin typeface="Consolas" pitchFamily="34" charset="0"/>
+                <a:ea typeface="Consolas" pitchFamily="34" charset="-122"/>
+                <a:cs typeface="Consolas" pitchFamily="34" charset="-120"/>
+              </a:rPr>
+              <a:t>""</a:t>
+            </a:r>
+            <a:pPr indent="0" marL="0">
+              <a:buNone/>
+            </a:pPr>
+            <a:r>
+              <a:rPr lang="en-US" sz="1200" dirty="0">
+                <a:solidFill>
+                  <a:srgbClr val="FFFFFF"/>
+                </a:solidFill>
+                <a:latin typeface="Consolas" pitchFamily="34" charset="0"/>
+                <a:ea typeface="Consolas" pitchFamily="34" charset="-122"/>
+                <a:cs typeface="Consolas" pitchFamily="34" charset="-120"/>
+              </a:rPr>
+              <a:t>, flush=</a:t>
+            </a:r>
+            <a:pPr indent="0" marL="0">
+              <a:buNone/>
+            </a:pPr>
+            <a:r>
+              <a:rPr lang="en-US" sz="1200" dirty="0">
+                <a:solidFill>
+                  <a:srgbClr val="A996B6"/>
+                </a:solidFill>
+                <a:latin typeface="Consolas" pitchFamily="34" charset="0"/>
+                <a:ea typeface="Consolas" pitchFamily="34" charset="-122"/>
+                <a:cs typeface="Consolas" pitchFamily="34" charset="-120"/>
+              </a:rPr>
+              <a:t>True</a:t>
+            </a:r>
+            <a:pPr indent="0" marL="0">
+              <a:buNone/>
+            </a:pPr>
+            <a:r>
+              <a:rPr lang="en-US" sz="1200" dirty="0">
+                <a:solidFill>
+                  <a:srgbClr val="FFFFFF"/>
+                </a:solidFill>
+                <a:latin typeface="Consolas" pitchFamily="34" charset="0"/>
+                <a:ea typeface="Consolas" pitchFamily="34" charset="-122"/>
+                <a:cs typeface="Consolas" pitchFamily="34" charset="-120"/>
+              </a:rPr>
+              <a:t>)</a:t>
             </a:r>
             <a:endParaRPr lang="en-US" sz="1200" dirty="0"/>
           </a:p>
@@ -6740,16 +7536,36 @@
             <a:pPr indent="0" marL="0">
               <a:buNone/>
             </a:pPr>
+            <a:endParaRPr lang="en-US" sz="1200" dirty="0"/>
+          </a:p>
+          <a:p>
+            <a:pPr indent="0" marL="0">
+              <a:buNone/>
+            </a:pPr>
             <a:r>
               <a:rPr lang="en-US" sz="1200" dirty="0">
                 <a:solidFill>
-                  <a:srgbClr val="212121"/>
-                </a:solidFill>
-                <a:latin typeface="Consolas" pitchFamily="34" charset="0"/>
-                <a:ea typeface="Consolas" pitchFamily="34" charset="-122"/>
-                <a:cs typeface="Consolas" pitchFamily="34" charset="-120"/>
-              </a:rPr>
-              <a:t>    if chunk.text:</a:t>
+                  <a:srgbClr val="FFFFFF"/>
+                </a:solidFill>
+                <a:latin typeface="Consolas" pitchFamily="34" charset="0"/>
+                <a:ea typeface="Consolas" pitchFamily="34" charset="-122"/>
+                <a:cs typeface="Consolas" pitchFamily="34" charset="-120"/>
+              </a:rPr>
+              <a:t>// C</a:t>
+            </a:r>
+            <a:pPr indent="0" marL="0">
+              <a:buNone/>
+            </a:pPr>
+            <a:r>
+              <a:rPr lang="en-US" sz="1200" i="1" dirty="0">
+                <a:solidFill>
+                  <a:srgbClr val="666666"/>
+                </a:solidFill>
+                <a:latin typeface="Consolas" pitchFamily="34" charset="0"/>
+                <a:ea typeface="Consolas" pitchFamily="34" charset="-122"/>
+                <a:cs typeface="Consolas" pitchFamily="34" charset="-120"/>
+              </a:rPr>
+              <a:t>#</a:t>
             </a:r>
             <a:endParaRPr lang="en-US" sz="1200" dirty="0"/>
           </a:p>
@@ -6760,13 +7576,69 @@
             <a:r>
               <a:rPr lang="en-US" sz="1200" dirty="0">
                 <a:solidFill>
-                  <a:srgbClr val="212121"/>
-                </a:solidFill>
-                <a:latin typeface="Consolas" pitchFamily="34" charset="0"/>
-                <a:ea typeface="Consolas" pitchFamily="34" charset="-122"/>
-                <a:cs typeface="Consolas" pitchFamily="34" charset="-120"/>
-              </a:rPr>
-              <a:t>        print(chunk.text, end="", flush=True)</a:t>
+                  <a:srgbClr val="FFFFFF"/>
+                </a:solidFill>
+                <a:latin typeface="Consolas" pitchFamily="34" charset="0"/>
+                <a:ea typeface="Consolas" pitchFamily="34" charset="-122"/>
+                <a:cs typeface="Consolas" pitchFamily="34" charset="-120"/>
+              </a:rPr>
+              <a:t>Console.WriteLine(</a:t>
+            </a:r>
+            <a:pPr indent="0" marL="0">
+              <a:buNone/>
+            </a:pPr>
+            <a:r>
+              <a:rPr lang="en-US" sz="1200" dirty="0">
+                <a:solidFill>
+                  <a:srgbClr val="A996B6"/>
+                </a:solidFill>
+                <a:latin typeface="Consolas" pitchFamily="34" charset="0"/>
+                <a:ea typeface="Consolas" pitchFamily="34" charset="-122"/>
+                <a:cs typeface="Consolas" pitchFamily="34" charset="-120"/>
+              </a:rPr>
+              <a:t>await</a:t>
+            </a:r>
+            <a:pPr indent="0" marL="0">
+              <a:buNone/>
+            </a:pPr>
+            <a:r>
+              <a:rPr lang="en-US" sz="1200" dirty="0">
+                <a:solidFill>
+                  <a:srgbClr val="FFFFFF"/>
+                </a:solidFill>
+                <a:latin typeface="Consolas" pitchFamily="34" charset="0"/>
+                <a:ea typeface="Consolas" pitchFamily="34" charset="-122"/>
+                <a:cs typeface="Consolas" pitchFamily="34" charset="-120"/>
+              </a:rPr>
+              <a:t> agent.RunAsync(</a:t>
+            </a:r>
+            <a:pPr indent="0" marL="0">
+              <a:buNone/>
+            </a:pPr>
+            <a:r>
+              <a:rPr lang="en-US" sz="1200" dirty="0">
+                <a:solidFill>
+                  <a:srgbClr val="E4C98A"/>
+                </a:solidFill>
+                <a:latin typeface="Consolas" pitchFamily="34" charset="0"/>
+                <a:ea typeface="Consolas" pitchFamily="34" charset="-122"/>
+                <a:cs typeface="Consolas" pitchFamily="34" charset="-120"/>
+              </a:rPr>
+              <a:t>"Tell me a fun fact."</a:t>
+            </a:r>
+            <a:pPr indent="0" marL="0">
+              <a:buNone/>
+            </a:pPr>
+            <a:r>
+              <a:rPr lang="en-US" sz="1200" dirty="0">
+                <a:solidFill>
+                  <a:srgbClr val="FFFFFF"/>
+                </a:solidFill>
+                <a:latin typeface="Consolas" pitchFamily="34" charset="0"/>
+                <a:ea typeface="Consolas" pitchFamily="34" charset="-122"/>
+                <a:cs typeface="Consolas" pitchFamily="34" charset="-120"/>
+              </a:rPr>
+              <a:t>));</a:t>
             </a:r>
             <a:endParaRPr lang="en-US" sz="1200" dirty="0"/>
           </a:p>
@@ -6783,13 +7655,83 @@
             <a:r>
               <a:rPr lang="en-US" sz="1200" dirty="0">
                 <a:solidFill>
-                  <a:srgbClr val="212121"/>
-                </a:solidFill>
-                <a:latin typeface="Consolas" pitchFamily="34" charset="0"/>
-                <a:ea typeface="Consolas" pitchFamily="34" charset="-122"/>
-                <a:cs typeface="Consolas" pitchFamily="34" charset="-120"/>
-              </a:rPr>
-              <a:t>// C#</a:t>
+                  <a:srgbClr val="A996B6"/>
+                </a:solidFill>
+                <a:latin typeface="Consolas" pitchFamily="34" charset="0"/>
+                <a:ea typeface="Consolas" pitchFamily="34" charset="-122"/>
+                <a:cs typeface="Consolas" pitchFamily="34" charset="-120"/>
+              </a:rPr>
+              <a:t>await</a:t>
+            </a:r>
+            <a:pPr indent="0" marL="0">
+              <a:buNone/>
+            </a:pPr>
+            <a:r>
+              <a:rPr lang="en-US" sz="1200" dirty="0">
+                <a:solidFill>
+                  <a:srgbClr val="FFFFFF"/>
+                </a:solidFill>
+                <a:latin typeface="Consolas" pitchFamily="34" charset="0"/>
+                <a:ea typeface="Consolas" pitchFamily="34" charset="-122"/>
+                <a:cs typeface="Consolas" pitchFamily="34" charset="-120"/>
+              </a:rPr>
+              <a:t> foreach (var update </a:t>
+            </a:r>
+            <a:pPr indent="0" marL="0">
+              <a:buNone/>
+            </a:pPr>
+            <a:r>
+              <a:rPr lang="en-US" sz="1200" dirty="0">
+                <a:solidFill>
+                  <a:srgbClr val="A996B6"/>
+                </a:solidFill>
+                <a:latin typeface="Consolas" pitchFamily="34" charset="0"/>
+                <a:ea typeface="Consolas" pitchFamily="34" charset="-122"/>
+                <a:cs typeface="Consolas" pitchFamily="34" charset="-120"/>
+              </a:rPr>
+              <a:t>in</a:t>
+            </a:r>
+            <a:pPr indent="0" marL="0">
+              <a:buNone/>
+            </a:pPr>
+            <a:r>
+              <a:rPr lang="en-US" sz="1200" dirty="0">
+                <a:solidFill>
+                  <a:srgbClr val="FFFFFF"/>
+                </a:solidFill>
+                <a:latin typeface="Consolas" pitchFamily="34" charset="0"/>
+                <a:ea typeface="Consolas" pitchFamily="34" charset="-122"/>
+                <a:cs typeface="Consolas" pitchFamily="34" charset="-120"/>
+              </a:rPr>
+              <a:t> agent.RunStreamingAsync(</a:t>
+            </a:r>
+            <a:pPr indent="0" marL="0">
+              <a:buNone/>
+            </a:pPr>
+            <a:r>
+              <a:rPr lang="en-US" sz="1200" dirty="0">
+                <a:solidFill>
+                  <a:srgbClr val="E4C98A"/>
+                </a:solidFill>
+                <a:latin typeface="Consolas" pitchFamily="34" charset="0"/>
+                <a:ea typeface="Consolas" pitchFamily="34" charset="-122"/>
+                <a:cs typeface="Consolas" pitchFamily="34" charset="-120"/>
+              </a:rPr>
+              <a:t>"Tell me a fun fact."</a:t>
+            </a:r>
+            <a:pPr indent="0" marL="0">
+              <a:buNone/>
+            </a:pPr>
+            <a:r>
+              <a:rPr lang="en-US" sz="1200" dirty="0">
+                <a:solidFill>
+                  <a:srgbClr val="FFFFFF"/>
+                </a:solidFill>
+                <a:latin typeface="Consolas" pitchFamily="34" charset="0"/>
+                <a:ea typeface="Consolas" pitchFamily="34" charset="-122"/>
+                <a:cs typeface="Consolas" pitchFamily="34" charset="-120"/>
+              </a:rPr>
+              <a:t>))</a:t>
             </a:r>
             <a:endParaRPr lang="en-US" sz="1200" dirty="0"/>
           </a:p>
@@ -6800,13 +7742,13 @@
             <a:r>
               <a:rPr lang="en-US" sz="1200" dirty="0">
                 <a:solidFill>
-                  <a:srgbClr val="212121"/>
-                </a:solidFill>
-                <a:latin typeface="Consolas" pitchFamily="34" charset="0"/>
-                <a:ea typeface="Consolas" pitchFamily="34" charset="-122"/>
-                <a:cs typeface="Consolas" pitchFamily="34" charset="-120"/>
-              </a:rPr>
-              <a:t>Console.WriteLine(await agent.RunAsync("Tell me a fun fact."));</a:t>
+                  <a:srgbClr val="FFFFFF"/>
+                </a:solidFill>
+                <a:latin typeface="Consolas" pitchFamily="34" charset="0"/>
+                <a:ea typeface="Consolas" pitchFamily="34" charset="-122"/>
+                <a:cs typeface="Consolas" pitchFamily="34" charset="-120"/>
+              </a:rPr>
+              <a:t>{</a:t>
             </a:r>
             <a:endParaRPr lang="en-US" sz="1200" dirty="0"/>
           </a:p>
@@ -6814,6 +7756,17 @@
             <a:pPr indent="0" marL="0">
               <a:buNone/>
             </a:pPr>
+            <a:r>
+              <a:rPr lang="en-US" sz="1200" dirty="0">
+                <a:solidFill>
+                  <a:srgbClr val="FFFFFF"/>
+                </a:solidFill>
+                <a:latin typeface="Consolas" pitchFamily="34" charset="0"/>
+                <a:ea typeface="Consolas" pitchFamily="34" charset="-122"/>
+                <a:cs typeface="Consolas" pitchFamily="34" charset="-120"/>
+              </a:rPr>
+              <a:t>    Console.Write(update);</a:t>
+            </a:r>
             <a:endParaRPr lang="en-US" sz="1200" dirty="0"/>
           </a:p>
           <a:p>
@@ -6823,58 +7776,7 @@
             <a:r>
               <a:rPr lang="en-US" sz="1200" dirty="0">
                 <a:solidFill>
-                  <a:srgbClr val="212121"/>
-                </a:solidFill>
-                <a:latin typeface="Consolas" pitchFamily="34" charset="0"/>
-                <a:ea typeface="Consolas" pitchFamily="34" charset="-122"/>
-                <a:cs typeface="Consolas" pitchFamily="34" charset="-120"/>
-              </a:rPr>
-              <a:t>await foreach (var update in agent.RunStreamingAsync("Tell me a fun fact."))</a:t>
-            </a:r>
-            <a:endParaRPr lang="en-US" sz="1200" dirty="0"/>
-          </a:p>
-          <a:p>
-            <a:pPr indent="0" marL="0">
-              <a:buNone/>
-            </a:pPr>
-            <a:r>
-              <a:rPr lang="en-US" sz="1200" dirty="0">
-                <a:solidFill>
-                  <a:srgbClr val="212121"/>
-                </a:solidFill>
-                <a:latin typeface="Consolas" pitchFamily="34" charset="0"/>
-                <a:ea typeface="Consolas" pitchFamily="34" charset="-122"/>
-                <a:cs typeface="Consolas" pitchFamily="34" charset="-120"/>
-              </a:rPr>
-              <a:t>{</a:t>
-            </a:r>
-            <a:endParaRPr lang="en-US" sz="1200" dirty="0"/>
-          </a:p>
-          <a:p>
-            <a:pPr indent="0" marL="0">
-              <a:buNone/>
-            </a:pPr>
-            <a:r>
-              <a:rPr lang="en-US" sz="1200" dirty="0">
-                <a:solidFill>
-                  <a:srgbClr val="212121"/>
-                </a:solidFill>
-                <a:latin typeface="Consolas" pitchFamily="34" charset="0"/>
-                <a:ea typeface="Consolas" pitchFamily="34" charset="-122"/>
-                <a:cs typeface="Consolas" pitchFamily="34" charset="-120"/>
-              </a:rPr>
-              <a:t>    Console.Write(update);</a:t>
-            </a:r>
-            <a:endParaRPr lang="en-US" sz="1200" dirty="0"/>
-          </a:p>
-          <a:p>
-            <a:pPr indent="0" marL="0">
-              <a:buNone/>
-            </a:pPr>
-            <a:r>
-              <a:rPr lang="en-US" sz="1200" dirty="0">
-                <a:solidFill>
-                  <a:srgbClr val="212121"/>
+                  <a:srgbClr val="FFFFFF"/>
                 </a:solidFill>
                 <a:latin typeface="Consolas" pitchFamily="34" charset="0"/>
                 <a:ea typeface="Consolas" pitchFamily="34" charset="-122"/>
@@ -7070,11 +7972,11 @@
             <a:avLst/>
           </a:prstGeom>
           <a:solidFill>
-            <a:srgbClr val="F3F4F6"/>
+            <a:srgbClr val="1D1E22"/>
           </a:solidFill>
-          <a:ln w="6350">
+          <a:ln w="9525">
             <a:solidFill>
-              <a:srgbClr val="D1D5DB"/>
+              <a:srgbClr val="2A2B2E"/>
             </a:solidFill>
             <a:prstDash val="solid"/>
           </a:ln>
@@ -7098,7 +8000,9 @@
           <a:ln/>
         </p:spPr>
         <p:txBody>
-          <a:bodyPr wrap="square" lIns="0" tIns="0" rIns="0" bIns="0" rtlCol="0" anchor="t"/>
+          <a:bodyPr wrap="square" lIns="0" tIns="0" rIns="0" bIns="0" rtlCol="0" anchor="t">
+            <a:normAutofit/>
+          </a:bodyPr>
           <a:lstStyle/>
           <a:p>
             <a:pPr indent="0" marL="0">
@@ -7107,7 +8011,7 @@
             <a:r>
               <a:rPr lang="en-US" sz="1500" dirty="0">
                 <a:solidFill>
-                  <a:srgbClr val="212121"/>
+                  <a:srgbClr val="FFFFFF"/>
                 </a:solidFill>
                 <a:latin typeface="Consolas" pitchFamily="34" charset="0"/>
                 <a:ea typeface="Consolas" pitchFamily="34" charset="-122"/>
@@ -7130,13 +8034,69 @@
             <a:r>
               <a:rPr lang="en-US" sz="1500" dirty="0">
                 <a:solidFill>
-                  <a:srgbClr val="212121"/>
-                </a:solidFill>
-                <a:latin typeface="Consolas" pitchFamily="34" charset="0"/>
-                <a:ea typeface="Consolas" pitchFamily="34" charset="-122"/>
-                <a:cs typeface="Consolas" pitchFamily="34" charset="-120"/>
-              </a:rPr>
-              <a:t>r1 = await agent.run("My name is Alex.", session=session)</a:t>
+                  <a:srgbClr val="FFFFFF"/>
+                </a:solidFill>
+                <a:latin typeface="Consolas" pitchFamily="34" charset="0"/>
+                <a:ea typeface="Consolas" pitchFamily="34" charset="-122"/>
+                <a:cs typeface="Consolas" pitchFamily="34" charset="-120"/>
+              </a:rPr>
+              <a:t>r1 = </a:t>
+            </a:r>
+            <a:pPr indent="0" marL="0">
+              <a:buNone/>
+            </a:pPr>
+            <a:r>
+              <a:rPr lang="en-US" sz="1500" dirty="0">
+                <a:solidFill>
+                  <a:srgbClr val="A996B6"/>
+                </a:solidFill>
+                <a:latin typeface="Consolas" pitchFamily="34" charset="0"/>
+                <a:ea typeface="Consolas" pitchFamily="34" charset="-122"/>
+                <a:cs typeface="Consolas" pitchFamily="34" charset="-120"/>
+              </a:rPr>
+              <a:t>await</a:t>
+            </a:r>
+            <a:pPr indent="0" marL="0">
+              <a:buNone/>
+            </a:pPr>
+            <a:r>
+              <a:rPr lang="en-US" sz="1500" dirty="0">
+                <a:solidFill>
+                  <a:srgbClr val="FFFFFF"/>
+                </a:solidFill>
+                <a:latin typeface="Consolas" pitchFamily="34" charset="0"/>
+                <a:ea typeface="Consolas" pitchFamily="34" charset="-122"/>
+                <a:cs typeface="Consolas" pitchFamily="34" charset="-120"/>
+              </a:rPr>
+              <a:t> agent.run(</a:t>
+            </a:r>
+            <a:pPr indent="0" marL="0">
+              <a:buNone/>
+            </a:pPr>
+            <a:r>
+              <a:rPr lang="en-US" sz="1500" dirty="0">
+                <a:solidFill>
+                  <a:srgbClr val="E4C98A"/>
+                </a:solidFill>
+                <a:latin typeface="Consolas" pitchFamily="34" charset="0"/>
+                <a:ea typeface="Consolas" pitchFamily="34" charset="-122"/>
+                <a:cs typeface="Consolas" pitchFamily="34" charset="-120"/>
+              </a:rPr>
+              <a:t>"My name is Alex."</a:t>
+            </a:r>
+            <a:pPr indent="0" marL="0">
+              <a:buNone/>
+            </a:pPr>
+            <a:r>
+              <a:rPr lang="en-US" sz="1500" dirty="0">
+                <a:solidFill>
+                  <a:srgbClr val="FFFFFF"/>
+                </a:solidFill>
+                <a:latin typeface="Consolas" pitchFamily="34" charset="0"/>
+                <a:ea typeface="Consolas" pitchFamily="34" charset="-122"/>
+                <a:cs typeface="Consolas" pitchFamily="34" charset="-120"/>
+              </a:rPr>
+              <a:t>, session=session)</a:t>
             </a:r>
             <a:endParaRPr lang="en-US" sz="1500" dirty="0"/>
           </a:p>
@@ -7147,13 +8107,83 @@
             <a:r>
               <a:rPr lang="en-US" sz="1500" dirty="0">
                 <a:solidFill>
-                  <a:srgbClr val="212121"/>
-                </a:solidFill>
-                <a:latin typeface="Consolas" pitchFamily="34" charset="0"/>
-                <a:ea typeface="Consolas" pitchFamily="34" charset="-122"/>
-                <a:cs typeface="Consolas" pitchFamily="34" charset="-120"/>
-              </a:rPr>
-              <a:t>r2 = await agent.run("What's my name?", session=session)   # answer: Alex</a:t>
+                  <a:srgbClr val="FFFFFF"/>
+                </a:solidFill>
+                <a:latin typeface="Consolas" pitchFamily="34" charset="0"/>
+                <a:ea typeface="Consolas" pitchFamily="34" charset="-122"/>
+                <a:cs typeface="Consolas" pitchFamily="34" charset="-120"/>
+              </a:rPr>
+              <a:t>r2 = </a:t>
+            </a:r>
+            <a:pPr indent="0" marL="0">
+              <a:buNone/>
+            </a:pPr>
+            <a:r>
+              <a:rPr lang="en-US" sz="1500" dirty="0">
+                <a:solidFill>
+                  <a:srgbClr val="A996B6"/>
+                </a:solidFill>
+                <a:latin typeface="Consolas" pitchFamily="34" charset="0"/>
+                <a:ea typeface="Consolas" pitchFamily="34" charset="-122"/>
+                <a:cs typeface="Consolas" pitchFamily="34" charset="-120"/>
+              </a:rPr>
+              <a:t>await</a:t>
+            </a:r>
+            <a:pPr indent="0" marL="0">
+              <a:buNone/>
+            </a:pPr>
+            <a:r>
+              <a:rPr lang="en-US" sz="1500" dirty="0">
+                <a:solidFill>
+                  <a:srgbClr val="FFFFFF"/>
+                </a:solidFill>
+                <a:latin typeface="Consolas" pitchFamily="34" charset="0"/>
+                <a:ea typeface="Consolas" pitchFamily="34" charset="-122"/>
+                <a:cs typeface="Consolas" pitchFamily="34" charset="-120"/>
+              </a:rPr>
+              <a:t> agent.run(</a:t>
+            </a:r>
+            <a:pPr indent="0" marL="0">
+              <a:buNone/>
+            </a:pPr>
+            <a:r>
+              <a:rPr lang="en-US" sz="1500" dirty="0">
+                <a:solidFill>
+                  <a:srgbClr val="E4C98A"/>
+                </a:solidFill>
+                <a:latin typeface="Consolas" pitchFamily="34" charset="0"/>
+                <a:ea typeface="Consolas" pitchFamily="34" charset="-122"/>
+                <a:cs typeface="Consolas" pitchFamily="34" charset="-120"/>
+              </a:rPr>
+              <a:t>"What's my name?"</a:t>
+            </a:r>
+            <a:pPr indent="0" marL="0">
+              <a:buNone/>
+            </a:pPr>
+            <a:r>
+              <a:rPr lang="en-US" sz="1500" dirty="0">
+                <a:solidFill>
+                  <a:srgbClr val="FFFFFF"/>
+                </a:solidFill>
+                <a:latin typeface="Consolas" pitchFamily="34" charset="0"/>
+                <a:ea typeface="Consolas" pitchFamily="34" charset="-122"/>
+                <a:cs typeface="Consolas" pitchFamily="34" charset="-120"/>
+              </a:rPr>
+              <a:t>, session=session)   </a:t>
+            </a:r>
+            <a:pPr indent="0" marL="0">
+              <a:buNone/>
+            </a:pPr>
+            <a:r>
+              <a:rPr lang="en-US" sz="1500" i="1" dirty="0">
+                <a:solidFill>
+                  <a:srgbClr val="666666"/>
+                </a:solidFill>
+                <a:latin typeface="Consolas" pitchFamily="34" charset="0"/>
+                <a:ea typeface="Consolas" pitchFamily="34" charset="-122"/>
+                <a:cs typeface="Consolas" pitchFamily="34" charset="-120"/>
+              </a:rPr>
+              <a:t># answer: Alex</a:t>
             </a:r>
             <a:endParaRPr lang="en-US" sz="1500" dirty="0"/>
           </a:p>
